--- a/presentation/CPeak-Consultancy-Corporate-Presentation-EN.pptx
+++ b/presentation/CPeak-Consultancy-Corporate-Presentation-EN.pptx
@@ -515,7 +515,7 @@
           <a:p>
             <a:r>
               <a:rPr lang="en-US" dirty="0"/>
-              <a:t>Opening frame. CPeak is an independent SAP consultancy specialising end-to-end in finance modules, cloud architecture and applied AI. Founded 2021, Istanbul.</a:t>
+              <a:t>CPeak is an independent SAP consultancy specialising end to end in finance modules, cloud architecture and applied AI. Founded 2021, Istanbul.</a:t>
             </a:r>
             <a:endParaRPr lang="en-US" dirty="0"/>
           </a:p>
@@ -867,7 +867,7 @@
           <a:p>
             <a:r>
               <a:rPr lang="en-US" dirty="0"/>
-              <a:t>Reference logos as published by CPeak. No client names, figures or outcome claims attached.</a:t>
+              <a:t>Reference logos as published by CPeak. No client names or outcome claims attached.</a:t>
             </a:r>
             <a:endParaRPr lang="en-US" dirty="0"/>
           </a:p>
@@ -1043,7 +1043,7 @@
           <a:p>
             <a:r>
               <a:rPr lang="en-US" dirty="0"/>
-              <a:t>CPeak stays inside finance modules and cloud architecture rather than offering broad scope and subcontracting the difficult parts.</a:t>
+              <a:t>CPeak stays inside finance modules and cloud architecture rather than selling broad scope and subcontracting the difficult parts.</a:t>
             </a:r>
             <a:endParaRPr lang="en-US" dirty="0"/>
           </a:p>
@@ -1219,7 +1219,7 @@
           <a:p>
             <a:r>
               <a:rPr lang="en-US" dirty="0"/>
-              <a:t>The three areas meet and each informs the others — this convergence is the positioning.</a:t>
+              <a:t>The three areas meet and each informs the others — the convergence is the positioning.</a:t>
             </a:r>
             <a:endParaRPr lang="en-US" dirty="0"/>
           </a:p>
@@ -2237,7 +2237,7 @@
                 <a:ea typeface="Inter" pitchFamily="34" charset="-122"/>
                 <a:cs typeface="Inter" pitchFamily="34" charset="-120"/>
               </a:rPr>
-              <a:t>Built narrow on purpose: the decisions most expensive to reverse are the ones we do ourselves.</a:t>
+              <a:t>Independent, and deliberately narrow: the hardest decisions are the ones we do ourselves.</a:t>
             </a:r>
             <a:endParaRPr lang="en-US" sz="1400" dirty="0"/>
           </a:p>
@@ -2804,7 +2804,7 @@
                 <a:ea typeface="Inter" pitchFamily="34" charset="-122"/>
                 <a:cs typeface="Inter" pitchFamily="34" charset="-120"/>
               </a:rPr>
-              <a:t>Intelligent matching — bank and open items cleared automatically</a:t>
+              <a:t>Intelligent matching — items cleared automatically</a:t>
             </a:r>
             <a:endParaRPr lang="en-US" sz="1100" dirty="0"/>
           </a:p>
@@ -2866,7 +2866,7 @@
                 <a:ea typeface="Inter" pitchFamily="34" charset="-122"/>
                 <a:cs typeface="Inter" pitchFamily="34" charset="-120"/>
               </a:rPr>
-              <a:t>Anomaly detection — unusual postings flagged before the close</a:t>
+              <a:t>Anomaly detection — before the close, not after</a:t>
             </a:r>
             <a:endParaRPr lang="en-US" sz="1100" dirty="0"/>
           </a:p>
@@ -2928,7 +2928,7 @@
                 <a:ea typeface="Inter" pitchFamily="34" charset="-122"/>
                 <a:cs typeface="Inter" pitchFamily="34" charset="-120"/>
               </a:rPr>
-              <a:t>Predictive accounting — the effect of not-yet-final transactions</a:t>
+              <a:t>Predictive accounting — during the period, not after it</a:t>
             </a:r>
             <a:endParaRPr lang="en-US" sz="1100" dirty="0"/>
           </a:p>
@@ -3279,7 +3279,7 @@
                 <a:ea typeface="Inter" pitchFamily="34" charset="-122"/>
                 <a:cs typeface="Inter" pitchFamily="34" charset="-120"/>
               </a:rPr>
-              <a:t>Preparation of migration reconciliation checks</a:t>
+              <a:t>Migration reconciliation checks</a:t>
             </a:r>
             <a:endParaRPr lang="en-US" sz="1100" dirty="0"/>
           </a:p>
@@ -3341,7 +3341,7 @@
                 <a:ea typeface="Inter" pitchFamily="34" charset="-122"/>
                 <a:cs typeface="Inter" pitchFamily="34" charset="-120"/>
               </a:rPr>
-              <a:t>Initial versions of configuration documentation</a:t>
+              <a:t>First versions of configuration documentation</a:t>
             </a:r>
             <a:endParaRPr lang="en-US" sz="1100" dirty="0"/>
           </a:p>
@@ -3405,7 +3405,7 @@
                 <a:ea typeface="Schibsted Grotesk" pitchFamily="34" charset="-122"/>
                 <a:cs typeface="Schibsted Grotesk" pitchFamily="34" charset="-120"/>
               </a:rPr>
-              <a:t>No decision that produces a financial posting is finalised without human review — that one is not negotiable.</a:t>
+              <a:t>No decision that produces a posting is finalised without human review.</a:t>
             </a:r>
             <a:endParaRPr lang="en-US" sz="1250" dirty="0"/>
           </a:p>
@@ -3681,7 +3681,7 @@
                 <a:ea typeface="Inter" pitchFamily="34" charset="-122"/>
                 <a:cs typeface="Inter" pitchFamily="34" charset="-120"/>
               </a:rPr>
-              <a:t>Saying what we do not do matters as much as saying what we do.</a:t>
+              <a:t>What we do not do matters as much as what we do.</a:t>
             </a:r>
             <a:endParaRPr lang="en-US" sz="1250" dirty="0"/>
           </a:p>
@@ -3746,7 +3746,7 @@
                 <a:ea typeface="Schibsted Grotesk" pitchFamily="34" charset="-122"/>
                 <a:cs typeface="Schibsted Grotesk" pitchFamily="34" charset="-120"/>
               </a:rPr>
-              <a:t>It costs us work. It is also why the engagements we do take are ones we can finish.</a:t>
+              <a:t>It turns work away. It is why we finish what we take.</a:t>
             </a:r>
             <a:endParaRPr lang="en-US" sz="1500" dirty="0"/>
           </a:p>
@@ -3850,7 +3850,7 @@
                 <a:ea typeface="Inter" pitchFamily="34" charset="-122"/>
                 <a:cs typeface="Inter" pitchFamily="34" charset="-120"/>
               </a:rPr>
-              <a:t>Lead responsibility for modules outside our specialism — logistics, production planning, HR</a:t>
+              <a:t>Modules outside our specialism — logistics, production planning, HR</a:t>
             </a:r>
             <a:endParaRPr lang="en-US" sz="1200" dirty="0"/>
           </a:p>
@@ -3954,7 +3954,7 @@
                 <a:ea typeface="Inter" pitchFamily="34" charset="-122"/>
                 <a:cs typeface="Inter" pitchFamily="34" charset="-120"/>
               </a:rPr>
-              <a:t>Staff augmentation without architectural or delivery responsibility</a:t>
+              <a:t>Capacity without architectural or delivery responsibility</a:t>
             </a:r>
             <a:endParaRPr lang="en-US" sz="1200" dirty="0"/>
           </a:p>
@@ -4058,7 +4058,7 @@
                 <a:ea typeface="Inter" pitchFamily="34" charset="-122"/>
                 <a:cs typeface="Inter" pitchFamily="34" charset="-120"/>
               </a:rPr>
-              <a:t>Fixed-price commitments made before an assessment</a:t>
+              <a:t>Firm commitments made before an assessment</a:t>
             </a:r>
             <a:endParaRPr lang="en-US" sz="1200" dirty="0"/>
           </a:p>
@@ -4162,7 +4162,7 @@
                 <a:ea typeface="Inter" pitchFamily="34" charset="-122"/>
                 <a:cs typeface="Inter" pitchFamily="34" charset="-120"/>
               </a:rPr>
-              <a:t>Software development or infrastructure operations as a service</a:t>
+              <a:t>Software development or infrastructure operations</a:t>
             </a:r>
             <a:endParaRPr lang="en-US" sz="1200" dirty="0"/>
           </a:p>
@@ -4433,8 +4433,8 @@
         </p:nvSpPr>
         <p:spPr>
           <a:xfrm>
-            <a:off x="777240" y="2395728"/>
-            <a:ext cx="3310128" cy="3127248"/>
+            <a:off x="777240" y="2487168"/>
+            <a:ext cx="3310128" cy="2798064"/>
           </a:xfrm>
           <a:prstGeom prst="rect">
             <a:avLst/>
@@ -4465,7 +4465,7 @@
         </p:nvSpPr>
         <p:spPr>
           <a:xfrm>
-            <a:off x="1129284" y="2802636"/>
+            <a:off x="1129284" y="2894076"/>
             <a:ext cx="137160" cy="137160"/>
           </a:xfrm>
           <a:prstGeom prst="ellipse">
@@ -4485,7 +4485,7 @@
         </p:nvSpPr>
         <p:spPr>
           <a:xfrm>
-            <a:off x="1197864" y="3072384"/>
+            <a:off x="1197864" y="3163824"/>
             <a:ext cx="2468880" cy="384048"/>
           </a:xfrm>
           <a:prstGeom prst="rect">
@@ -4524,8 +4524,8 @@
         </p:nvSpPr>
         <p:spPr>
           <a:xfrm>
-            <a:off x="1197864" y="3547872"/>
-            <a:ext cx="2468880" cy="1097280"/>
+            <a:off x="1197864" y="3639312"/>
+            <a:ext cx="2468880" cy="731520"/>
           </a:xfrm>
           <a:prstGeom prst="rect">
             <a:avLst/>
@@ -4552,7 +4552,7 @@
                 <a:ea typeface="Inter" pitchFamily="34" charset="-122"/>
                 <a:cs typeface="Inter" pitchFamily="34" charset="-120"/>
               </a:rPr>
-              <a:t>A decision has to be taken and the evidence is missing: conversion route, cloud model, a health check.</a:t>
+              <a:t>A decision is due and the evidence is missing.</a:t>
             </a:r>
             <a:endParaRPr lang="en-US" sz="1100" dirty="0"/>
           </a:p>
@@ -4566,7 +4566,7 @@
         </p:nvSpPr>
         <p:spPr>
           <a:xfrm>
-            <a:off x="1197864" y="4700016"/>
+            <a:off x="1197864" y="4407408"/>
             <a:ext cx="2468880" cy="0"/>
           </a:xfrm>
           <a:prstGeom prst="line">
@@ -4589,8 +4589,8 @@
         </p:nvSpPr>
         <p:spPr>
           <a:xfrm>
-            <a:off x="1197864" y="4809744"/>
-            <a:ext cx="2468880" cy="475488"/>
+            <a:off x="1197864" y="4517136"/>
+            <a:ext cx="2468880" cy="457200"/>
           </a:xfrm>
           <a:prstGeom prst="rect">
             <a:avLst/>
@@ -4617,7 +4617,7 @@
                 <a:ea typeface="Inter" pitchFamily="34" charset="-122"/>
                 <a:cs typeface="Inter" pitchFamily="34" charset="-120"/>
               </a:rPr>
-              <a:t>You end it in a position to decide.</a:t>
+              <a:t>You end it able to decide.</a:t>
             </a:r>
             <a:endParaRPr lang="en-US" sz="1050" dirty="0"/>
           </a:p>
@@ -4631,7 +4631,7 @@
         </p:nvSpPr>
         <p:spPr>
           <a:xfrm>
-            <a:off x="1197864" y="5230368"/>
+            <a:off x="1197864" y="5010912"/>
             <a:ext cx="2468880" cy="237744"/>
           </a:xfrm>
           <a:prstGeom prst="rect">
@@ -4670,8 +4670,8 @@
         </p:nvSpPr>
         <p:spPr>
           <a:xfrm>
-            <a:off x="4471416" y="2395728"/>
-            <a:ext cx="3310128" cy="3127248"/>
+            <a:off x="4471416" y="2487168"/>
+            <a:ext cx="3310128" cy="2798064"/>
           </a:xfrm>
           <a:prstGeom prst="rect">
             <a:avLst/>
@@ -4702,7 +4702,7 @@
         </p:nvSpPr>
         <p:spPr>
           <a:xfrm>
-            <a:off x="4823460" y="2802636"/>
+            <a:off x="4823460" y="2894076"/>
             <a:ext cx="137160" cy="137160"/>
           </a:xfrm>
           <a:prstGeom prst="ellipse">
@@ -4722,7 +4722,7 @@
         </p:nvSpPr>
         <p:spPr>
           <a:xfrm>
-            <a:off x="4892040" y="3072384"/>
+            <a:off x="4892040" y="3163824"/>
             <a:ext cx="2468880" cy="384048"/>
           </a:xfrm>
           <a:prstGeom prst="rect">
@@ -4761,8 +4761,8 @@
         </p:nvSpPr>
         <p:spPr>
           <a:xfrm>
-            <a:off x="4892040" y="3547872"/>
-            <a:ext cx="2468880" cy="1097280"/>
+            <a:off x="4892040" y="3639312"/>
+            <a:ext cx="2468880" cy="731520"/>
           </a:xfrm>
           <a:prstGeom prst="rect">
             <a:avLst/>
@@ -4789,7 +4789,7 @@
                 <a:ea typeface="Inter" pitchFamily="34" charset="-122"/>
                 <a:cs typeface="Inter" pitchFamily="34" charset="-120"/>
               </a:rPr>
-              <a:t>The decision is taken and it needs building: a transformation, an implementation, a redesign.</a:t>
+              <a:t>The decision is taken; it needs building.</a:t>
             </a:r>
             <a:endParaRPr lang="en-US" sz="1100" dirty="0"/>
           </a:p>
@@ -4803,7 +4803,7 @@
         </p:nvSpPr>
         <p:spPr>
           <a:xfrm>
-            <a:off x="4892040" y="4700016"/>
+            <a:off x="4892040" y="4407408"/>
             <a:ext cx="2468880" cy="0"/>
           </a:xfrm>
           <a:prstGeom prst="line">
@@ -4826,8 +4826,8 @@
         </p:nvSpPr>
         <p:spPr>
           <a:xfrm>
-            <a:off x="4892040" y="4809744"/>
-            <a:ext cx="2468880" cy="475488"/>
+            <a:off x="4892040" y="4517136"/>
+            <a:ext cx="2468880" cy="457200"/>
           </a:xfrm>
           <a:prstGeom prst="rect">
             <a:avLst/>
@@ -4854,7 +4854,7 @@
                 <a:ea typeface="Inter" pitchFamily="34" charset="-122"/>
                 <a:cs typeface="Inter" pitchFamily="34" charset="-120"/>
               </a:rPr>
-              <a:t>Phased plan, weekly reporting, cutover and hypercare included.</a:t>
+              <a:t>Phased plan, weekly reporting, hypercare included.</a:t>
             </a:r>
             <a:endParaRPr lang="en-US" sz="1050" dirty="0"/>
           </a:p>
@@ -4868,7 +4868,7 @@
         </p:nvSpPr>
         <p:spPr>
           <a:xfrm>
-            <a:off x="4892040" y="5230368"/>
+            <a:off x="4892040" y="5010912"/>
             <a:ext cx="2468880" cy="237744"/>
           </a:xfrm>
           <a:prstGeom prst="rect">
@@ -4907,8 +4907,8 @@
         </p:nvSpPr>
         <p:spPr>
           <a:xfrm>
-            <a:off x="8165592" y="2395728"/>
-            <a:ext cx="3310128" cy="3127248"/>
+            <a:off x="8165592" y="2487168"/>
+            <a:ext cx="3310128" cy="2798064"/>
           </a:xfrm>
           <a:prstGeom prst="rect">
             <a:avLst/>
@@ -4939,7 +4939,7 @@
         </p:nvSpPr>
         <p:spPr>
           <a:xfrm>
-            <a:off x="8517636" y="2802636"/>
+            <a:off x="8517636" y="2894076"/>
             <a:ext cx="137160" cy="137160"/>
           </a:xfrm>
           <a:prstGeom prst="ellipse">
@@ -4959,7 +4959,7 @@
         </p:nvSpPr>
         <p:spPr>
           <a:xfrm>
-            <a:off x="8586216" y="3072384"/>
+            <a:off x="8586216" y="3163824"/>
             <a:ext cx="2468880" cy="384048"/>
           </a:xfrm>
           <a:prstGeom prst="rect">
@@ -4998,8 +4998,8 @@
         </p:nvSpPr>
         <p:spPr>
           <a:xfrm>
-            <a:off x="8586216" y="3547872"/>
-            <a:ext cx="2468880" cy="1097280"/>
+            <a:off x="8586216" y="3639312"/>
+            <a:ext cx="2468880" cy="731520"/>
           </a:xfrm>
           <a:prstGeom prst="rect">
             <a:avLst/>
@@ -5026,7 +5026,7 @@
                 <a:ea typeface="Inter" pitchFamily="34" charset="-122"/>
                 <a:cs typeface="Inter" pitchFamily="34" charset="-120"/>
               </a:rPr>
-              <a:t>Someone else runs the programme and depth is needed in one place: a review, a second opinion, one workstream.</a:t>
+              <a:t>Someone else runs it and one area needs depth.</a:t>
             </a:r>
             <a:endParaRPr lang="en-US" sz="1100" dirty="0"/>
           </a:p>
@@ -5040,7 +5040,7 @@
         </p:nvSpPr>
         <p:spPr>
           <a:xfrm>
-            <a:off x="8586216" y="4700016"/>
+            <a:off x="8586216" y="4407408"/>
             <a:ext cx="2468880" cy="0"/>
           </a:xfrm>
           <a:prstGeom prst="line">
@@ -5063,8 +5063,8 @@
         </p:nvSpPr>
         <p:spPr>
           <a:xfrm>
-            <a:off x="8586216" y="4809744"/>
-            <a:ext cx="2468880" cy="475488"/>
+            <a:off x="8586216" y="4517136"/>
+            <a:ext cx="2468880" cy="457200"/>
           </a:xfrm>
           <a:prstGeom prst="rect">
             <a:avLst/>
@@ -5091,7 +5091,7 @@
                 <a:ea typeface="Inter" pitchFamily="34" charset="-122"/>
                 <a:cs typeface="Inter" pitchFamily="34" charset="-120"/>
               </a:rPr>
-              <a:t>Narrow scope, agreed output, not extended past its usefulness.</a:t>
+              <a:t>Narrow scope, agreed output.</a:t>
             </a:r>
             <a:endParaRPr lang="en-US" sz="1050" dirty="0"/>
           </a:p>
@@ -5105,7 +5105,7 @@
         </p:nvSpPr>
         <p:spPr>
           <a:xfrm>
-            <a:off x="8586216" y="5230368"/>
+            <a:off x="8586216" y="5010912"/>
             <a:ext cx="2468880" cy="237744"/>
           </a:xfrm>
           <a:prstGeom prst="rect">
@@ -5144,7 +5144,7 @@
         </p:nvSpPr>
         <p:spPr>
           <a:xfrm>
-            <a:off x="777240" y="5705856"/>
+            <a:off x="777240" y="5669280"/>
             <a:ext cx="10424160" cy="274320"/>
           </a:xfrm>
           <a:prstGeom prst="rect">
@@ -5169,7 +5169,7 @@
                 <a:ea typeface="Inter" pitchFamily="34" charset="-122"/>
                 <a:cs typeface="Inter" pitchFamily="34" charset="-120"/>
               </a:rPr>
-              <a:t>Not every need calls for a full programme — and we say so when it does not.</a:t>
+              <a:t>Not every need calls for a full programme.</a:t>
             </a:r>
             <a:endParaRPr lang="en-US" sz="1200" dirty="0"/>
           </a:p>
@@ -5445,7 +5445,7 @@
                 <a:ea typeface="Inter" pitchFamily="34" charset="-122"/>
                 <a:cs typeface="Inter" pitchFamily="34" charset="-120"/>
               </a:rPr>
-              <a:t>More than ten years across SAP finance modules and cloud architecture.</a:t>
+              <a:t>Ten years across SAP finance modules and cloud architecture.</a:t>
             </a:r>
             <a:endParaRPr lang="en-US" sz="1200" dirty="0"/>
           </a:p>
@@ -6205,7 +6205,7 @@
                 <a:ea typeface="Inter" pitchFamily="34" charset="-122"/>
                 <a:cs typeface="Inter" pitchFamily="34" charset="-120"/>
               </a:rPr>
-              <a:t>A small, senior team. No one’s learning curve on your budget.</a:t>
+              <a:t>The consultant you meet is the one who does the work.</a:t>
             </a:r>
             <a:endParaRPr lang="en-US" sz="1100" dirty="0"/>
           </a:p>
@@ -6331,7 +6331,7 @@
                 <a:ea typeface="Inter" pitchFamily="34" charset="-122"/>
                 <a:cs typeface="Inter" pitchFamily="34" charset="-120"/>
               </a:rPr>
-              <a:t>Finance and cloud architecture only. The difficult part is not subcontracted.</a:t>
+              <a:t>Finance and cloud architecture. The hard part stays with us.</a:t>
             </a:r>
             <a:endParaRPr lang="en-US" sz="1100" dirty="0"/>
           </a:p>
@@ -6457,7 +6457,7 @@
                 <a:ea typeface="Inter" pitchFamily="34" charset="-122"/>
                 <a:cs typeface="Inter" pitchFamily="34" charset="-120"/>
               </a:rPr>
-              <a:t>We compare, you decide, the reasoning stays on paper.</a:t>
+              <a:t>We compare, you decide, the reasoning stays written.</a:t>
             </a:r>
             <a:endParaRPr lang="en-US" sz="1100" dirty="0"/>
           </a:p>
@@ -7188,7 +7188,7 @@
                 <a:ea typeface="Inter" pitchFamily="34" charset="-122"/>
                 <a:cs typeface="Inter" pitchFamily="34" charset="-120"/>
               </a:rPr>
-              <a:t>Sell broad scope, then source a specialist for each area — and the most consequential finance decision reaches the person who has seen it least often.</a:t>
+              <a:t>Broad scope sold, a specialist sourced per area — and the hardest decision lands with whoever has seen it least.</a:t>
             </a:r>
             <a:endParaRPr lang="en-US" sz="1300" dirty="0"/>
           </a:p>
@@ -7253,7 +7253,7 @@
                 <a:ea typeface="Schibsted Grotesk" pitchFamily="34" charset="-122"/>
                 <a:cs typeface="Schibsted Grotesk" pitchFamily="34" charset="-120"/>
               </a:rPr>
-              <a:t>If we take an engagement, it means we are not subcontracting the difficult part of it.</a:t>
+              <a:t>If we take an engagement, we are not subcontracting the difficult part of it.</a:t>
             </a:r>
             <a:endParaRPr lang="en-US" sz="1600" dirty="0"/>
           </a:p>
@@ -8327,7 +8327,7 @@
                 <a:ea typeface="Inter" pitchFamily="34" charset="-122"/>
                 <a:cs typeface="Inter" pitchFamily="34" charset="-120"/>
               </a:rPr>
-              <a:t>Enterprise structure. Conversion route. Cloud model. Settled in the opening weeks — paid for over the next decade.</a:t>
+              <a:t>Enterprise structure. Conversion route. Cloud model. Decided in the first weeks, lived with for a decade.</a:t>
             </a:r>
             <a:endParaRPr lang="en-US" sz="1300" dirty="0"/>
           </a:p>
@@ -8392,7 +8392,7 @@
                 <a:ea typeface="Schibsted Grotesk" pitchFamily="34" charset="-122"/>
                 <a:cs typeface="Schibsted Grotesk" pitchFamily="34" charset="-120"/>
               </a:rPr>
-              <a:t>Advice given without measurement is a guess — and the cost of that guess falls to you.</a:t>
+              <a:t>Advice given without measurement is a guess — and you are the one who lives with it.</a:t>
             </a:r>
             <a:endParaRPr lang="en-US" sz="1500" dirty="0"/>
           </a:p>
@@ -8431,7 +8431,7 @@
                 <a:ea typeface="IBM Plex Mono" pitchFamily="34" charset="-122"/>
                 <a:cs typeface="IBM Plex Mono" pitchFamily="34" charset="-120"/>
               </a:rPr>
-              <a:t>COST OF REVERSING THE DECISION</a:t>
+              <a:t>HOW HARD THE DECISION IS TO REVERSE</a:t>
             </a:r>
             <a:endParaRPr lang="en-US" sz="900" dirty="0"/>
           </a:p>
@@ -8819,7 +8819,7 @@
                 <a:ea typeface="Inter" pitchFamily="34" charset="-122"/>
                 <a:cs typeface="Inter" pitchFamily="34" charset="-120"/>
               </a:rPr>
-              <a:t>paid for here</a:t>
+              <a:t>lived with here</a:t>
             </a:r>
             <a:endParaRPr lang="en-US" sz="1000" dirty="0"/>
           </a:p>
@@ -9092,7 +9092,7 @@
                 <a:ea typeface="Inter" pitchFamily="34" charset="-122"/>
                 <a:cs typeface="Inter" pitchFamily="34" charset="-120"/>
               </a:rPr>
-              <a:t>Most SAP problems are not module problems. They sit in the seams between these three.</a:t>
+              <a:t>Most SAP problems live in the seams between these three.</a:t>
             </a:r>
             <a:endParaRPr lang="en-US" sz="1250" dirty="0"/>
           </a:p>
@@ -9193,7 +9193,7 @@
                 <a:ea typeface="Schibsted Grotesk" pitchFamily="34" charset="-122"/>
                 <a:cs typeface="Schibsted Grotesk" pitchFamily="34" charset="-120"/>
               </a:rPr>
-              <a:t>How the business actually closes its books</a:t>
+              <a:t>How the books actually close</a:t>
             </a:r>
             <a:endParaRPr lang="en-US" sz="1500" dirty="0"/>
           </a:p>
@@ -9359,7 +9359,7 @@
                 <a:ea typeface="Schibsted Grotesk" pitchFamily="34" charset="-122"/>
                 <a:cs typeface="Schibsted Grotesk" pitchFamily="34" charset="-120"/>
               </a:rPr>
-              <a:t>The ground the process has to run on</a:t>
+              <a:t>The ground it has to run on</a:t>
             </a:r>
             <a:endParaRPr lang="en-US" sz="1500" dirty="0"/>
           </a:p>
@@ -9525,7 +9525,7 @@
                 <a:ea typeface="Schibsted Grotesk" pitchFamily="34" charset="-122"/>
                 <a:cs typeface="Schibsted Grotesk" pitchFamily="34" charset="-120"/>
               </a:rPr>
-              <a:t>What can safely stop being done by hand</a:t>
+              <a:t>What can stop being manual</a:t>
             </a:r>
             <a:endParaRPr lang="en-US" sz="1500" dirty="0"/>
           </a:p>
@@ -10598,7 +10598,7 @@
                 <a:ea typeface="Schibsted Grotesk" pitchFamily="34" charset="-122"/>
                 <a:cs typeface="Schibsted Grotesk" pitchFamily="34" charset="-120"/>
               </a:rPr>
-              <a:t>Usage statistics. Data quality. Custom code inventory. Close durations measured step by step.</a:t>
+              <a:t>Usage statistics. Data quality. Custom code. Close durations.</a:t>
             </a:r>
             <a:endParaRPr lang="en-US" sz="1500" dirty="0"/>
           </a:p>
@@ -10640,7 +10640,7 @@
                 <a:ea typeface="Inter" pitchFamily="34" charset="-122"/>
                 <a:cs typeface="Inter" pitchFamily="34" charset="-120"/>
               </a:rPr>
-              <a:t>What the system does, not what the documentation says it does. The distance between the two is usually the problem itself.</a:t>
+              <a:t>What the system does — not what the documentation says. The gap between them is usually the problem.</a:t>
             </a:r>
             <a:endParaRPr lang="en-US" sz="1150" dirty="0"/>
           </a:p>
@@ -10705,7 +10705,7 @@
                 <a:ea typeface="Inter" pitchFamily="34" charset="-122"/>
                 <a:cs typeface="Inter" pitchFamily="34" charset="-120"/>
               </a:rPr>
-              <a:t>Nearly every engagement opens with an assessment</a:t>
+              <a:t>Every engagement opens with an assessment</a:t>
             </a:r>
             <a:endParaRPr lang="en-US" sz="1050" dirty="0"/>
           </a:p>
@@ -11172,7 +11172,7 @@
                 <a:ea typeface="Inter" pitchFamily="34" charset="-122"/>
                 <a:cs typeface="Inter" pitchFamily="34" charset="-120"/>
               </a:rPr>
-              <a:t>Speed and a predictable run cost — for a core that cannot be modified.</a:t>
+              <a:t>Speed and low operational overhead — for a core you cannot modify.</a:t>
             </a:r>
             <a:endParaRPr lang="en-US" sz="1150" dirty="0"/>
           </a:p>
@@ -11599,7 +11599,7 @@
                 <a:ea typeface="Inter" pitchFamily="34" charset="-122"/>
                 <a:cs typeface="Inter" pitchFamily="34" charset="-120"/>
               </a:rPr>
-              <a:t>Neither is the advanced version of the other. We put both costs and both constraints side by side; the decision stays yours, and the moment to take it is before signing.</a:t>
+              <a:t>Neither is the advanced version of the other. We put both constraints side by side; the decision stays yours.</a:t>
             </a:r>
             <a:endParaRPr lang="en-US" sz="1150" dirty="0"/>
           </a:p>
@@ -11875,7 +11875,7 @@
                 <a:ea typeface="Inter" pitchFamily="34" charset="-122"/>
                 <a:cs typeface="Inter" pitchFamily="34" charset="-120"/>
               </a:rPr>
-              <a:t>What each stage delivers is agreed before it begins. At every gate the decision to continue is taken again.</a:t>
+              <a:t>Every stage’s output is agreed before it starts. At each gate the decision is taken again.</a:t>
             </a:r>
             <a:endParaRPr lang="en-US" sz="1150" dirty="0"/>
           </a:p>
@@ -12862,7 +12862,7 @@
                 <a:ea typeface="Inter" pitchFamily="34" charset="-122"/>
                 <a:cs typeface="Inter" pitchFamily="34" charset="-120"/>
               </a:rPr>
-              <a:t>First close run with your team, improvement backlog</a:t>
+              <a:t>First close run together, improvement backlog</a:t>
             </a:r>
             <a:endParaRPr lang="en-US" sz="1050" dirty="0"/>
           </a:p>
@@ -13340,7 +13340,7 @@
                 <a:ea typeface="Inter" pitchFamily="34" charset="-122"/>
                 <a:cs typeface="Inter" pitchFamily="34" charset="-120"/>
               </a:rPr>
-              <a:t>Depth in FI and CO, not breadth beside it</a:t>
+              <a:t>Depth in FI and CO</a:t>
             </a:r>
             <a:endParaRPr lang="en-US" sz="1150" dirty="0"/>
           </a:p>
@@ -13382,7 +13382,7 @@
                 <a:ea typeface="Inter" pitchFamily="34" charset="-122"/>
                 <a:cs typeface="Inter" pitchFamily="34" charset="-120"/>
               </a:rPr>
-              <a:t>Rebuild the close to run in parallel, not in sequence</a:t>
+              <a:t>Rebuild the close to run in parallel</a:t>
             </a:r>
             <a:endParaRPr lang="en-US" sz="1150" dirty="0"/>
           </a:p>
@@ -13424,7 +13424,7 @@
                 <a:ea typeface="Schibsted Grotesk" pitchFamily="34" charset="-122"/>
                 <a:cs typeface="Schibsted Grotesk" pitchFamily="34" charset="-120"/>
               </a:rPr>
-              <a:t>A close that is predictable, not merely shorter</a:t>
+              <a:t>A close that is predictable, not just shorter</a:t>
             </a:r>
             <a:endParaRPr lang="en-US" sz="1300" dirty="0"/>
           </a:p>
@@ -13571,7 +13571,7 @@
                 <a:ea typeface="Inter" pitchFamily="34" charset="-122"/>
                 <a:cs typeface="Inter" pitchFamily="34" charset="-120"/>
               </a:rPr>
-              <a:t>Compare your processes to standard scope, before the contract</a:t>
+              <a:t>Measure your processes against standard scope</a:t>
             </a:r>
             <a:endParaRPr lang="en-US" sz="1150" dirty="0"/>
           </a:p>
@@ -13613,7 +13613,7 @@
                 <a:ea typeface="Schibsted Grotesk" pitchFamily="34" charset="-122"/>
                 <a:cs typeface="Schibsted Grotesk" pitchFamily="34" charset="-120"/>
               </a:rPr>
-              <a:t>A model decision that survives the middle of the project</a:t>
+              <a:t>A model decision that survives the project</a:t>
             </a:r>
             <a:endParaRPr lang="en-US" sz="1300" dirty="0"/>
           </a:p>
@@ -13718,7 +13718,7 @@
                 <a:ea typeface="Inter" pitchFamily="34" charset="-122"/>
                 <a:cs typeface="Inter" pitchFamily="34" charset="-120"/>
               </a:rPr>
-              <a:t>AI put where the hours actually are</a:t>
+              <a:t>AI where the hours actually are</a:t>
             </a:r>
             <a:endParaRPr lang="en-US" sz="1150" dirty="0"/>
           </a:p>
@@ -13760,7 +13760,7 @@
                 <a:ea typeface="Inter" pitchFamily="34" charset="-122"/>
                 <a:cs typeface="Inter" pitchFamily="34" charset="-120"/>
               </a:rPr>
-              <a:t>Calibrate thresholds on your own data, write the oversight rules down</a:t>
+              <a:t>Calibrate thresholds on your own data</a:t>
             </a:r>
             <a:endParaRPr lang="en-US" sz="1150" dirty="0"/>
           </a:p>
@@ -13802,7 +13802,7 @@
                 <a:ea typeface="Schibsted Grotesk" pitchFamily="34" charset="-122"/>
                 <a:cs typeface="Schibsted Grotesk" pitchFamily="34" charset="-120"/>
               </a:rPr>
-              <a:t>The team moves from matching items to reviewing exceptions</a:t>
+              <a:t>The team reviews exceptions instead of matching items</a:t>
             </a:r>
             <a:endParaRPr lang="en-US" sz="1300" dirty="0"/>
           </a:p>
@@ -14236,7 +14236,7 @@
                 <a:ea typeface="Inter" pitchFamily="34" charset="-122"/>
                 <a:cs typeface="Inter" pitchFamily="34" charset="-120"/>
               </a:rPr>
-              <a:t>FI, CO, PA and PS rebuilt as one process architecture, not five parallel ones.</a:t>
+              <a:t>FI, CO, PA and PS as one process architecture, not five.</a:t>
             </a:r>
             <a:endParaRPr lang="en-US" sz="1050" dirty="0"/>
           </a:p>
@@ -14556,7 +14556,7 @@
                 <a:ea typeface="Inter" pitchFamily="34" charset="-122"/>
                 <a:cs typeface="Inter" pitchFamily="34" charset="-120"/>
               </a:rPr>
-              <a:t>How much of your process fits standard scope, established before you commit.</a:t>
+              <a:t>How much of your process fits standard scope.</a:t>
             </a:r>
             <a:endParaRPr lang="en-US" sz="1050" dirty="0"/>
           </a:p>
@@ -14716,7 +14716,7 @@
                 <a:ea typeface="Inter" pitchFamily="34" charset="-122"/>
                 <a:cs typeface="Inter" pitchFamily="34" charset="-120"/>
               </a:rPr>
-              <a:t>Architecture, migration and the boundaries a RISE contract leaves open.</a:t>
+              <a:t>Architecture, migration, and the boundaries RISE leaves open.</a:t>
             </a:r>
             <a:endParaRPr lang="en-US" sz="1050" dirty="0"/>
           </a:p>
@@ -14876,7 +14876,7 @@
                 <a:ea typeface="Inter" pitchFamily="34" charset="-122"/>
                 <a:cs typeface="Inter" pitchFamily="34" charset="-120"/>
               </a:rPr>
-              <a:t>The capabilities you have the data and the discipline to support — sequenced.</a:t>
+              <a:t>The capabilities your data and discipline can actually support.</a:t>
             </a:r>
             <a:endParaRPr lang="en-US" sz="1050" dirty="0"/>
           </a:p>

--- a/presentation/CPeak-Consultancy-Corporate-Presentation-EN.pptx
+++ b/presentation/CPeak-Consultancy-Corporate-Presentation-EN.pptx
@@ -1659,7 +1659,7 @@
           <a:p>
             <a:r>
               <a:rPr lang="en-US" dirty="0"/>
-              <a:t>The five capability areas, reframed as the question a client arrives with.</a:t>
+              <a:t>The five capability areas.</a:t>
             </a:r>
             <a:endParaRPr lang="en-US" dirty="0"/>
           </a:p>
@@ -2127,8 +2127,8 @@
         </p:nvSpPr>
         <p:spPr>
           <a:xfrm>
-            <a:off x="777240" y="2377440"/>
-            <a:ext cx="8595360" cy="2011680"/>
+            <a:off x="777240" y="2542032"/>
+            <a:ext cx="8595360" cy="1645920"/>
           </a:xfrm>
           <a:prstGeom prst="rect">
             <a:avLst/>
@@ -2155,7 +2155,7 @@
                 <a:ea typeface="Schibsted Grotesk" pitchFamily="34" charset="-122"/>
                 <a:cs typeface="Schibsted Grotesk" pitchFamily="34" charset="-120"/>
               </a:rPr>
-              <a:t>Finance is the</a:t>
+              <a:t>Finance-led</a:t>
             </a:r>
             <a:endParaRPr lang="en-US" sz="4400" dirty="0"/>
           </a:p>
@@ -2175,27 +2175,7 @@
                 <a:ea typeface="Schibsted Grotesk" pitchFamily="34" charset="-122"/>
                 <a:cs typeface="Schibsted Grotesk" pitchFamily="34" charset="-120"/>
               </a:rPr>
-              <a:t>least forgiving</a:t>
-            </a:r>
-            <a:endParaRPr lang="en-US" sz="4400" dirty="0"/>
-          </a:p>
-          <a:p>
-            <a:pPr indent="0" marL="0">
-              <a:lnSpc>
-                <a:spcPts val="5100"/>
-              </a:lnSpc>
-              <a:buNone/>
-            </a:pPr>
-            <a:r>
-              <a:rPr lang="en-US" sz="4400" b="1" dirty="0">
-                <a:solidFill>
-                  <a:srgbClr val="FFFFFF"/>
-                </a:solidFill>
-                <a:latin typeface="Schibsted Grotesk" pitchFamily="34" charset="0"/>
-                <a:ea typeface="Schibsted Grotesk" pitchFamily="34" charset="-122"/>
-                <a:cs typeface="Schibsted Grotesk" pitchFamily="34" charset="-120"/>
-              </a:rPr>
-              <a:t>part of an ERP.</a:t>
+              <a:t>SAP transformation.</a:t>
             </a:r>
             <a:endParaRPr lang="en-US" sz="4400" dirty="0"/>
           </a:p>
@@ -2489,7 +2469,7 @@
         <p:spPr>
           <a:xfrm>
             <a:off x="777240" y="960120"/>
-            <a:ext cx="9601200" cy="1463040"/>
+            <a:ext cx="10424160" cy="1463040"/>
           </a:xfrm>
           <a:prstGeom prst="rect">
             <a:avLst/>
@@ -2503,12 +2483,12 @@
           <a:p>
             <a:pPr indent="0" marL="0">
               <a:lnSpc>
-                <a:spcPts val="3828"/>
+                <a:spcPts val="4176"/>
               </a:lnSpc>
               <a:buNone/>
             </a:pPr>
             <a:r>
-              <a:rPr lang="en-US" sz="3300" b="1" dirty="0">
+              <a:rPr lang="en-US" sz="3600" b="1" dirty="0">
                 <a:solidFill>
                   <a:srgbClr val="FFFFFF"/>
                 </a:solidFill>
@@ -2516,29 +2496,9 @@
                 <a:ea typeface="Schibsted Grotesk" pitchFamily="34" charset="-122"/>
                 <a:cs typeface="Schibsted Grotesk" pitchFamily="34" charset="-120"/>
               </a:rPr>
-              <a:t>We use AI twice: inside your</a:t>
-            </a:r>
-            <a:endParaRPr lang="en-US" sz="3300" dirty="0"/>
-          </a:p>
-          <a:p>
-            <a:pPr indent="0" marL="0">
-              <a:lnSpc>
-                <a:spcPts val="3828"/>
-              </a:lnSpc>
-              <a:buNone/>
-            </a:pPr>
-            <a:r>
-              <a:rPr lang="en-US" sz="3300" b="1" dirty="0">
-                <a:solidFill>
-                  <a:srgbClr val="FFFFFF"/>
-                </a:solidFill>
-                <a:latin typeface="Schibsted Grotesk" pitchFamily="34" charset="0"/>
-                <a:ea typeface="Schibsted Grotesk" pitchFamily="34" charset="-122"/>
-                <a:cs typeface="Schibsted Grotesk" pitchFamily="34" charset="-120"/>
-              </a:rPr>
-              <a:t>processes, and inside our own.</a:t>
-            </a:r>
-            <a:endParaRPr lang="en-US" sz="3300" dirty="0"/>
+              <a:t>AI in the system and in delivery.</a:t>
+            </a:r>
+            <a:endParaRPr lang="en-US" sz="3600" dirty="0"/>
           </a:p>
         </p:txBody>
       </p:sp>
@@ -2653,7 +2613,7 @@
         </p:nvSpPr>
         <p:spPr>
           <a:xfrm>
-            <a:off x="777240" y="2340864"/>
+            <a:off x="777240" y="2395728"/>
             <a:ext cx="4754880" cy="237744"/>
           </a:xfrm>
           <a:prstGeom prst="rect">
@@ -2692,7 +2652,7 @@
         </p:nvSpPr>
         <p:spPr>
           <a:xfrm>
-            <a:off x="777240" y="2651760"/>
+            <a:off x="777240" y="2706624"/>
             <a:ext cx="4754880" cy="365760"/>
           </a:xfrm>
           <a:prstGeom prst="rect">
@@ -2731,7 +2691,7 @@
         </p:nvSpPr>
         <p:spPr>
           <a:xfrm>
-            <a:off x="777240" y="3145536"/>
+            <a:off x="777240" y="3200400"/>
             <a:ext cx="4754880" cy="0"/>
           </a:xfrm>
           <a:prstGeom prst="line">
@@ -2756,7 +2716,7 @@
         </p:nvSpPr>
         <p:spPr>
           <a:xfrm>
-            <a:off x="777240" y="3355848"/>
+            <a:off x="777240" y="3465576"/>
             <a:ext cx="91440" cy="91440"/>
           </a:xfrm>
           <a:prstGeom prst="ellipse">
@@ -2776,7 +2736,7 @@
         </p:nvSpPr>
         <p:spPr>
           <a:xfrm>
-            <a:off x="1051560" y="3291840"/>
+            <a:off x="1051560" y="3401568"/>
             <a:ext cx="4480560" cy="566928"/>
           </a:xfrm>
           <a:prstGeom prst="rect">
@@ -2818,7 +2778,7 @@
         </p:nvSpPr>
         <p:spPr>
           <a:xfrm>
-            <a:off x="777240" y="3995928"/>
+            <a:off x="777240" y="4251960"/>
             <a:ext cx="91440" cy="91440"/>
           </a:xfrm>
           <a:prstGeom prst="ellipse">
@@ -2838,7 +2798,7 @@
         </p:nvSpPr>
         <p:spPr>
           <a:xfrm>
-            <a:off x="1051560" y="3931920"/>
+            <a:off x="1051560" y="4187952"/>
             <a:ext cx="4480560" cy="566928"/>
           </a:xfrm>
           <a:prstGeom prst="rect">
@@ -2880,7 +2840,7 @@
         </p:nvSpPr>
         <p:spPr>
           <a:xfrm>
-            <a:off x="777240" y="4636008"/>
+            <a:off x="777240" y="5038344"/>
             <a:ext cx="91440" cy="91440"/>
           </a:xfrm>
           <a:prstGeom prst="ellipse">
@@ -2900,7 +2860,7 @@
         </p:nvSpPr>
         <p:spPr>
           <a:xfrm>
-            <a:off x="1051560" y="4572000"/>
+            <a:off x="1051560" y="4974336"/>
             <a:ext cx="4480560" cy="566928"/>
           </a:xfrm>
           <a:prstGeom prst="rect">
@@ -2936,75 +2896,13 @@
       </p:sp>
       <p:sp>
         <p:nvSpPr>
-          <p:cNvPr id="17" name="Shape 14"/>
-          <p:cNvSpPr/>
-          <p:nvPr/>
-        </p:nvSpPr>
-        <p:spPr>
-          <a:xfrm>
-            <a:off x="777240" y="5276088"/>
-            <a:ext cx="91440" cy="91440"/>
-          </a:xfrm>
-          <a:prstGeom prst="ellipse">
-            <a:avLst/>
-          </a:prstGeom>
-          <a:solidFill>
-            <a:srgbClr val="E8B33A"/>
-          </a:solidFill>
-          <a:ln/>
-        </p:spPr>
-      </p:sp>
-      <p:sp>
-        <p:nvSpPr>
-          <p:cNvPr id="18" name="Text 15"/>
-          <p:cNvSpPr txBox="1"/>
-          <p:nvPr/>
-        </p:nvSpPr>
-        <p:spPr>
-          <a:xfrm>
-            <a:off x="1051560" y="5212080"/>
-            <a:ext cx="4480560" cy="566928"/>
-          </a:xfrm>
-          <a:prstGeom prst="rect">
-            <a:avLst/>
-          </a:prstGeom>
-          <a:noFill/>
-          <a:ln/>
-        </p:spPr>
-        <p:txBody>
-          <a:bodyPr wrap="square" lIns="0" tIns="0" rIns="0" bIns="0" rtlCol="0" anchor="t"/>
-          <a:lstStyle/>
-          <a:p>
-            <a:pPr indent="0" marL="0">
-              <a:lnSpc>
-                <a:spcPts val="1700"/>
-              </a:lnSpc>
-              <a:buNone/>
-            </a:pPr>
-            <a:r>
-              <a:rPr lang="en-US" sz="1100" dirty="0">
-                <a:solidFill>
-                  <a:srgbClr val="FFFFFF"/>
-                </a:solidFill>
-                <a:latin typeface="Inter" pitchFamily="34" charset="0"/>
-                <a:ea typeface="Inter" pitchFamily="34" charset="-122"/>
-                <a:cs typeface="Inter" pitchFamily="34" charset="-120"/>
-              </a:rPr>
-              <a:t>Joule — natural-language querying and navigation</a:t>
-            </a:r>
-            <a:endParaRPr lang="en-US" sz="1100" dirty="0"/>
-          </a:p>
-        </p:txBody>
-      </p:sp>
-      <p:sp>
-        <p:nvSpPr>
-          <p:cNvPr id="19" name="Text 16"/>
-          <p:cNvSpPr txBox="1"/>
-          <p:nvPr/>
-        </p:nvSpPr>
-        <p:spPr>
-          <a:xfrm>
-            <a:off x="6659575" y="2340864"/>
+          <p:cNvPr id="17" name="Text 14"/>
+          <p:cNvSpPr txBox="1"/>
+          <p:nvPr/>
+        </p:nvSpPr>
+        <p:spPr>
+          <a:xfrm>
+            <a:off x="6659575" y="2395728"/>
             <a:ext cx="4754880" cy="237744"/>
           </a:xfrm>
           <a:prstGeom prst="rect">
@@ -3037,13 +2935,13 @@
       </p:sp>
       <p:sp>
         <p:nvSpPr>
-          <p:cNvPr id="20" name="Text 17"/>
-          <p:cNvSpPr txBox="1"/>
-          <p:nvPr/>
-        </p:nvSpPr>
-        <p:spPr>
-          <a:xfrm>
-            <a:off x="6659575" y="2651760"/>
+          <p:cNvPr id="18" name="Text 15"/>
+          <p:cNvSpPr txBox="1"/>
+          <p:nvPr/>
+        </p:nvSpPr>
+        <p:spPr>
+          <a:xfrm>
+            <a:off x="6659575" y="2706624"/>
             <a:ext cx="4754880" cy="365760"/>
           </a:xfrm>
           <a:prstGeom prst="rect">
@@ -3076,13 +2974,13 @@
       </p:sp>
       <p:sp>
         <p:nvSpPr>
-          <p:cNvPr id="21" name="Shape 18"/>
+          <p:cNvPr id="19" name="Shape 16"/>
           <p:cNvSpPr/>
           <p:nvPr/>
         </p:nvSpPr>
         <p:spPr>
           <a:xfrm>
-            <a:off x="6659575" y="3145536"/>
+            <a:off x="6659575" y="3200400"/>
             <a:ext cx="4754880" cy="0"/>
           </a:xfrm>
           <a:prstGeom prst="line">
@@ -3101,13 +2999,13 @@
       </p:sp>
       <p:sp>
         <p:nvSpPr>
-          <p:cNvPr id="22" name="Shape 19"/>
+          <p:cNvPr id="20" name="Shape 17"/>
           <p:cNvSpPr/>
           <p:nvPr/>
         </p:nvSpPr>
         <p:spPr>
           <a:xfrm>
-            <a:off x="6659575" y="3355848"/>
+            <a:off x="6659575" y="3465576"/>
             <a:ext cx="91440" cy="91440"/>
           </a:xfrm>
           <a:prstGeom prst="ellipse">
@@ -3121,13 +3019,13 @@
       </p:sp>
       <p:sp>
         <p:nvSpPr>
-          <p:cNvPr id="23" name="Text 20"/>
-          <p:cNvSpPr txBox="1"/>
-          <p:nvPr/>
-        </p:nvSpPr>
-        <p:spPr>
-          <a:xfrm>
-            <a:off x="6933895" y="3291840"/>
+          <p:cNvPr id="21" name="Text 18"/>
+          <p:cNvSpPr txBox="1"/>
+          <p:nvPr/>
+        </p:nvSpPr>
+        <p:spPr>
+          <a:xfrm>
+            <a:off x="6933895" y="3401568"/>
             <a:ext cx="4480560" cy="566928"/>
           </a:xfrm>
           <a:prstGeom prst="rect">
@@ -3163,13 +3061,13 @@
       </p:sp>
       <p:sp>
         <p:nvSpPr>
-          <p:cNvPr id="24" name="Shape 21"/>
+          <p:cNvPr id="22" name="Shape 19"/>
           <p:cNvSpPr/>
           <p:nvPr/>
         </p:nvSpPr>
         <p:spPr>
           <a:xfrm>
-            <a:off x="6659575" y="3995928"/>
+            <a:off x="6659575" y="4251960"/>
             <a:ext cx="91440" cy="91440"/>
           </a:xfrm>
           <a:prstGeom prst="ellipse">
@@ -3183,13 +3081,13 @@
       </p:sp>
       <p:sp>
         <p:nvSpPr>
-          <p:cNvPr id="25" name="Text 22"/>
-          <p:cNvSpPr txBox="1"/>
-          <p:nvPr/>
-        </p:nvSpPr>
-        <p:spPr>
-          <a:xfrm>
-            <a:off x="6933895" y="3931920"/>
+          <p:cNvPr id="23" name="Text 20"/>
+          <p:cNvSpPr txBox="1"/>
+          <p:nvPr/>
+        </p:nvSpPr>
+        <p:spPr>
+          <a:xfrm>
+            <a:off x="6933895" y="4187952"/>
             <a:ext cx="4480560" cy="566928"/>
           </a:xfrm>
           <a:prstGeom prst="rect">
@@ -3225,13 +3123,13 @@
       </p:sp>
       <p:sp>
         <p:nvSpPr>
-          <p:cNvPr id="26" name="Shape 23"/>
+          <p:cNvPr id="24" name="Shape 21"/>
           <p:cNvSpPr/>
           <p:nvPr/>
         </p:nvSpPr>
         <p:spPr>
           <a:xfrm>
-            <a:off x="6659575" y="4636008"/>
+            <a:off x="6659575" y="5038344"/>
             <a:ext cx="91440" cy="91440"/>
           </a:xfrm>
           <a:prstGeom prst="ellipse">
@@ -3245,13 +3143,13 @@
       </p:sp>
       <p:sp>
         <p:nvSpPr>
-          <p:cNvPr id="27" name="Text 24"/>
-          <p:cNvSpPr txBox="1"/>
-          <p:nvPr/>
-        </p:nvSpPr>
-        <p:spPr>
-          <a:xfrm>
-            <a:off x="6933895" y="4572000"/>
+          <p:cNvPr id="25" name="Text 22"/>
+          <p:cNvSpPr txBox="1"/>
+          <p:nvPr/>
+        </p:nvSpPr>
+        <p:spPr>
+          <a:xfrm>
+            <a:off x="6933895" y="4974336"/>
             <a:ext cx="4480560" cy="566928"/>
           </a:xfrm>
           <a:prstGeom prst="rect">
@@ -3287,75 +3185,13 @@
       </p:sp>
       <p:sp>
         <p:nvSpPr>
-          <p:cNvPr id="28" name="Shape 25"/>
+          <p:cNvPr id="26" name="Shape 23"/>
           <p:cNvSpPr/>
           <p:nvPr/>
         </p:nvSpPr>
         <p:spPr>
           <a:xfrm>
-            <a:off x="6659575" y="5276088"/>
-            <a:ext cx="91440" cy="91440"/>
-          </a:xfrm>
-          <a:prstGeom prst="ellipse">
-            <a:avLst/>
-          </a:prstGeom>
-          <a:solidFill>
-            <a:srgbClr val="E8B33A"/>
-          </a:solidFill>
-          <a:ln/>
-        </p:spPr>
-      </p:sp>
-      <p:sp>
-        <p:nvSpPr>
-          <p:cNvPr id="29" name="Text 26"/>
-          <p:cNvSpPr txBox="1"/>
-          <p:nvPr/>
-        </p:nvSpPr>
-        <p:spPr>
-          <a:xfrm>
-            <a:off x="6933895" y="5212080"/>
-            <a:ext cx="4480560" cy="566928"/>
-          </a:xfrm>
-          <a:prstGeom prst="rect">
-            <a:avLst/>
-          </a:prstGeom>
-          <a:noFill/>
-          <a:ln/>
-        </p:spPr>
-        <p:txBody>
-          <a:bodyPr wrap="square" lIns="0" tIns="0" rIns="0" bIns="0" rtlCol="0" anchor="t"/>
-          <a:lstStyle/>
-          <a:p>
-            <a:pPr indent="0" marL="0">
-              <a:lnSpc>
-                <a:spcPts val="1700"/>
-              </a:lnSpc>
-              <a:buNone/>
-            </a:pPr>
-            <a:r>
-              <a:rPr lang="en-US" sz="1100" dirty="0">
-                <a:solidFill>
-                  <a:srgbClr val="FFFFFF"/>
-                </a:solidFill>
-                <a:latin typeface="Inter" pitchFamily="34" charset="0"/>
-                <a:ea typeface="Inter" pitchFamily="34" charset="-122"/>
-                <a:cs typeface="Inter" pitchFamily="34" charset="-120"/>
-              </a:rPr>
-              <a:t>First versions of configuration documentation</a:t>
-            </a:r>
-            <a:endParaRPr lang="en-US" sz="1100" dirty="0"/>
-          </a:p>
-        </p:txBody>
-      </p:sp>
-      <p:sp>
-        <p:nvSpPr>
-          <p:cNvPr id="30" name="Shape 27"/>
-          <p:cNvSpPr/>
-          <p:nvPr/>
-        </p:nvSpPr>
-        <p:spPr>
-          <a:xfrm>
-            <a:off x="777240" y="5687568"/>
+            <a:off x="777240" y="5449824"/>
             <a:ext cx="10637215" cy="0"/>
           </a:xfrm>
           <a:prstGeom prst="line">
@@ -3374,13 +3210,13 @@
       </p:sp>
       <p:sp>
         <p:nvSpPr>
-          <p:cNvPr id="31" name="Text 28"/>
-          <p:cNvSpPr txBox="1"/>
-          <p:nvPr/>
-        </p:nvSpPr>
-        <p:spPr>
-          <a:xfrm>
-            <a:off x="777240" y="5815584"/>
+          <p:cNvPr id="27" name="Text 24"/>
+          <p:cNvSpPr txBox="1"/>
+          <p:nvPr/>
+        </p:nvSpPr>
+        <p:spPr>
+          <a:xfrm>
+            <a:off x="777240" y="5577840"/>
             <a:ext cx="10607040" cy="310896"/>
           </a:xfrm>
           <a:prstGeom prst="rect">
@@ -3491,7 +3327,7 @@
         <p:spPr>
           <a:xfrm>
             <a:off x="777240" y="960120"/>
-            <a:ext cx="5852160" cy="1463040"/>
+            <a:ext cx="5120640" cy="1463040"/>
           </a:xfrm>
           <a:prstGeom prst="rect">
             <a:avLst/>
@@ -3505,12 +3341,12 @@
           <a:p>
             <a:pPr indent="0" marL="0">
               <a:lnSpc>
-                <a:spcPts val="4176"/>
+                <a:spcPts val="4640"/>
               </a:lnSpc>
               <a:buNone/>
             </a:pPr>
             <a:r>
-              <a:rPr lang="en-US" sz="3600" b="1" dirty="0">
+              <a:rPr lang="en-US" sz="4000" b="1" dirty="0">
                 <a:solidFill>
                   <a:srgbClr val="0E1620"/>
                 </a:solidFill>
@@ -3518,29 +3354,9 @@
                 <a:ea typeface="Schibsted Grotesk" pitchFamily="34" charset="-122"/>
                 <a:cs typeface="Schibsted Grotesk" pitchFamily="34" charset="-120"/>
               </a:rPr>
-              <a:t>A specialism is defined</a:t>
-            </a:r>
-            <a:endParaRPr lang="en-US" sz="3600" dirty="0"/>
-          </a:p>
-          <a:p>
-            <a:pPr indent="0" marL="0">
-              <a:lnSpc>
-                <a:spcPts val="4176"/>
-              </a:lnSpc>
-              <a:buNone/>
-            </a:pPr>
-            <a:r>
-              <a:rPr lang="en-US" sz="3600" b="1" dirty="0">
-                <a:solidFill>
-                  <a:srgbClr val="0E1620"/>
-                </a:solidFill>
-                <a:latin typeface="Schibsted Grotesk" pitchFamily="34" charset="0"/>
-                <a:ea typeface="Schibsted Grotesk" pitchFamily="34" charset="-122"/>
-                <a:cs typeface="Schibsted Grotesk" pitchFamily="34" charset="-120"/>
-              </a:rPr>
-              <a:t>by what it excludes.</a:t>
-            </a:r>
-            <a:endParaRPr lang="en-US" sz="3600" dirty="0"/>
+              <a:t>Clear boundaries.</a:t>
+            </a:r>
+            <a:endParaRPr lang="en-US" sz="4000" dirty="0"/>
           </a:p>
         </p:txBody>
       </p:sp>
@@ -4256,7 +4072,7 @@
                 <a:ea typeface="IBM Plex Mono" pitchFamily="34" charset="-122"/>
                 <a:cs typeface="IBM Plex Mono" pitchFamily="34" charset="-120"/>
               </a:rPr>
-              <a:t>WAYS IN</a:t>
+              <a:t>ENGAGEMENT MODELS</a:t>
             </a:r>
             <a:endParaRPr lang="en-US" sz="950" dirty="0"/>
           </a:p>
@@ -4271,7 +4087,7 @@
         <p:spPr>
           <a:xfrm>
             <a:off x="777240" y="960120"/>
-            <a:ext cx="8686800" cy="1463040"/>
+            <a:ext cx="10058400" cy="1463040"/>
           </a:xfrm>
           <a:prstGeom prst="rect">
             <a:avLst/>
@@ -4285,12 +4101,12 @@
           <a:p>
             <a:pPr indent="0" marL="0">
               <a:lnSpc>
-                <a:spcPts val="3944"/>
+                <a:spcPts val="4640"/>
               </a:lnSpc>
               <a:buNone/>
             </a:pPr>
             <a:r>
-              <a:rPr lang="en-US" sz="3400" b="1" dirty="0">
+              <a:rPr lang="en-US" sz="4000" b="1" dirty="0">
                 <a:solidFill>
                   <a:srgbClr val="0E1620"/>
                 </a:solidFill>
@@ -4298,29 +4114,9 @@
                 <a:ea typeface="Schibsted Grotesk" pitchFamily="34" charset="-122"/>
                 <a:cs typeface="Schibsted Grotesk" pitchFamily="34" charset="-120"/>
               </a:rPr>
-              <a:t>Three shapes. Which one fits</a:t>
-            </a:r>
-            <a:endParaRPr lang="en-US" sz="3400" dirty="0"/>
-          </a:p>
-          <a:p>
-            <a:pPr indent="0" marL="0">
-              <a:lnSpc>
-                <a:spcPts val="3944"/>
-              </a:lnSpc>
-              <a:buNone/>
-            </a:pPr>
-            <a:r>
-              <a:rPr lang="en-US" sz="3400" b="1" dirty="0">
-                <a:solidFill>
-                  <a:srgbClr val="0E1620"/>
-                </a:solidFill>
-                <a:latin typeface="Schibsted Grotesk" pitchFamily="34" charset="0"/>
-                <a:ea typeface="Schibsted Grotesk" pitchFamily="34" charset="-122"/>
-                <a:cs typeface="Schibsted Grotesk" pitchFamily="34" charset="-120"/>
-              </a:rPr>
-              <a:t>is clear in one conversation.</a:t>
-            </a:r>
-            <a:endParaRPr lang="en-US" sz="3400" dirty="0"/>
+              <a:t>Three engagement models.</a:t>
+            </a:r>
+            <a:endParaRPr lang="en-US" sz="4000" dirty="0"/>
           </a:p>
         </p:txBody>
       </p:sp>
@@ -5269,12 +5065,12 @@
           <a:p>
             <a:pPr indent="0" marL="0">
               <a:lnSpc>
-                <a:spcPts val="3828"/>
+                <a:spcPts val="3944"/>
               </a:lnSpc>
               <a:buNone/>
             </a:pPr>
             <a:r>
-              <a:rPr lang="en-US" sz="3300" b="1" dirty="0">
+              <a:rPr lang="en-US" sz="3400" b="1" dirty="0">
                 <a:solidFill>
                   <a:srgbClr val="0E1620"/>
                 </a:solidFill>
@@ -5282,19 +5078,19 @@
                 <a:ea typeface="Schibsted Grotesk" pitchFamily="34" charset="-122"/>
                 <a:cs typeface="Schibsted Grotesk" pitchFamily="34" charset="-120"/>
               </a:rPr>
-              <a:t>The landscapes the</a:t>
-            </a:r>
-            <a:endParaRPr lang="en-US" sz="3300" dirty="0"/>
+              <a:t>Experience in</a:t>
+            </a:r>
+            <a:endParaRPr lang="en-US" sz="3400" dirty="0"/>
           </a:p>
           <a:p>
             <a:pPr indent="0" marL="0">
               <a:lnSpc>
-                <a:spcPts val="3828"/>
+                <a:spcPts val="3944"/>
               </a:lnSpc>
               <a:buNone/>
             </a:pPr>
             <a:r>
-              <a:rPr lang="en-US" sz="3300" b="1" dirty="0">
+              <a:rPr lang="en-US" sz="3400" b="1" dirty="0">
                 <a:solidFill>
                   <a:srgbClr val="0E1620"/>
                 </a:solidFill>
@@ -5302,9 +5098,9 @@
                 <a:ea typeface="Schibsted Grotesk" pitchFamily="34" charset="-122"/>
                 <a:cs typeface="Schibsted Grotesk" pitchFamily="34" charset="-120"/>
               </a:rPr>
-              <a:t>experience comes from.</a:t>
-            </a:r>
-            <a:endParaRPr lang="en-US" sz="3300" dirty="0"/>
+              <a:t>complex landscapes.</a:t>
+            </a:r>
+            <a:endParaRPr lang="en-US" sz="3400" dirty="0"/>
           </a:p>
         </p:txBody>
       </p:sp>
@@ -5417,7 +5213,7 @@
         </p:nvSpPr>
         <p:spPr>
           <a:xfrm>
-            <a:off x="7589520" y="1060704"/>
+            <a:off x="7589520" y="1097280"/>
             <a:ext cx="3794760" cy="1097280"/>
           </a:xfrm>
           <a:prstGeom prst="rect">
@@ -6046,12 +5842,12 @@
           <a:p>
             <a:pPr indent="0" marL="0">
               <a:lnSpc>
-                <a:spcPts val="4400"/>
+                <a:spcPts val="4800"/>
               </a:lnSpc>
               <a:buNone/>
             </a:pPr>
             <a:r>
-              <a:rPr lang="en-US" sz="3600" b="1" dirty="0">
+              <a:rPr lang="en-US" sz="4000" b="1" dirty="0">
                 <a:solidFill>
                   <a:srgbClr val="FFFFFF"/>
                 </a:solidFill>
@@ -6059,29 +5855,9 @@
                 <a:ea typeface="Schibsted Grotesk" pitchFamily="34" charset="-122"/>
                 <a:cs typeface="Schibsted Grotesk" pitchFamily="34" charset="-120"/>
               </a:rPr>
-              <a:t>The people named in the proposal</a:t>
-            </a:r>
-            <a:endParaRPr lang="en-US" sz="3600" dirty="0"/>
-          </a:p>
-          <a:p>
-            <a:pPr indent="0" marL="0">
-              <a:lnSpc>
-                <a:spcPts val="4400"/>
-              </a:lnSpc>
-              <a:buNone/>
-            </a:pPr>
-            <a:r>
-              <a:rPr lang="en-US" sz="3600" b="1" dirty="0">
-                <a:solidFill>
-                  <a:srgbClr val="FFFFFF"/>
-                </a:solidFill>
-                <a:latin typeface="Schibsted Grotesk" pitchFamily="34" charset="0"/>
-                <a:ea typeface="Schibsted Grotesk" pitchFamily="34" charset="-122"/>
-                <a:cs typeface="Schibsted Grotesk" pitchFamily="34" charset="-120"/>
-              </a:rPr>
-              <a:t>are the people who turn up.</a:t>
-            </a:r>
-            <a:endParaRPr lang="en-US" sz="3600" dirty="0"/>
+              <a:t>Senior consultants, start to finish.</a:t>
+            </a:r>
+            <a:endParaRPr lang="en-US" sz="4000" dirty="0"/>
           </a:p>
         </p:txBody>
       </p:sp>
@@ -7012,12 +6788,12 @@
           <a:p>
             <a:pPr indent="0" marL="0">
               <a:lnSpc>
-                <a:spcPts val="4408"/>
+                <a:spcPts val="4640"/>
               </a:lnSpc>
               <a:buNone/>
             </a:pPr>
             <a:r>
-              <a:rPr lang="en-US" sz="3800" b="1" dirty="0">
+              <a:rPr lang="en-US" sz="4000" b="1" dirty="0">
                 <a:solidFill>
                   <a:srgbClr val="0E1620"/>
                 </a:solidFill>
@@ -7025,29 +6801,9 @@
                 <a:ea typeface="Schibsted Grotesk" pitchFamily="34" charset="-122"/>
                 <a:cs typeface="Schibsted Grotesk" pitchFamily="34" charset="-120"/>
               </a:rPr>
-              <a:t>Depth is a choice,</a:t>
-            </a:r>
-            <a:endParaRPr lang="en-US" sz="3800" dirty="0"/>
-          </a:p>
-          <a:p>
-            <a:pPr indent="0" marL="0">
-              <a:lnSpc>
-                <a:spcPts val="4408"/>
-              </a:lnSpc>
-              <a:buNone/>
-            </a:pPr>
-            <a:r>
-              <a:rPr lang="en-US" sz="3800" b="1" dirty="0">
-                <a:solidFill>
-                  <a:srgbClr val="0E1620"/>
-                </a:solidFill>
-                <a:latin typeface="Schibsted Grotesk" pitchFamily="34" charset="0"/>
-                <a:ea typeface="Schibsted Grotesk" pitchFamily="34" charset="-122"/>
-                <a:cs typeface="Schibsted Grotesk" pitchFamily="34" charset="-120"/>
-              </a:rPr>
-              <a:t>not a limitation.</a:t>
-            </a:r>
-            <a:endParaRPr lang="en-US" sz="3800" dirty="0"/>
+              <a:t>Depth over breadth.</a:t>
+            </a:r>
+            <a:endParaRPr lang="en-US" sz="4000" dirty="0"/>
           </a:p>
         </p:txBody>
       </p:sp>
@@ -7924,88 +7680,6 @@
                 <a:cs typeface="Inter" pitchFamily="34" charset="-120"/>
               </a:rPr>
               <a:t>Cloud model, measured not advocated</a:t>
-            </a:r>
-            <a:endParaRPr lang="en-US" sz="1000" dirty="0"/>
-          </a:p>
-        </p:txBody>
-      </p:sp>
-      <p:sp>
-        <p:nvSpPr>
-          <p:cNvPr id="35" name="Shape 33"/>
-          <p:cNvSpPr/>
-          <p:nvPr/>
-        </p:nvSpPr>
-        <p:spPr>
-          <a:xfrm>
-            <a:off x="7607808" y="5321808"/>
-            <a:ext cx="201168" cy="0"/>
-          </a:xfrm>
-          <a:prstGeom prst="line">
-            <a:avLst/>
-          </a:prstGeom>
-          <a:noFill/>
-          <a:ln w="12700">
-            <a:solidFill>
-              <a:srgbClr val="11676A"/>
-            </a:solidFill>
-            <a:prstDash val="solid"/>
-          </a:ln>
-        </p:spPr>
-      </p:sp>
-      <p:sp>
-        <p:nvSpPr>
-          <p:cNvPr id="36" name="Shape 34"/>
-          <p:cNvSpPr/>
-          <p:nvPr/>
-        </p:nvSpPr>
-        <p:spPr>
-          <a:xfrm>
-            <a:off x="7566660" y="5280660"/>
-            <a:ext cx="82296" cy="82296"/>
-          </a:xfrm>
-          <a:prstGeom prst="ellipse">
-            <a:avLst/>
-          </a:prstGeom>
-          <a:solidFill>
-            <a:srgbClr val="11676A"/>
-          </a:solidFill>
-          <a:ln/>
-        </p:spPr>
-      </p:sp>
-      <p:sp>
-        <p:nvSpPr>
-          <p:cNvPr id="37" name="Text 35"/>
-          <p:cNvSpPr txBox="1"/>
-          <p:nvPr/>
-        </p:nvSpPr>
-        <p:spPr>
-          <a:xfrm>
-            <a:off x="7936992" y="5198364"/>
-            <a:ext cx="3017520" cy="274320"/>
-          </a:xfrm>
-          <a:prstGeom prst="rect">
-            <a:avLst/>
-          </a:prstGeom>
-          <a:noFill/>
-          <a:ln/>
-        </p:spPr>
-        <p:txBody>
-          <a:bodyPr wrap="square" lIns="0" tIns="0" rIns="0" bIns="0" rtlCol="0" anchor="ctr"/>
-          <a:lstStyle/>
-          <a:p>
-            <a:pPr indent="0" marL="0">
-              <a:buNone/>
-            </a:pPr>
-            <a:r>
-              <a:rPr lang="en-US" sz="1000" dirty="0">
-                <a:solidFill>
-                  <a:srgbClr val="0E1620"/>
-                </a:solidFill>
-                <a:latin typeface="Inter" pitchFamily="34" charset="0"/>
-                <a:ea typeface="Inter" pitchFamily="34" charset="-122"/>
-                <a:cs typeface="Inter" pitchFamily="34" charset="-120"/>
-              </a:rPr>
-              <a:t>Automation calibrated on your own data</a:t>
             </a:r>
             <a:endParaRPr lang="en-US" sz="1000" dirty="0"/>
           </a:p>
@@ -8100,7 +7774,7 @@
                 <a:ea typeface="IBM Plex Mono" pitchFamily="34" charset="-122"/>
                 <a:cs typeface="IBM Plex Mono" pitchFamily="34" charset="-120"/>
               </a:rPr>
-              <a:t>THE PROBLEM WE ARE HIRED INTO</a:t>
+              <a:t>THE CHALLENGE</a:t>
             </a:r>
             <a:endParaRPr lang="en-US" sz="950" dirty="0"/>
           </a:p>
@@ -8115,7 +7789,7 @@
         <p:spPr>
           <a:xfrm>
             <a:off x="777240" y="960120"/>
-            <a:ext cx="5943600" cy="1463040"/>
+            <a:ext cx="5760720" cy="1463040"/>
           </a:xfrm>
           <a:prstGeom prst="rect">
             <a:avLst/>
@@ -8129,12 +7803,12 @@
           <a:p>
             <a:pPr indent="0" marL="0">
               <a:lnSpc>
-                <a:spcPts val="3480"/>
+                <a:spcPts val="3944"/>
               </a:lnSpc>
               <a:buNone/>
             </a:pPr>
             <a:r>
-              <a:rPr lang="en-US" sz="3000" b="1" dirty="0">
+              <a:rPr lang="en-US" sz="3400" b="1" dirty="0">
                 <a:solidFill>
                   <a:srgbClr val="FFFFFF"/>
                 </a:solidFill>
@@ -8142,19 +7816,19 @@
                 <a:ea typeface="Schibsted Grotesk" pitchFamily="34" charset="-122"/>
                 <a:cs typeface="Schibsted Grotesk" pitchFamily="34" charset="-120"/>
               </a:rPr>
-              <a:t>The most expensive decisions</a:t>
-            </a:r>
-            <a:endParaRPr lang="en-US" sz="3000" dirty="0"/>
+              <a:t>Early decisions,</a:t>
+            </a:r>
+            <a:endParaRPr lang="en-US" sz="3400" dirty="0"/>
           </a:p>
           <a:p>
             <a:pPr indent="0" marL="0">
               <a:lnSpc>
-                <a:spcPts val="3480"/>
+                <a:spcPts val="3944"/>
               </a:lnSpc>
               <a:buNone/>
             </a:pPr>
             <a:r>
-              <a:rPr lang="en-US" sz="3000" b="1" dirty="0">
+              <a:rPr lang="en-US" sz="3400" b="1" dirty="0">
                 <a:solidFill>
                   <a:srgbClr val="FFFFFF"/>
                 </a:solidFill>
@@ -8162,29 +7836,9 @@
                 <a:ea typeface="Schibsted Grotesk" pitchFamily="34" charset="-122"/>
                 <a:cs typeface="Schibsted Grotesk" pitchFamily="34" charset="-120"/>
               </a:rPr>
-              <a:t>are taken first — when</a:t>
-            </a:r>
-            <a:endParaRPr lang="en-US" sz="3000" dirty="0"/>
-          </a:p>
-          <a:p>
-            <a:pPr indent="0" marL="0">
-              <a:lnSpc>
-                <a:spcPts val="3480"/>
-              </a:lnSpc>
-              <a:buNone/>
-            </a:pPr>
-            <a:r>
-              <a:rPr lang="en-US" sz="3000" b="1" dirty="0">
-                <a:solidFill>
-                  <a:srgbClr val="FFFFFF"/>
-                </a:solidFill>
-                <a:latin typeface="Schibsted Grotesk" pitchFamily="34" charset="0"/>
-                <a:ea typeface="Schibsted Grotesk" pitchFamily="34" charset="-122"/>
-                <a:cs typeface="Schibsted Grotesk" pitchFamily="34" charset="-120"/>
-              </a:rPr>
-              <a:t>the least is known.</a:t>
-            </a:r>
-            <a:endParaRPr lang="en-US" sz="3000" dirty="0"/>
+              <a:t>lasting consequences.</a:t>
+            </a:r>
+            <a:endParaRPr lang="en-US" sz="3400" dirty="0"/>
           </a:p>
         </p:txBody>
       </p:sp>
@@ -8890,7 +8544,7 @@
                 <a:ea typeface="IBM Plex Mono" pitchFamily="34" charset="-122"/>
                 <a:cs typeface="IBM Plex Mono" pitchFamily="34" charset="-120"/>
               </a:rPr>
-              <a:t>WHERE WE STAND</a:t>
+              <a:t>OUR PRACTICE</a:t>
             </a:r>
             <a:endParaRPr lang="en-US" sz="950" dirty="0"/>
           </a:p>
@@ -8905,7 +8559,7 @@
         <p:spPr>
           <a:xfrm>
             <a:off x="777240" y="960120"/>
-            <a:ext cx="8046720" cy="1463040"/>
+            <a:ext cx="10058400" cy="1463040"/>
           </a:xfrm>
           <a:prstGeom prst="rect">
             <a:avLst/>
@@ -8919,12 +8573,12 @@
           <a:p>
             <a:pPr indent="0" marL="0">
               <a:lnSpc>
-                <a:spcPts val="3944"/>
+                <a:spcPts val="4640"/>
               </a:lnSpc>
               <a:buNone/>
             </a:pPr>
             <a:r>
-              <a:rPr lang="en-US" sz="3400" b="1" dirty="0">
+              <a:rPr lang="en-US" sz="4000" b="1" dirty="0">
                 <a:solidFill>
                   <a:srgbClr val="0E1620"/>
                 </a:solidFill>
@@ -8932,29 +8586,9 @@
                 <a:ea typeface="Schibsted Grotesk" pitchFamily="34" charset="-122"/>
                 <a:cs typeface="Schibsted Grotesk" pitchFamily="34" charset="-120"/>
               </a:rPr>
-              <a:t>Three disciplines that only</a:t>
-            </a:r>
-            <a:endParaRPr lang="en-US" sz="3400" dirty="0"/>
-          </a:p>
-          <a:p>
-            <a:pPr indent="0" marL="0">
-              <a:lnSpc>
-                <a:spcPts val="3944"/>
-              </a:lnSpc>
-              <a:buNone/>
-            </a:pPr>
-            <a:r>
-              <a:rPr lang="en-US" sz="3400" b="1" dirty="0">
-                <a:solidFill>
-                  <a:srgbClr val="0E1620"/>
-                </a:solidFill>
-                <a:latin typeface="Schibsted Grotesk" pitchFamily="34" charset="0"/>
-                <a:ea typeface="Schibsted Grotesk" pitchFamily="34" charset="-122"/>
-                <a:cs typeface="Schibsted Grotesk" pitchFamily="34" charset="-120"/>
-              </a:rPr>
-              <a:t>make sense together.</a:t>
-            </a:r>
-            <a:endParaRPr lang="en-US" sz="3400" dirty="0"/>
+              <a:t>Three disciplines, one practice.</a:t>
+            </a:r>
+            <a:endParaRPr lang="en-US" sz="4000" dirty="0"/>
           </a:p>
         </p:txBody>
       </p:sp>
@@ -9766,7 +9400,7 @@
                 <a:ea typeface="IBM Plex Mono" pitchFamily="34" charset="-122"/>
                 <a:cs typeface="IBM Plex Mono" pitchFamily="34" charset="-120"/>
               </a:rPr>
-              <a:t>OPERATING PRINCIPLE</a:t>
+              <a:t>METHOD</a:t>
             </a:r>
             <a:endParaRPr lang="en-US" sz="950" dirty="0"/>
           </a:p>
@@ -9795,12 +9429,12 @@
           <a:p>
             <a:pPr indent="0" marL="0">
               <a:lnSpc>
-                <a:spcPts val="4176"/>
+                <a:spcPts val="4640"/>
               </a:lnSpc>
               <a:buNone/>
             </a:pPr>
             <a:r>
-              <a:rPr lang="en-US" sz="3600" b="1" dirty="0">
+              <a:rPr lang="en-US" sz="4000" b="1" dirty="0">
                 <a:solidFill>
                   <a:srgbClr val="0E1620"/>
                 </a:solidFill>
@@ -9808,29 +9442,9 @@
                 <a:ea typeface="Schibsted Grotesk" pitchFamily="34" charset="-122"/>
                 <a:cs typeface="Schibsted Grotesk" pitchFamily="34" charset="-120"/>
               </a:rPr>
-              <a:t>We read the system before we</a:t>
-            </a:r>
-            <a:endParaRPr lang="en-US" sz="3600" dirty="0"/>
-          </a:p>
-          <a:p>
-            <a:pPr indent="0" marL="0">
-              <a:lnSpc>
-                <a:spcPts val="4176"/>
-              </a:lnSpc>
-              <a:buNone/>
-            </a:pPr>
-            <a:r>
-              <a:rPr lang="en-US" sz="3600" b="1" dirty="0">
-                <a:solidFill>
-                  <a:srgbClr val="0E1620"/>
-                </a:solidFill>
-                <a:latin typeface="Schibsted Grotesk" pitchFamily="34" charset="0"/>
-                <a:ea typeface="Schibsted Grotesk" pitchFamily="34" charset="-122"/>
-                <a:cs typeface="Schibsted Grotesk" pitchFamily="34" charset="-120"/>
-              </a:rPr>
-              <a:t>recommend anything.</a:t>
-            </a:r>
-            <a:endParaRPr lang="en-US" sz="3600" dirty="0"/>
+              <a:t>Evidence before advice.</a:t>
+            </a:r>
+            <a:endParaRPr lang="en-US" sz="4000" dirty="0"/>
           </a:p>
         </p:txBody>
       </p:sp>
@@ -10862,7 +10476,7 @@
                 <a:ea typeface="IBM Plex Mono" pitchFamily="34" charset="-122"/>
                 <a:cs typeface="IBM Plex Mono" pitchFamily="34" charset="-120"/>
               </a:rPr>
-              <a:t>THE DECISION WE WILL NOT MAKE FOR YOU</a:t>
+              <a:t>CLOUD MODEL</a:t>
             </a:r>
             <a:endParaRPr lang="en-US" sz="950" dirty="0"/>
           </a:p>
@@ -10877,7 +10491,7 @@
         <p:spPr>
           <a:xfrm>
             <a:off x="777240" y="960120"/>
-            <a:ext cx="9601200" cy="1463040"/>
+            <a:ext cx="10058400" cy="1463040"/>
           </a:xfrm>
           <a:prstGeom prst="rect">
             <a:avLst/>
@@ -10891,12 +10505,12 @@
           <a:p>
             <a:pPr indent="0" marL="0">
               <a:lnSpc>
-                <a:spcPts val="3944"/>
+                <a:spcPts val="4640"/>
               </a:lnSpc>
               <a:buNone/>
             </a:pPr>
             <a:r>
-              <a:rPr lang="en-US" sz="3400" b="1" dirty="0">
+              <a:rPr lang="en-US" sz="4000" b="1" dirty="0">
                 <a:solidFill>
                   <a:srgbClr val="FFFFFF"/>
                 </a:solidFill>
@@ -10904,29 +10518,9 @@
                 <a:ea typeface="Schibsted Grotesk" pitchFamily="34" charset="-122"/>
                 <a:cs typeface="Schibsted Grotesk" pitchFamily="34" charset="-120"/>
               </a:rPr>
-              <a:t>We do not sell a cloud model.</a:t>
-            </a:r>
-            <a:endParaRPr lang="en-US" sz="3400" dirty="0"/>
-          </a:p>
-          <a:p>
-            <a:pPr indent="0" marL="0">
-              <a:lnSpc>
-                <a:spcPts val="3944"/>
-              </a:lnSpc>
-              <a:buNone/>
-            </a:pPr>
-            <a:r>
-              <a:rPr lang="en-US" sz="3400" b="1" dirty="0">
-                <a:solidFill>
-                  <a:srgbClr val="FFFFFF"/>
-                </a:solidFill>
-                <a:latin typeface="Schibsted Grotesk" pitchFamily="34" charset="0"/>
-                <a:ea typeface="Schibsted Grotesk" pitchFamily="34" charset="-122"/>
-                <a:cs typeface="Schibsted Grotesk" pitchFamily="34" charset="-120"/>
-              </a:rPr>
-              <a:t>We measure which one you are.</a:t>
-            </a:r>
-            <a:endParaRPr lang="en-US" sz="3400" dirty="0"/>
+              <a:t>A measured cloud decision.</a:t>
+            </a:r>
+            <a:endParaRPr lang="en-US" sz="4000" dirty="0"/>
           </a:p>
         </p:txBody>
       </p:sp>
@@ -11506,66 +11100,7 @@
       </p:sp>
       <p:sp>
         <p:nvSpPr>
-          <p:cNvPr id="21" name="Shape 18"/>
-          <p:cNvSpPr/>
-          <p:nvPr/>
-        </p:nvSpPr>
-        <p:spPr>
-          <a:xfrm>
-            <a:off x="5474056" y="3657600"/>
-            <a:ext cx="1243584" cy="384048"/>
-          </a:xfrm>
-          <a:prstGeom prst="rect">
-            <a:avLst/>
-          </a:prstGeom>
-          <a:solidFill>
-            <a:srgbClr val="003F82"/>
-          </a:solidFill>
-          <a:ln/>
-        </p:spPr>
-      </p:sp>
-      <p:sp>
-        <p:nvSpPr>
-          <p:cNvPr id="22" name="Text 19"/>
-          <p:cNvSpPr txBox="1"/>
-          <p:nvPr/>
-        </p:nvSpPr>
-        <p:spPr>
-          <a:xfrm>
-            <a:off x="5474056" y="3657600"/>
-            <a:ext cx="1243584" cy="384048"/>
-          </a:xfrm>
-          <a:prstGeom prst="rect">
-            <a:avLst/>
-          </a:prstGeom>
-          <a:noFill/>
-          <a:ln/>
-        </p:spPr>
-        <p:txBody>
-          <a:bodyPr wrap="square" lIns="0" tIns="0" rIns="0" bIns="0" rtlCol="0" anchor="ctr"/>
-          <a:lstStyle/>
-          <a:p>
-            <a:pPr algn="ctr" indent="0" marL="0">
-              <a:buNone/>
-            </a:pPr>
-            <a:r>
-              <a:rPr lang="en-US" sz="900" spc="140" kern="0" dirty="0">
-                <a:solidFill>
-                  <a:srgbClr val="E8B33A"/>
-                </a:solidFill>
-                <a:latin typeface="IBM Plex Mono" pitchFamily="34" charset="0"/>
-                <a:ea typeface="IBM Plex Mono" pitchFamily="34" charset="-122"/>
-                <a:cs typeface="IBM Plex Mono" pitchFamily="34" charset="-120"/>
-              </a:rPr>
-              <a:t>THE TRADE</a:t>
-            </a:r>
-            <a:endParaRPr lang="en-US" sz="900" dirty="0"/>
-          </a:p>
-        </p:txBody>
-      </p:sp>
-      <p:sp>
-        <p:nvSpPr>
-          <p:cNvPr id="23" name="Text 20"/>
+          <p:cNvPr id="21" name="Text 18"/>
           <p:cNvSpPr txBox="1"/>
           <p:nvPr/>
         </p:nvSpPr>
@@ -11670,7 +11205,7 @@
                 <a:ea typeface="IBM Plex Mono" pitchFamily="34" charset="-122"/>
                 <a:cs typeface="IBM Plex Mono" pitchFamily="34" charset="-120"/>
               </a:rPr>
-              <a:t>HOW THE WORK MOVES</a:t>
+              <a:t>DELIVERY MODEL</a:t>
             </a:r>
             <a:endParaRPr lang="en-US" sz="950" dirty="0"/>
           </a:p>
@@ -11712,7 +11247,7 @@
                 <a:ea typeface="Schibsted Grotesk" pitchFamily="34" charset="-122"/>
                 <a:cs typeface="Schibsted Grotesk" pitchFamily="34" charset="-120"/>
               </a:rPr>
-              <a:t>Nothing starts until the</a:t>
+              <a:t>Four stages,</a:t>
             </a:r>
             <a:endParaRPr lang="en-US" sz="3600" dirty="0"/>
           </a:p>
@@ -11732,7 +11267,7 @@
                 <a:ea typeface="Schibsted Grotesk" pitchFamily="34" charset="-122"/>
                 <a:cs typeface="Schibsted Grotesk" pitchFamily="34" charset="-120"/>
               </a:rPr>
-              <a:t>last thing has closed.</a:t>
+              <a:t>four deliverables.</a:t>
             </a:r>
             <a:endParaRPr lang="en-US" sz="3600" dirty="0"/>
           </a:p>
@@ -12995,7 +12530,7 @@
                 <a:ea typeface="IBM Plex Mono" pitchFamily="34" charset="-122"/>
                 <a:cs typeface="IBM Plex Mono" pitchFamily="34" charset="-120"/>
               </a:rPr>
-              <a:t>WHERE THE VALUE SHOWS UP</a:t>
+              <a:t>BUSINESS VALUE</a:t>
             </a:r>
             <a:endParaRPr lang="en-US" sz="950" dirty="0"/>
           </a:p>
@@ -13010,7 +12545,7 @@
         <p:spPr>
           <a:xfrm>
             <a:off x="777240" y="960120"/>
-            <a:ext cx="6400800" cy="1463040"/>
+            <a:ext cx="10058400" cy="1463040"/>
           </a:xfrm>
           <a:prstGeom prst="rect">
             <a:avLst/>
@@ -13024,12 +12559,12 @@
           <a:p>
             <a:pPr indent="0" marL="0">
               <a:lnSpc>
-                <a:spcPts val="4176"/>
+                <a:spcPts val="4640"/>
               </a:lnSpc>
               <a:buNone/>
             </a:pPr>
             <a:r>
-              <a:rPr lang="en-US" sz="3600" b="1" dirty="0">
+              <a:rPr lang="en-US" sz="4000" b="1" dirty="0">
                 <a:solidFill>
                   <a:srgbClr val="0E1620"/>
                 </a:solidFill>
@@ -13037,29 +12572,9 @@
                 <a:ea typeface="Schibsted Grotesk" pitchFamily="34" charset="-122"/>
                 <a:cs typeface="Schibsted Grotesk" pitchFamily="34" charset="-120"/>
               </a:rPr>
-              <a:t>Expertise is only worth</a:t>
-            </a:r>
-            <a:endParaRPr lang="en-US" sz="3600" dirty="0"/>
-          </a:p>
-          <a:p>
-            <a:pPr indent="0" marL="0">
-              <a:lnSpc>
-                <a:spcPts val="4176"/>
-              </a:lnSpc>
-              <a:buNone/>
-            </a:pPr>
-            <a:r>
-              <a:rPr lang="en-US" sz="3600" b="1" dirty="0">
-                <a:solidFill>
-                  <a:srgbClr val="0E1620"/>
-                </a:solidFill>
-                <a:latin typeface="Schibsted Grotesk" pitchFamily="34" charset="0"/>
-                <a:ea typeface="Schibsted Grotesk" pitchFamily="34" charset="-122"/>
-                <a:cs typeface="Schibsted Grotesk" pitchFamily="34" charset="-120"/>
-              </a:rPr>
-              <a:t>what it changes.</a:t>
-            </a:r>
-            <a:endParaRPr lang="en-US" sz="3600" dirty="0"/>
+              <a:t>From capability to outcome.</a:t>
+            </a:r>
+            <a:endParaRPr lang="en-US" sz="4000" dirty="0"/>
           </a:p>
         </p:txBody>
       </p:sp>
@@ -13928,7 +13443,7 @@
         <p:spPr>
           <a:xfrm>
             <a:off x="777240" y="896112"/>
-            <a:ext cx="8686800" cy="1463040"/>
+            <a:ext cx="10058400" cy="1463040"/>
           </a:xfrm>
           <a:prstGeom prst="rect">
             <a:avLst/>
@@ -13942,12 +13457,12 @@
           <a:p>
             <a:pPr indent="0" marL="0">
               <a:lnSpc>
-                <a:spcPts val="3944"/>
+                <a:spcPts val="4640"/>
               </a:lnSpc>
               <a:buNone/>
             </a:pPr>
             <a:r>
-              <a:rPr lang="en-US" sz="3400" b="1" dirty="0">
+              <a:rPr lang="en-US" sz="4000" b="1" dirty="0">
                 <a:solidFill>
                   <a:srgbClr val="0E1620"/>
                 </a:solidFill>
@@ -13955,29 +13470,9 @@
                 <a:ea typeface="Schibsted Grotesk" pitchFamily="34" charset="-122"/>
                 <a:cs typeface="Schibsted Grotesk" pitchFamily="34" charset="-120"/>
               </a:rPr>
-              <a:t>Organised around the question</a:t>
-            </a:r>
-            <a:endParaRPr lang="en-US" sz="3400" dirty="0"/>
-          </a:p>
-          <a:p>
-            <a:pPr indent="0" marL="0">
-              <a:lnSpc>
-                <a:spcPts val="3944"/>
-              </a:lnSpc>
-              <a:buNone/>
-            </a:pPr>
-            <a:r>
-              <a:rPr lang="en-US" sz="3400" b="1" dirty="0">
-                <a:solidFill>
-                  <a:srgbClr val="0E1620"/>
-                </a:solidFill>
-                <a:latin typeface="Schibsted Grotesk" pitchFamily="34" charset="0"/>
-                <a:ea typeface="Schibsted Grotesk" pitchFamily="34" charset="-122"/>
-                <a:cs typeface="Schibsted Grotesk" pitchFamily="34" charset="-120"/>
-              </a:rPr>
-              <a:t>you are actually asking.</a:t>
-            </a:r>
-            <a:endParaRPr lang="en-US" sz="3400" dirty="0"/>
+              <a:t>Five areas of expertise.</a:t>
+            </a:r>
+            <a:endParaRPr lang="en-US" sz="4000" dirty="0"/>
           </a:p>
         </p:txBody>
       </p:sp>
@@ -14090,7 +13585,7 @@
         </p:nvSpPr>
         <p:spPr>
           <a:xfrm>
-            <a:off x="777240" y="2139696"/>
+            <a:off x="777240" y="2048256"/>
             <a:ext cx="10637215" cy="0"/>
           </a:xfrm>
           <a:prstGeom prst="line">
@@ -14113,7 +13608,7 @@
         </p:nvSpPr>
         <p:spPr>
           <a:xfrm>
-            <a:off x="777240" y="2473452"/>
+            <a:off x="777240" y="2400300"/>
             <a:ext cx="100584" cy="100584"/>
           </a:xfrm>
           <a:prstGeom prst="ellipse">
@@ -14133,8 +13628,8 @@
         </p:nvSpPr>
         <p:spPr>
           <a:xfrm>
-            <a:off x="1069848" y="2322576"/>
-            <a:ext cx="4617720" cy="420624"/>
+            <a:off x="1069848" y="2249424"/>
+            <a:ext cx="4023360" cy="402336"/>
           </a:xfrm>
           <a:prstGeom prst="rect">
             <a:avLst/>
@@ -14150,7 +13645,7 @@
               <a:buNone/>
             </a:pPr>
             <a:r>
-              <a:rPr lang="en-US" sz="1450" b="1" dirty="0">
+              <a:rPr lang="en-US" sz="1500" b="1" dirty="0">
                 <a:solidFill>
                   <a:srgbClr val="0E1620"/>
                 </a:solidFill>
@@ -14158,9 +13653,9 @@
                 <a:ea typeface="Schibsted Grotesk" pitchFamily="34" charset="-122"/>
                 <a:cs typeface="Schibsted Grotesk" pitchFamily="34" charset="-120"/>
               </a:rPr>
-              <a:t>Can we still trust our own numbers?</a:t>
-            </a:r>
-            <a:endParaRPr lang="en-US" sz="1450" dirty="0"/>
+              <a:t>SAP Finance Modules</a:t>
+            </a:r>
+            <a:endParaRPr lang="en-US" sz="1500" dirty="0"/>
           </a:p>
         </p:txBody>
       </p:sp>
@@ -14172,8 +13667,8 @@
         </p:nvSpPr>
         <p:spPr>
           <a:xfrm>
-            <a:off x="5897880" y="2368296"/>
-            <a:ext cx="2834640" cy="219456"/>
+            <a:off x="5440680" y="2249424"/>
+            <a:ext cx="5897880" cy="402336"/>
           </a:xfrm>
           <a:prstGeom prst="rect">
             <a:avLst/>
@@ -14189,46 +13684,7 @@
               <a:buNone/>
             </a:pPr>
             <a:r>
-              <a:rPr lang="en-US" sz="850" spc="150" kern="0" dirty="0">
-                <a:solidFill>
-                  <a:srgbClr val="11676A"/>
-                </a:solidFill>
-                <a:latin typeface="IBM Plex Mono" pitchFamily="34" charset="0"/>
-                <a:ea typeface="IBM Plex Mono" pitchFamily="34" charset="-122"/>
-                <a:cs typeface="IBM Plex Mono" pitchFamily="34" charset="-120"/>
-              </a:rPr>
-              <a:t>SAP FINANCE MODULES</a:t>
-            </a:r>
-            <a:endParaRPr lang="en-US" sz="850" dirty="0"/>
-          </a:p>
-        </p:txBody>
-      </p:sp>
-      <p:sp>
-        <p:nvSpPr>
-          <p:cNvPr id="11" name="Text 9"/>
-          <p:cNvSpPr txBox="1"/>
-          <p:nvPr/>
-        </p:nvSpPr>
-        <p:spPr>
-          <a:xfrm>
-            <a:off x="5897880" y="2615184"/>
-            <a:ext cx="5440680" cy="256032"/>
-          </a:xfrm>
-          <a:prstGeom prst="rect">
-            <a:avLst/>
-          </a:prstGeom>
-          <a:noFill/>
-          <a:ln/>
-        </p:spPr>
-        <p:txBody>
-          <a:bodyPr wrap="square" lIns="0" tIns="0" rIns="0" bIns="0" rtlCol="0" anchor="ctr"/>
-          <a:lstStyle/>
-          <a:p>
-            <a:pPr indent="0" marL="0">
-              <a:buNone/>
-            </a:pPr>
-            <a:r>
-              <a:rPr lang="en-US" sz="1050" dirty="0">
+              <a:rPr lang="en-US" sz="1150" dirty="0">
                 <a:solidFill>
                   <a:srgbClr val="4A5A67"/>
                 </a:solidFill>
@@ -14238,19 +13694,19 @@
               </a:rPr>
               <a:t>FI, CO, PA and PS as one process architecture, not five.</a:t>
             </a:r>
-            <a:endParaRPr lang="en-US" sz="1050" dirty="0"/>
-          </a:p>
-        </p:txBody>
-      </p:sp>
-      <p:sp>
-        <p:nvSpPr>
-          <p:cNvPr id="12" name="Shape 10"/>
+            <a:endParaRPr lang="en-US" sz="1150" dirty="0"/>
+          </a:p>
+        </p:txBody>
+      </p:sp>
+      <p:sp>
+        <p:nvSpPr>
+          <p:cNvPr id="11" name="Shape 9"/>
           <p:cNvSpPr/>
           <p:nvPr/>
         </p:nvSpPr>
         <p:spPr>
           <a:xfrm>
-            <a:off x="777240" y="2962656"/>
+            <a:off x="777240" y="2889504"/>
             <a:ext cx="10637215" cy="0"/>
           </a:xfrm>
           <a:prstGeom prst="line">
@@ -14267,13 +13723,13 @@
       </p:sp>
       <p:sp>
         <p:nvSpPr>
-          <p:cNvPr id="13" name="Shape 11"/>
+          <p:cNvPr id="12" name="Shape 10"/>
           <p:cNvSpPr/>
           <p:nvPr/>
         </p:nvSpPr>
         <p:spPr>
           <a:xfrm>
-            <a:off x="777240" y="3241548"/>
+            <a:off x="777240" y="3186684"/>
             <a:ext cx="100584" cy="100584"/>
           </a:xfrm>
           <a:prstGeom prst="ellipse">
@@ -14287,14 +13743,14 @@
       </p:sp>
       <p:sp>
         <p:nvSpPr>
-          <p:cNvPr id="14" name="Text 12"/>
-          <p:cNvSpPr txBox="1"/>
-          <p:nvPr/>
-        </p:nvSpPr>
-        <p:spPr>
-          <a:xfrm>
-            <a:off x="1069848" y="3090672"/>
-            <a:ext cx="4617720" cy="420624"/>
+          <p:cNvPr id="13" name="Text 11"/>
+          <p:cNvSpPr txBox="1"/>
+          <p:nvPr/>
+        </p:nvSpPr>
+        <p:spPr>
+          <a:xfrm>
+            <a:off x="1069848" y="3035808"/>
+            <a:ext cx="4023360" cy="402336"/>
           </a:xfrm>
           <a:prstGeom prst="rect">
             <a:avLst/>
@@ -14310,7 +13766,7 @@
               <a:buNone/>
             </a:pPr>
             <a:r>
-              <a:rPr lang="en-US" sz="1450" b="1" dirty="0">
+              <a:rPr lang="en-US" sz="1500" b="1" dirty="0">
                 <a:solidFill>
                   <a:srgbClr val="0E1620"/>
                 </a:solidFill>
@@ -14318,22 +13774,22 @@
                 <a:ea typeface="Schibsted Grotesk" pitchFamily="34" charset="-122"/>
                 <a:cs typeface="Schibsted Grotesk" pitchFamily="34" charset="-120"/>
               </a:rPr>
-              <a:t>Which road do we take to S/4HANA?</a:t>
-            </a:r>
-            <a:endParaRPr lang="en-US" sz="1450" dirty="0"/>
-          </a:p>
-        </p:txBody>
-      </p:sp>
-      <p:sp>
-        <p:nvSpPr>
-          <p:cNvPr id="15" name="Text 13"/>
-          <p:cNvSpPr txBox="1"/>
-          <p:nvPr/>
-        </p:nvSpPr>
-        <p:spPr>
-          <a:xfrm>
-            <a:off x="5897880" y="3136392"/>
-            <a:ext cx="2834640" cy="219456"/>
+              <a:t>S/4HANA Transformation</a:t>
+            </a:r>
+            <a:endParaRPr lang="en-US" sz="1500" dirty="0"/>
+          </a:p>
+        </p:txBody>
+      </p:sp>
+      <p:sp>
+        <p:nvSpPr>
+          <p:cNvPr id="14" name="Text 12"/>
+          <p:cNvSpPr txBox="1"/>
+          <p:nvPr/>
+        </p:nvSpPr>
+        <p:spPr>
+          <a:xfrm>
+            <a:off x="5440680" y="3035808"/>
+            <a:ext cx="5897880" cy="402336"/>
           </a:xfrm>
           <a:prstGeom prst="rect">
             <a:avLst/>
@@ -14349,46 +13805,7 @@
               <a:buNone/>
             </a:pPr>
             <a:r>
-              <a:rPr lang="en-US" sz="850" spc="150" kern="0" dirty="0">
-                <a:solidFill>
-                  <a:srgbClr val="11676A"/>
-                </a:solidFill>
-                <a:latin typeface="IBM Plex Mono" pitchFamily="34" charset="0"/>
-                <a:ea typeface="IBM Plex Mono" pitchFamily="34" charset="-122"/>
-                <a:cs typeface="IBM Plex Mono" pitchFamily="34" charset="-120"/>
-              </a:rPr>
-              <a:t>S/4HANA TRANSFORMATION</a:t>
-            </a:r>
-            <a:endParaRPr lang="en-US" sz="850" dirty="0"/>
-          </a:p>
-        </p:txBody>
-      </p:sp>
-      <p:sp>
-        <p:nvSpPr>
-          <p:cNvPr id="16" name="Text 14"/>
-          <p:cNvSpPr txBox="1"/>
-          <p:nvPr/>
-        </p:nvSpPr>
-        <p:spPr>
-          <a:xfrm>
-            <a:off x="5897880" y="3383280"/>
-            <a:ext cx="5440680" cy="256032"/>
-          </a:xfrm>
-          <a:prstGeom prst="rect">
-            <a:avLst/>
-          </a:prstGeom>
-          <a:noFill/>
-          <a:ln/>
-        </p:spPr>
-        <p:txBody>
-          <a:bodyPr wrap="square" lIns="0" tIns="0" rIns="0" bIns="0" rtlCol="0" anchor="ctr"/>
-          <a:lstStyle/>
-          <a:p>
-            <a:pPr indent="0" marL="0">
-              <a:buNone/>
-            </a:pPr>
-            <a:r>
-              <a:rPr lang="en-US" sz="1050" dirty="0">
+              <a:rPr lang="en-US" sz="1150" dirty="0">
                 <a:solidFill>
                   <a:srgbClr val="4A5A67"/>
                 </a:solidFill>
@@ -14396,21 +13813,21 @@
                 <a:ea typeface="Inter" pitchFamily="34" charset="-122"/>
                 <a:cs typeface="Inter" pitchFamily="34" charset="-120"/>
               </a:rPr>
-              <a:t>Brownfield, greenfield or selective transition — decided on evidence.</a:t>
-            </a:r>
-            <a:endParaRPr lang="en-US" sz="1050" dirty="0"/>
-          </a:p>
-        </p:txBody>
-      </p:sp>
-      <p:sp>
-        <p:nvSpPr>
-          <p:cNvPr id="17" name="Shape 15"/>
+              <a:t>Brownfield, greenfield or selective transition, decided on evidence.</a:t>
+            </a:r>
+            <a:endParaRPr lang="en-US" sz="1150" dirty="0"/>
+          </a:p>
+        </p:txBody>
+      </p:sp>
+      <p:sp>
+        <p:nvSpPr>
+          <p:cNvPr id="15" name="Shape 13"/>
           <p:cNvSpPr/>
           <p:nvPr/>
         </p:nvSpPr>
         <p:spPr>
           <a:xfrm>
-            <a:off x="777240" y="3730752"/>
+            <a:off x="777240" y="3675888"/>
             <a:ext cx="10637215" cy="0"/>
           </a:xfrm>
           <a:prstGeom prst="line">
@@ -14427,13 +13844,13 @@
       </p:sp>
       <p:sp>
         <p:nvSpPr>
-          <p:cNvPr id="18" name="Shape 16"/>
+          <p:cNvPr id="16" name="Shape 14"/>
           <p:cNvSpPr/>
           <p:nvPr/>
         </p:nvSpPr>
         <p:spPr>
           <a:xfrm>
-            <a:off x="777240" y="4009644"/>
+            <a:off x="777240" y="3973068"/>
             <a:ext cx="100584" cy="100584"/>
           </a:xfrm>
           <a:prstGeom prst="ellipse">
@@ -14447,14 +13864,14 @@
       </p:sp>
       <p:sp>
         <p:nvSpPr>
-          <p:cNvPr id="19" name="Text 17"/>
-          <p:cNvSpPr txBox="1"/>
-          <p:nvPr/>
-        </p:nvSpPr>
-        <p:spPr>
-          <a:xfrm>
-            <a:off x="1069848" y="3858768"/>
-            <a:ext cx="4617720" cy="420624"/>
+          <p:cNvPr id="17" name="Text 15"/>
+          <p:cNvSpPr txBox="1"/>
+          <p:nvPr/>
+        </p:nvSpPr>
+        <p:spPr>
+          <a:xfrm>
+            <a:off x="1069848" y="3822192"/>
+            <a:ext cx="4023360" cy="402336"/>
           </a:xfrm>
           <a:prstGeom prst="rect">
             <a:avLst/>
@@ -14470,7 +13887,7 @@
               <a:buNone/>
             </a:pPr>
             <a:r>
-              <a:rPr lang="en-US" sz="1450" b="1" dirty="0">
+              <a:rPr lang="en-US" sz="1500" b="1" dirty="0">
                 <a:solidFill>
                   <a:srgbClr val="0E1620"/>
                 </a:solidFill>
@@ -14478,22 +13895,22 @@
                 <a:ea typeface="Schibsted Grotesk" pitchFamily="34" charset="-122"/>
                 <a:cs typeface="Schibsted Grotesk" pitchFamily="34" charset="-120"/>
               </a:rPr>
-              <a:t>Is standard actually enough for us?</a:t>
-            </a:r>
-            <a:endParaRPr lang="en-US" sz="1450" dirty="0"/>
-          </a:p>
-        </p:txBody>
-      </p:sp>
-      <p:sp>
-        <p:nvSpPr>
-          <p:cNvPr id="20" name="Text 18"/>
-          <p:cNvSpPr txBox="1"/>
-          <p:nvPr/>
-        </p:nvSpPr>
-        <p:spPr>
-          <a:xfrm>
-            <a:off x="5897880" y="3904488"/>
-            <a:ext cx="2834640" cy="219456"/>
+              <a:t>SAP Public Cloud</a:t>
+            </a:r>
+            <a:endParaRPr lang="en-US" sz="1500" dirty="0"/>
+          </a:p>
+        </p:txBody>
+      </p:sp>
+      <p:sp>
+        <p:nvSpPr>
+          <p:cNvPr id="18" name="Text 16"/>
+          <p:cNvSpPr txBox="1"/>
+          <p:nvPr/>
+        </p:nvSpPr>
+        <p:spPr>
+          <a:xfrm>
+            <a:off x="5440680" y="3822192"/>
+            <a:ext cx="5897880" cy="402336"/>
           </a:xfrm>
           <a:prstGeom prst="rect">
             <a:avLst/>
@@ -14509,46 +13926,7 @@
               <a:buNone/>
             </a:pPr>
             <a:r>
-              <a:rPr lang="en-US" sz="850" spc="150" kern="0" dirty="0">
-                <a:solidFill>
-                  <a:srgbClr val="11676A"/>
-                </a:solidFill>
-                <a:latin typeface="IBM Plex Mono" pitchFamily="34" charset="0"/>
-                <a:ea typeface="IBM Plex Mono" pitchFamily="34" charset="-122"/>
-                <a:cs typeface="IBM Plex Mono" pitchFamily="34" charset="-120"/>
-              </a:rPr>
-              <a:t>SAP PUBLIC CLOUD</a:t>
-            </a:r>
-            <a:endParaRPr lang="en-US" sz="850" dirty="0"/>
-          </a:p>
-        </p:txBody>
-      </p:sp>
-      <p:sp>
-        <p:nvSpPr>
-          <p:cNvPr id="21" name="Text 19"/>
-          <p:cNvSpPr txBox="1"/>
-          <p:nvPr/>
-        </p:nvSpPr>
-        <p:spPr>
-          <a:xfrm>
-            <a:off x="5897880" y="4151376"/>
-            <a:ext cx="5440680" cy="256032"/>
-          </a:xfrm>
-          <a:prstGeom prst="rect">
-            <a:avLst/>
-          </a:prstGeom>
-          <a:noFill/>
-          <a:ln/>
-        </p:spPr>
-        <p:txBody>
-          <a:bodyPr wrap="square" lIns="0" tIns="0" rIns="0" bIns="0" rtlCol="0" anchor="ctr"/>
-          <a:lstStyle/>
-          <a:p>
-            <a:pPr indent="0" marL="0">
-              <a:buNone/>
-            </a:pPr>
-            <a:r>
-              <a:rPr lang="en-US" sz="1050" dirty="0">
+              <a:rPr lang="en-US" sz="1150" dirty="0">
                 <a:solidFill>
                   <a:srgbClr val="4A5A67"/>
                 </a:solidFill>
@@ -14558,19 +13936,19 @@
               </a:rPr>
               <a:t>How much of your process fits standard scope.</a:t>
             </a:r>
-            <a:endParaRPr lang="en-US" sz="1050" dirty="0"/>
-          </a:p>
-        </p:txBody>
-      </p:sp>
-      <p:sp>
-        <p:nvSpPr>
-          <p:cNvPr id="22" name="Shape 20"/>
+            <a:endParaRPr lang="en-US" sz="1150" dirty="0"/>
+          </a:p>
+        </p:txBody>
+      </p:sp>
+      <p:sp>
+        <p:nvSpPr>
+          <p:cNvPr id="19" name="Shape 17"/>
           <p:cNvSpPr/>
           <p:nvPr/>
         </p:nvSpPr>
         <p:spPr>
           <a:xfrm>
-            <a:off x="777240" y="4498848"/>
+            <a:off x="777240" y="4462272"/>
             <a:ext cx="10637215" cy="0"/>
           </a:xfrm>
           <a:prstGeom prst="line">
@@ -14587,13 +13965,13 @@
       </p:sp>
       <p:sp>
         <p:nvSpPr>
-          <p:cNvPr id="23" name="Shape 21"/>
+          <p:cNvPr id="20" name="Shape 18"/>
           <p:cNvSpPr/>
           <p:nvPr/>
         </p:nvSpPr>
         <p:spPr>
           <a:xfrm>
-            <a:off x="777240" y="4777740"/>
+            <a:off x="777240" y="4759452"/>
             <a:ext cx="100584" cy="100584"/>
           </a:xfrm>
           <a:prstGeom prst="ellipse">
@@ -14607,14 +13985,14 @@
       </p:sp>
       <p:sp>
         <p:nvSpPr>
-          <p:cNvPr id="24" name="Text 22"/>
-          <p:cNvSpPr txBox="1"/>
-          <p:nvPr/>
-        </p:nvSpPr>
-        <p:spPr>
-          <a:xfrm>
-            <a:off x="1069848" y="4626864"/>
-            <a:ext cx="4617720" cy="420624"/>
+          <p:cNvPr id="21" name="Text 19"/>
+          <p:cNvSpPr txBox="1"/>
+          <p:nvPr/>
+        </p:nvSpPr>
+        <p:spPr>
+          <a:xfrm>
+            <a:off x="1069848" y="4608576"/>
+            <a:ext cx="4023360" cy="402336"/>
           </a:xfrm>
           <a:prstGeom prst="rect">
             <a:avLst/>
@@ -14630,7 +14008,7 @@
               <a:buNone/>
             </a:pPr>
             <a:r>
-              <a:rPr lang="en-US" sz="1450" b="1" dirty="0">
+              <a:rPr lang="en-US" sz="1500" b="1" dirty="0">
                 <a:solidFill>
                   <a:srgbClr val="0E1620"/>
                 </a:solidFill>
@@ -14638,22 +14016,22 @@
                 <a:ea typeface="Schibsted Grotesk" pitchFamily="34" charset="-122"/>
                 <a:cs typeface="Schibsted Grotesk" pitchFamily="34" charset="-120"/>
               </a:rPr>
-              <a:t>Can we go to cloud and keep our process?</a:t>
-            </a:r>
-            <a:endParaRPr lang="en-US" sz="1450" dirty="0"/>
-          </a:p>
-        </p:txBody>
-      </p:sp>
-      <p:sp>
-        <p:nvSpPr>
-          <p:cNvPr id="25" name="Text 23"/>
-          <p:cNvSpPr txBox="1"/>
-          <p:nvPr/>
-        </p:nvSpPr>
-        <p:spPr>
-          <a:xfrm>
-            <a:off x="5897880" y="4672584"/>
-            <a:ext cx="2834640" cy="219456"/>
+              <a:t>SAP Private Cloud</a:t>
+            </a:r>
+            <a:endParaRPr lang="en-US" sz="1500" dirty="0"/>
+          </a:p>
+        </p:txBody>
+      </p:sp>
+      <p:sp>
+        <p:nvSpPr>
+          <p:cNvPr id="22" name="Text 20"/>
+          <p:cNvSpPr txBox="1"/>
+          <p:nvPr/>
+        </p:nvSpPr>
+        <p:spPr>
+          <a:xfrm>
+            <a:off x="5440680" y="4608576"/>
+            <a:ext cx="5897880" cy="402336"/>
           </a:xfrm>
           <a:prstGeom prst="rect">
             <a:avLst/>
@@ -14669,46 +14047,7 @@
               <a:buNone/>
             </a:pPr>
             <a:r>
-              <a:rPr lang="en-US" sz="850" spc="150" kern="0" dirty="0">
-                <a:solidFill>
-                  <a:srgbClr val="11676A"/>
-                </a:solidFill>
-                <a:latin typeface="IBM Plex Mono" pitchFamily="34" charset="0"/>
-                <a:ea typeface="IBM Plex Mono" pitchFamily="34" charset="-122"/>
-                <a:cs typeface="IBM Plex Mono" pitchFamily="34" charset="-120"/>
-              </a:rPr>
-              <a:t>SAP PRIVATE CLOUD</a:t>
-            </a:r>
-            <a:endParaRPr lang="en-US" sz="850" dirty="0"/>
-          </a:p>
-        </p:txBody>
-      </p:sp>
-      <p:sp>
-        <p:nvSpPr>
-          <p:cNvPr id="26" name="Text 24"/>
-          <p:cNvSpPr txBox="1"/>
-          <p:nvPr/>
-        </p:nvSpPr>
-        <p:spPr>
-          <a:xfrm>
-            <a:off x="5897880" y="4919472"/>
-            <a:ext cx="5440680" cy="256032"/>
-          </a:xfrm>
-          <a:prstGeom prst="rect">
-            <a:avLst/>
-          </a:prstGeom>
-          <a:noFill/>
-          <a:ln/>
-        </p:spPr>
-        <p:txBody>
-          <a:bodyPr wrap="square" lIns="0" tIns="0" rIns="0" bIns="0" rtlCol="0" anchor="ctr"/>
-          <a:lstStyle/>
-          <a:p>
-            <a:pPr indent="0" marL="0">
-              <a:buNone/>
-            </a:pPr>
-            <a:r>
-              <a:rPr lang="en-US" sz="1050" dirty="0">
+              <a:rPr lang="en-US" sz="1150" dirty="0">
                 <a:solidFill>
                   <a:srgbClr val="4A5A67"/>
                 </a:solidFill>
@@ -14716,21 +14055,21 @@
                 <a:ea typeface="Inter" pitchFamily="34" charset="-122"/>
                 <a:cs typeface="Inter" pitchFamily="34" charset="-120"/>
               </a:rPr>
-              <a:t>Architecture, migration, and the boundaries RISE leaves open.</a:t>
-            </a:r>
-            <a:endParaRPr lang="en-US" sz="1050" dirty="0"/>
-          </a:p>
-        </p:txBody>
-      </p:sp>
-      <p:sp>
-        <p:nvSpPr>
-          <p:cNvPr id="27" name="Shape 25"/>
+              <a:t>Architecture, migration and the boundaries RISE leaves open.</a:t>
+            </a:r>
+            <a:endParaRPr lang="en-US" sz="1150" dirty="0"/>
+          </a:p>
+        </p:txBody>
+      </p:sp>
+      <p:sp>
+        <p:nvSpPr>
+          <p:cNvPr id="23" name="Shape 21"/>
           <p:cNvSpPr/>
           <p:nvPr/>
         </p:nvSpPr>
         <p:spPr>
           <a:xfrm>
-            <a:off x="777240" y="5266944"/>
+            <a:off x="777240" y="5248656"/>
             <a:ext cx="10637215" cy="0"/>
           </a:xfrm>
           <a:prstGeom prst="line">
@@ -14747,7 +14086,7 @@
       </p:sp>
       <p:sp>
         <p:nvSpPr>
-          <p:cNvPr id="28" name="Shape 26"/>
+          <p:cNvPr id="24" name="Shape 22"/>
           <p:cNvSpPr/>
           <p:nvPr/>
         </p:nvSpPr>
@@ -14767,14 +14106,14 @@
       </p:sp>
       <p:sp>
         <p:nvSpPr>
-          <p:cNvPr id="29" name="Text 27"/>
+          <p:cNvPr id="25" name="Text 23"/>
           <p:cNvSpPr txBox="1"/>
           <p:nvPr/>
         </p:nvSpPr>
         <p:spPr>
           <a:xfrm>
             <a:off x="1069848" y="5394960"/>
-            <a:ext cx="4617720" cy="420624"/>
+            <a:ext cx="4023360" cy="402336"/>
           </a:xfrm>
           <a:prstGeom prst="rect">
             <a:avLst/>
@@ -14790,7 +14129,7 @@
               <a:buNone/>
             </a:pPr>
             <a:r>
-              <a:rPr lang="en-US" sz="1450" b="1" dirty="0">
+              <a:rPr lang="en-US" sz="1500" b="1" dirty="0">
                 <a:solidFill>
                   <a:srgbClr val="0E1620"/>
                 </a:solidFill>
@@ -14798,22 +14137,22 @@
                 <a:ea typeface="Schibsted Grotesk" pitchFamily="34" charset="-122"/>
                 <a:cs typeface="Schibsted Grotesk" pitchFamily="34" charset="-120"/>
               </a:rPr>
-              <a:t>Which of this AI is real for us?</a:t>
-            </a:r>
-            <a:endParaRPr lang="en-US" sz="1450" dirty="0"/>
-          </a:p>
-        </p:txBody>
-      </p:sp>
-      <p:sp>
-        <p:nvSpPr>
-          <p:cNvPr id="30" name="Text 28"/>
-          <p:cNvSpPr txBox="1"/>
-          <p:nvPr/>
-        </p:nvSpPr>
-        <p:spPr>
-          <a:xfrm>
-            <a:off x="5897880" y="5440680"/>
-            <a:ext cx="2834640" cy="219456"/>
+              <a:t>AI in Finance</a:t>
+            </a:r>
+            <a:endParaRPr lang="en-US" sz="1500" dirty="0"/>
+          </a:p>
+        </p:txBody>
+      </p:sp>
+      <p:sp>
+        <p:nvSpPr>
+          <p:cNvPr id="26" name="Text 24"/>
+          <p:cNvSpPr txBox="1"/>
+          <p:nvPr/>
+        </p:nvSpPr>
+        <p:spPr>
+          <a:xfrm>
+            <a:off x="5440680" y="5394960"/>
+            <a:ext cx="5897880" cy="402336"/>
           </a:xfrm>
           <a:prstGeom prst="rect">
             <a:avLst/>
@@ -14829,46 +14168,7 @@
               <a:buNone/>
             </a:pPr>
             <a:r>
-              <a:rPr lang="en-US" sz="850" spc="150" kern="0" dirty="0">
-                <a:solidFill>
-                  <a:srgbClr val="11676A"/>
-                </a:solidFill>
-                <a:latin typeface="IBM Plex Mono" pitchFamily="34" charset="0"/>
-                <a:ea typeface="IBM Plex Mono" pitchFamily="34" charset="-122"/>
-                <a:cs typeface="IBM Plex Mono" pitchFamily="34" charset="-120"/>
-              </a:rPr>
-              <a:t>AI IN FINANCE</a:t>
-            </a:r>
-            <a:endParaRPr lang="en-US" sz="850" dirty="0"/>
-          </a:p>
-        </p:txBody>
-      </p:sp>
-      <p:sp>
-        <p:nvSpPr>
-          <p:cNvPr id="31" name="Text 29"/>
-          <p:cNvSpPr txBox="1"/>
-          <p:nvPr/>
-        </p:nvSpPr>
-        <p:spPr>
-          <a:xfrm>
-            <a:off x="5897880" y="5687568"/>
-            <a:ext cx="5440680" cy="256032"/>
-          </a:xfrm>
-          <a:prstGeom prst="rect">
-            <a:avLst/>
-          </a:prstGeom>
-          <a:noFill/>
-          <a:ln/>
-        </p:spPr>
-        <p:txBody>
-          <a:bodyPr wrap="square" lIns="0" tIns="0" rIns="0" bIns="0" rtlCol="0" anchor="ctr"/>
-          <a:lstStyle/>
-          <a:p>
-            <a:pPr indent="0" marL="0">
-              <a:buNone/>
-            </a:pPr>
-            <a:r>
-              <a:rPr lang="en-US" sz="1050" dirty="0">
+              <a:rPr lang="en-US" sz="1150" dirty="0">
                 <a:solidFill>
                   <a:srgbClr val="4A5A67"/>
                 </a:solidFill>
@@ -14878,13 +14178,13 @@
               </a:rPr>
               <a:t>The capabilities your data and discipline can actually support.</a:t>
             </a:r>
-            <a:endParaRPr lang="en-US" sz="1050" dirty="0"/>
-          </a:p>
-        </p:txBody>
-      </p:sp>
-      <p:sp>
-        <p:nvSpPr>
-          <p:cNvPr id="32" name="Shape 30"/>
+            <a:endParaRPr lang="en-US" sz="1150" dirty="0"/>
+          </a:p>
+        </p:txBody>
+      </p:sp>
+      <p:sp>
+        <p:nvSpPr>
+          <p:cNvPr id="27" name="Shape 25"/>
           <p:cNvSpPr/>
           <p:nvPr/>
         </p:nvSpPr>

--- a/presentation/CPeak-Consultancy-Corporate-Presentation-EN.pptx
+++ b/presentation/CPeak-Consultancy-Corporate-Presentation-EN.pptx
@@ -2217,7 +2217,7 @@
                 <a:ea typeface="Inter" pitchFamily="34" charset="-122"/>
                 <a:cs typeface="Inter" pitchFamily="34" charset="-120"/>
               </a:rPr>
-              <a:t>Independent, and deliberately narrow: the hardest decisions are the ones we do ourselves.</a:t>
+              <a:t>The hardest decisions stay with us.</a:t>
             </a:r>
             <a:endParaRPr lang="en-US" sz="1400" dirty="0"/>
           </a:p>
@@ -2764,7 +2764,7 @@
                 <a:ea typeface="Inter" pitchFamily="34" charset="-122"/>
                 <a:cs typeface="Inter" pitchFamily="34" charset="-120"/>
               </a:rPr>
-              <a:t>Intelligent matching — items cleared automatically</a:t>
+              <a:t>Intelligent matching</a:t>
             </a:r>
             <a:endParaRPr lang="en-US" sz="1100" dirty="0"/>
           </a:p>
@@ -2826,7 +2826,7 @@
                 <a:ea typeface="Inter" pitchFamily="34" charset="-122"/>
                 <a:cs typeface="Inter" pitchFamily="34" charset="-120"/>
               </a:rPr>
-              <a:t>Anomaly detection — before the close, not after</a:t>
+              <a:t>Anomaly detection</a:t>
             </a:r>
             <a:endParaRPr lang="en-US" sz="1100" dirty="0"/>
           </a:p>
@@ -2888,7 +2888,7 @@
                 <a:ea typeface="Inter" pitchFamily="34" charset="-122"/>
                 <a:cs typeface="Inter" pitchFamily="34" charset="-120"/>
               </a:rPr>
-              <a:t>Predictive accounting — during the period, not after it</a:t>
+              <a:t>Predictive accounting</a:t>
             </a:r>
             <a:endParaRPr lang="en-US" sz="1100" dirty="0"/>
           </a:p>
@@ -3053,7 +3053,7 @@
                 <a:ea typeface="Inter" pitchFamily="34" charset="-122"/>
                 <a:cs typeface="Inter" pitchFamily="34" charset="-120"/>
               </a:rPr>
-              <a:t>Custom code inventory and impact analysis</a:t>
+              <a:t>Custom code analysis</a:t>
             </a:r>
             <a:endParaRPr lang="en-US" sz="1100" dirty="0"/>
           </a:p>
@@ -3115,7 +3115,7 @@
                 <a:ea typeface="Inter" pitchFamily="34" charset="-122"/>
                 <a:cs typeface="Inter" pitchFamily="34" charset="-120"/>
               </a:rPr>
-              <a:t>First drafts of test scenarios</a:t>
+              <a:t>Test scenario drafts</a:t>
             </a:r>
             <a:endParaRPr lang="en-US" sz="1100" dirty="0"/>
           </a:p>
@@ -3177,7 +3177,7 @@
                 <a:ea typeface="Inter" pitchFamily="34" charset="-122"/>
                 <a:cs typeface="Inter" pitchFamily="34" charset="-120"/>
               </a:rPr>
-              <a:t>Migration reconciliation checks</a:t>
+              <a:t>Migration reconciliation</a:t>
             </a:r>
             <a:endParaRPr lang="en-US" sz="1100" dirty="0"/>
           </a:p>
@@ -3463,55 +3463,13 @@
       </p:sp>
       <p:sp>
         <p:nvSpPr>
-          <p:cNvPr id="7" name="Text 5"/>
-          <p:cNvSpPr txBox="1"/>
-          <p:nvPr/>
-        </p:nvSpPr>
-        <p:spPr>
-          <a:xfrm>
-            <a:off x="777240" y="2706624"/>
-            <a:ext cx="4572000" cy="731520"/>
-          </a:xfrm>
-          <a:prstGeom prst="rect">
-            <a:avLst/>
-          </a:prstGeom>
-          <a:noFill/>
-          <a:ln/>
-        </p:spPr>
-        <p:txBody>
-          <a:bodyPr wrap="square" lIns="0" tIns="0" rIns="0" bIns="0" rtlCol="0" anchor="t"/>
-          <a:lstStyle/>
-          <a:p>
-            <a:pPr indent="0" marL="0">
-              <a:lnSpc>
-                <a:spcPts val="2000"/>
-              </a:lnSpc>
-              <a:buNone/>
-            </a:pPr>
-            <a:r>
-              <a:rPr lang="en-US" sz="1250" dirty="0">
-                <a:solidFill>
-                  <a:srgbClr val="4A5A67"/>
-                </a:solidFill>
-                <a:latin typeface="Inter" pitchFamily="34" charset="0"/>
-                <a:ea typeface="Inter" pitchFamily="34" charset="-122"/>
-                <a:cs typeface="Inter" pitchFamily="34" charset="-120"/>
-              </a:rPr>
-              <a:t>What we do not do matters as much as what we do.</a:t>
-            </a:r>
-            <a:endParaRPr lang="en-US" sz="1250" dirty="0"/>
-          </a:p>
-        </p:txBody>
-      </p:sp>
-      <p:sp>
-        <p:nvSpPr>
-          <p:cNvPr id="8" name="Shape 6"/>
+          <p:cNvPr id="7" name="Shape 5"/>
           <p:cNvSpPr/>
           <p:nvPr/>
         </p:nvSpPr>
         <p:spPr>
           <a:xfrm>
-            <a:off x="777240" y="3602736"/>
+            <a:off x="777240" y="2834640"/>
             <a:ext cx="0" cy="1051560"/>
           </a:xfrm>
           <a:prstGeom prst="line">
@@ -3528,13 +3486,13 @@
       </p:sp>
       <p:sp>
         <p:nvSpPr>
-          <p:cNvPr id="9" name="Text 7"/>
-          <p:cNvSpPr txBox="1"/>
-          <p:nvPr/>
-        </p:nvSpPr>
-        <p:spPr>
-          <a:xfrm>
-            <a:off x="1033272" y="3602736"/>
+          <p:cNvPr id="8" name="Text 6"/>
+          <p:cNvSpPr txBox="1"/>
+          <p:nvPr/>
+        </p:nvSpPr>
+        <p:spPr>
+          <a:xfrm>
+            <a:off x="1033272" y="2834640"/>
             <a:ext cx="4480560" cy="1051560"/>
           </a:xfrm>
           <a:prstGeom prst="rect">
@@ -3570,13 +3528,13 @@
       </p:sp>
       <p:sp>
         <p:nvSpPr>
-          <p:cNvPr id="10" name="Shape 8"/>
+          <p:cNvPr id="9" name="Shape 7"/>
           <p:cNvSpPr/>
           <p:nvPr/>
         </p:nvSpPr>
         <p:spPr>
           <a:xfrm>
-            <a:off x="6035040" y="1874520"/>
+            <a:off x="6035040" y="2377440"/>
             <a:ext cx="5379415" cy="0"/>
           </a:xfrm>
           <a:prstGeom prst="line">
@@ -3593,13 +3551,13 @@
       </p:sp>
       <p:sp>
         <p:nvSpPr>
-          <p:cNvPr id="11" name="Text 9"/>
-          <p:cNvSpPr txBox="1"/>
-          <p:nvPr/>
-        </p:nvSpPr>
-        <p:spPr>
-          <a:xfrm>
-            <a:off x="6035040" y="2020824"/>
+          <p:cNvPr id="10" name="Text 8"/>
+          <p:cNvSpPr txBox="1"/>
+          <p:nvPr/>
+        </p:nvSpPr>
+        <p:spPr>
+          <a:xfrm>
+            <a:off x="6035040" y="2523744"/>
             <a:ext cx="457200" cy="237744"/>
           </a:xfrm>
           <a:prstGeom prst="rect">
@@ -3632,14 +3590,14 @@
       </p:sp>
       <p:sp>
         <p:nvSpPr>
-          <p:cNvPr id="12" name="Text 10"/>
-          <p:cNvSpPr txBox="1"/>
-          <p:nvPr/>
-        </p:nvSpPr>
-        <p:spPr>
-          <a:xfrm>
-            <a:off x="6601968" y="2002536"/>
-            <a:ext cx="4812487" cy="676656"/>
+          <p:cNvPr id="11" name="Text 9"/>
+          <p:cNvSpPr txBox="1"/>
+          <p:nvPr/>
+        </p:nvSpPr>
+        <p:spPr>
+          <a:xfrm>
+            <a:off x="6601968" y="2505456"/>
+            <a:ext cx="4812487" cy="475488"/>
           </a:xfrm>
           <a:prstGeom prst="rect">
             <a:avLst/>
@@ -3674,13 +3632,13 @@
       </p:sp>
       <p:sp>
         <p:nvSpPr>
-          <p:cNvPr id="13" name="Shape 11"/>
+          <p:cNvPr id="12" name="Shape 10"/>
           <p:cNvSpPr/>
           <p:nvPr/>
         </p:nvSpPr>
         <p:spPr>
           <a:xfrm>
-            <a:off x="6035040" y="2898648"/>
+            <a:off x="6035040" y="3163824"/>
             <a:ext cx="5379415" cy="0"/>
           </a:xfrm>
           <a:prstGeom prst="line">
@@ -3697,13 +3655,13 @@
       </p:sp>
       <p:sp>
         <p:nvSpPr>
-          <p:cNvPr id="14" name="Text 12"/>
-          <p:cNvSpPr txBox="1"/>
-          <p:nvPr/>
-        </p:nvSpPr>
-        <p:spPr>
-          <a:xfrm>
-            <a:off x="6035040" y="3044952"/>
+          <p:cNvPr id="13" name="Text 11"/>
+          <p:cNvSpPr txBox="1"/>
+          <p:nvPr/>
+        </p:nvSpPr>
+        <p:spPr>
+          <a:xfrm>
+            <a:off x="6035040" y="3310128"/>
             <a:ext cx="457200" cy="237744"/>
           </a:xfrm>
           <a:prstGeom prst="rect">
@@ -3736,14 +3694,14 @@
       </p:sp>
       <p:sp>
         <p:nvSpPr>
-          <p:cNvPr id="15" name="Text 13"/>
-          <p:cNvSpPr txBox="1"/>
-          <p:nvPr/>
-        </p:nvSpPr>
-        <p:spPr>
-          <a:xfrm>
-            <a:off x="6601968" y="3026664"/>
-            <a:ext cx="4812487" cy="676656"/>
+          <p:cNvPr id="14" name="Text 12"/>
+          <p:cNvSpPr txBox="1"/>
+          <p:nvPr/>
+        </p:nvSpPr>
+        <p:spPr>
+          <a:xfrm>
+            <a:off x="6601968" y="3291840"/>
+            <a:ext cx="4812487" cy="475488"/>
           </a:xfrm>
           <a:prstGeom prst="rect">
             <a:avLst/>
@@ -3770,7 +3728,7 @@
                 <a:ea typeface="Inter" pitchFamily="34" charset="-122"/>
                 <a:cs typeface="Inter" pitchFamily="34" charset="-120"/>
               </a:rPr>
-              <a:t>Capacity without architectural or delivery responsibility</a:t>
+              <a:t>Capacity without delivery responsibility</a:t>
             </a:r>
             <a:endParaRPr lang="en-US" sz="1200" dirty="0"/>
           </a:p>
@@ -3778,13 +3736,13 @@
       </p:sp>
       <p:sp>
         <p:nvSpPr>
-          <p:cNvPr id="16" name="Shape 14"/>
+          <p:cNvPr id="15" name="Shape 13"/>
           <p:cNvSpPr/>
           <p:nvPr/>
         </p:nvSpPr>
         <p:spPr>
           <a:xfrm>
-            <a:off x="6035040" y="3922776"/>
+            <a:off x="6035040" y="3950208"/>
             <a:ext cx="5379415" cy="0"/>
           </a:xfrm>
           <a:prstGeom prst="line">
@@ -3801,13 +3759,13 @@
       </p:sp>
       <p:sp>
         <p:nvSpPr>
-          <p:cNvPr id="17" name="Text 15"/>
-          <p:cNvSpPr txBox="1"/>
-          <p:nvPr/>
-        </p:nvSpPr>
-        <p:spPr>
-          <a:xfrm>
-            <a:off x="6035040" y="4069080"/>
+          <p:cNvPr id="16" name="Text 14"/>
+          <p:cNvSpPr txBox="1"/>
+          <p:nvPr/>
+        </p:nvSpPr>
+        <p:spPr>
+          <a:xfrm>
+            <a:off x="6035040" y="4096512"/>
             <a:ext cx="457200" cy="237744"/>
           </a:xfrm>
           <a:prstGeom prst="rect">
@@ -3840,14 +3798,14 @@
       </p:sp>
       <p:sp>
         <p:nvSpPr>
-          <p:cNvPr id="18" name="Text 16"/>
-          <p:cNvSpPr txBox="1"/>
-          <p:nvPr/>
-        </p:nvSpPr>
-        <p:spPr>
-          <a:xfrm>
-            <a:off x="6601968" y="4050792"/>
-            <a:ext cx="4812487" cy="676656"/>
+          <p:cNvPr id="17" name="Text 15"/>
+          <p:cNvSpPr txBox="1"/>
+          <p:nvPr/>
+        </p:nvSpPr>
+        <p:spPr>
+          <a:xfrm>
+            <a:off x="6601968" y="4078224"/>
+            <a:ext cx="4812487" cy="475488"/>
           </a:xfrm>
           <a:prstGeom prst="rect">
             <a:avLst/>
@@ -3874,7 +3832,7 @@
                 <a:ea typeface="Inter" pitchFamily="34" charset="-122"/>
                 <a:cs typeface="Inter" pitchFamily="34" charset="-120"/>
               </a:rPr>
-              <a:t>Firm commitments made before an assessment</a:t>
+              <a:t>Commitments before an assessment</a:t>
             </a:r>
             <a:endParaRPr lang="en-US" sz="1200" dirty="0"/>
           </a:p>
@@ -3882,13 +3840,13 @@
       </p:sp>
       <p:sp>
         <p:nvSpPr>
-          <p:cNvPr id="19" name="Shape 17"/>
+          <p:cNvPr id="18" name="Shape 16"/>
           <p:cNvSpPr/>
           <p:nvPr/>
         </p:nvSpPr>
         <p:spPr>
           <a:xfrm>
-            <a:off x="6035040" y="4946904"/>
+            <a:off x="6035040" y="4736592"/>
             <a:ext cx="5379415" cy="0"/>
           </a:xfrm>
           <a:prstGeom prst="line">
@@ -3905,13 +3863,13 @@
       </p:sp>
       <p:sp>
         <p:nvSpPr>
-          <p:cNvPr id="20" name="Text 18"/>
-          <p:cNvSpPr txBox="1"/>
-          <p:nvPr/>
-        </p:nvSpPr>
-        <p:spPr>
-          <a:xfrm>
-            <a:off x="6035040" y="5093208"/>
+          <p:cNvPr id="19" name="Text 17"/>
+          <p:cNvSpPr txBox="1"/>
+          <p:nvPr/>
+        </p:nvSpPr>
+        <p:spPr>
+          <a:xfrm>
+            <a:off x="6035040" y="4882896"/>
             <a:ext cx="457200" cy="237744"/>
           </a:xfrm>
           <a:prstGeom prst="rect">
@@ -3944,14 +3902,14 @@
       </p:sp>
       <p:sp>
         <p:nvSpPr>
-          <p:cNvPr id="21" name="Text 19"/>
-          <p:cNvSpPr txBox="1"/>
-          <p:nvPr/>
-        </p:nvSpPr>
-        <p:spPr>
-          <a:xfrm>
-            <a:off x="6601968" y="5074920"/>
-            <a:ext cx="4812487" cy="676656"/>
+          <p:cNvPr id="20" name="Text 18"/>
+          <p:cNvSpPr txBox="1"/>
+          <p:nvPr/>
+        </p:nvSpPr>
+        <p:spPr>
+          <a:xfrm>
+            <a:off x="6601968" y="4864608"/>
+            <a:ext cx="4812487" cy="475488"/>
           </a:xfrm>
           <a:prstGeom prst="rect">
             <a:avLst/>
@@ -3978,7 +3936,7 @@
                 <a:ea typeface="Inter" pitchFamily="34" charset="-122"/>
                 <a:cs typeface="Inter" pitchFamily="34" charset="-120"/>
               </a:rPr>
-              <a:t>Software development or infrastructure operations</a:t>
+              <a:t>Software development and infrastructure operations</a:t>
             </a:r>
             <a:endParaRPr lang="en-US" sz="1200" dirty="0"/>
           </a:p>
@@ -3986,13 +3944,13 @@
       </p:sp>
       <p:sp>
         <p:nvSpPr>
-          <p:cNvPr id="22" name="Shape 20"/>
+          <p:cNvPr id="21" name="Shape 19"/>
           <p:cNvSpPr/>
           <p:nvPr/>
         </p:nvSpPr>
         <p:spPr>
           <a:xfrm>
-            <a:off x="6035040" y="5971032"/>
+            <a:off x="6035040" y="5522976"/>
             <a:ext cx="5379415" cy="0"/>
           </a:xfrm>
           <a:prstGeom prst="line">
@@ -4229,8 +4187,8 @@
         </p:nvSpPr>
         <p:spPr>
           <a:xfrm>
-            <a:off x="777240" y="2487168"/>
-            <a:ext cx="3310128" cy="2798064"/>
+            <a:off x="777240" y="2606040"/>
+            <a:ext cx="3310128" cy="2743200"/>
           </a:xfrm>
           <a:prstGeom prst="rect">
             <a:avLst/>
@@ -4261,7 +4219,7 @@
         </p:nvSpPr>
         <p:spPr>
           <a:xfrm>
-            <a:off x="1129284" y="2894076"/>
+            <a:off x="1129284" y="3086100"/>
             <a:ext cx="137160" cy="137160"/>
           </a:xfrm>
           <a:prstGeom prst="ellipse">
@@ -4281,7 +4239,7 @@
         </p:nvSpPr>
         <p:spPr>
           <a:xfrm>
-            <a:off x="1197864" y="3163824"/>
+            <a:off x="1197864" y="3392424"/>
             <a:ext cx="2468880" cy="384048"/>
           </a:xfrm>
           <a:prstGeom prst="rect">
@@ -4320,8 +4278,8 @@
         </p:nvSpPr>
         <p:spPr>
           <a:xfrm>
-            <a:off x="1197864" y="3639312"/>
-            <a:ext cx="2468880" cy="731520"/>
+            <a:off x="1197864" y="3922776"/>
+            <a:ext cx="2468880" cy="402336"/>
           </a:xfrm>
           <a:prstGeom prst="rect">
             <a:avLst/>
@@ -4348,7 +4306,7 @@
                 <a:ea typeface="Inter" pitchFamily="34" charset="-122"/>
                 <a:cs typeface="Inter" pitchFamily="34" charset="-120"/>
               </a:rPr>
-              <a:t>A decision is due and the evidence is missing.</a:t>
+              <a:t>Evidence for a decision.</a:t>
             </a:r>
             <a:endParaRPr lang="en-US" sz="1100" dirty="0"/>
           </a:p>
@@ -4362,7 +4320,7 @@
         </p:nvSpPr>
         <p:spPr>
           <a:xfrm>
-            <a:off x="1197864" y="4407408"/>
+            <a:off x="1197864" y="4617720"/>
             <a:ext cx="2468880" cy="0"/>
           </a:xfrm>
           <a:prstGeom prst="line">
@@ -4385,49 +4343,7 @@
         </p:nvSpPr>
         <p:spPr>
           <a:xfrm>
-            <a:off x="1197864" y="4517136"/>
-            <a:ext cx="2468880" cy="457200"/>
-          </a:xfrm>
-          <a:prstGeom prst="rect">
-            <a:avLst/>
-          </a:prstGeom>
-          <a:noFill/>
-          <a:ln/>
-        </p:spPr>
-        <p:txBody>
-          <a:bodyPr wrap="square" lIns="0" tIns="0" rIns="0" bIns="0" rtlCol="0" anchor="t"/>
-          <a:lstStyle/>
-          <a:p>
-            <a:pPr indent="0" marL="0">
-              <a:lnSpc>
-                <a:spcPts val="1600"/>
-              </a:lnSpc>
-              <a:buNone/>
-            </a:pPr>
-            <a:r>
-              <a:rPr lang="en-US" sz="1050" i="1" dirty="0">
-                <a:solidFill>
-                  <a:srgbClr val="0E1620"/>
-                </a:solidFill>
-                <a:latin typeface="Inter" pitchFamily="34" charset="0"/>
-                <a:ea typeface="Inter" pitchFamily="34" charset="-122"/>
-                <a:cs typeface="Inter" pitchFamily="34" charset="-120"/>
-              </a:rPr>
-              <a:t>You end it able to decide.</a:t>
-            </a:r>
-            <a:endParaRPr lang="en-US" sz="1050" dirty="0"/>
-          </a:p>
-        </p:txBody>
-      </p:sp>
-      <p:sp>
-        <p:nvSpPr>
-          <p:cNvPr id="13" name="Text 11"/>
-          <p:cNvSpPr txBox="1"/>
-          <p:nvPr/>
-        </p:nvSpPr>
-        <p:spPr>
-          <a:xfrm>
-            <a:off x="1197864" y="5010912"/>
+            <a:off x="1197864" y="4764024"/>
             <a:ext cx="2468880" cy="237744"/>
           </a:xfrm>
           <a:prstGeom prst="rect">
@@ -4460,14 +4376,14 @@
       </p:sp>
       <p:sp>
         <p:nvSpPr>
-          <p:cNvPr id="14" name="Shape 12"/>
+          <p:cNvPr id="13" name="Shape 11"/>
           <p:cNvSpPr/>
           <p:nvPr/>
         </p:nvSpPr>
         <p:spPr>
           <a:xfrm>
-            <a:off x="4471416" y="2487168"/>
-            <a:ext cx="3310128" cy="2798064"/>
+            <a:off x="4471416" y="2606040"/>
+            <a:ext cx="3310128" cy="2743200"/>
           </a:xfrm>
           <a:prstGeom prst="rect">
             <a:avLst/>
@@ -4492,13 +4408,13 @@
       </p:sp>
       <p:sp>
         <p:nvSpPr>
-          <p:cNvPr id="15" name="Shape 13"/>
+          <p:cNvPr id="14" name="Shape 12"/>
           <p:cNvSpPr/>
           <p:nvPr/>
         </p:nvSpPr>
         <p:spPr>
           <a:xfrm>
-            <a:off x="4823460" y="2894076"/>
+            <a:off x="4823460" y="3086100"/>
             <a:ext cx="137160" cy="137160"/>
           </a:xfrm>
           <a:prstGeom prst="ellipse">
@@ -4512,13 +4428,13 @@
       </p:sp>
       <p:sp>
         <p:nvSpPr>
-          <p:cNvPr id="16" name="Text 14"/>
-          <p:cNvSpPr txBox="1"/>
-          <p:nvPr/>
-        </p:nvSpPr>
-        <p:spPr>
-          <a:xfrm>
-            <a:off x="4892040" y="3163824"/>
+          <p:cNvPr id="15" name="Text 13"/>
+          <p:cNvSpPr txBox="1"/>
+          <p:nvPr/>
+        </p:nvSpPr>
+        <p:spPr>
+          <a:xfrm>
+            <a:off x="4892040" y="3392424"/>
             <a:ext cx="2468880" cy="384048"/>
           </a:xfrm>
           <a:prstGeom prst="rect">
@@ -4551,14 +4467,14 @@
       </p:sp>
       <p:sp>
         <p:nvSpPr>
-          <p:cNvPr id="17" name="Text 15"/>
-          <p:cNvSpPr txBox="1"/>
-          <p:nvPr/>
-        </p:nvSpPr>
-        <p:spPr>
-          <a:xfrm>
-            <a:off x="4892040" y="3639312"/>
-            <a:ext cx="2468880" cy="731520"/>
+          <p:cNvPr id="16" name="Text 14"/>
+          <p:cNvSpPr txBox="1"/>
+          <p:nvPr/>
+        </p:nvSpPr>
+        <p:spPr>
+          <a:xfrm>
+            <a:off x="4892040" y="3922776"/>
+            <a:ext cx="2468880" cy="402336"/>
           </a:xfrm>
           <a:prstGeom prst="rect">
             <a:avLst/>
@@ -4585,7 +4501,7 @@
                 <a:ea typeface="Inter" pitchFamily="34" charset="-122"/>
                 <a:cs typeface="Inter" pitchFamily="34" charset="-120"/>
               </a:rPr>
-              <a:t>The decision is taken; it needs building.</a:t>
+              <a:t>End-to-end implementation.</a:t>
             </a:r>
             <a:endParaRPr lang="en-US" sz="1100" dirty="0"/>
           </a:p>
@@ -4593,13 +4509,13 @@
       </p:sp>
       <p:sp>
         <p:nvSpPr>
-          <p:cNvPr id="18" name="Shape 16"/>
+          <p:cNvPr id="17" name="Shape 15"/>
           <p:cNvSpPr/>
           <p:nvPr/>
         </p:nvSpPr>
         <p:spPr>
           <a:xfrm>
-            <a:off x="4892040" y="4407408"/>
+            <a:off x="4892040" y="4617720"/>
             <a:ext cx="2468880" cy="0"/>
           </a:xfrm>
           <a:prstGeom prst="line">
@@ -4616,55 +4532,13 @@
       </p:sp>
       <p:sp>
         <p:nvSpPr>
-          <p:cNvPr id="19" name="Text 17"/>
-          <p:cNvSpPr txBox="1"/>
-          <p:nvPr/>
-        </p:nvSpPr>
-        <p:spPr>
-          <a:xfrm>
-            <a:off x="4892040" y="4517136"/>
-            <a:ext cx="2468880" cy="457200"/>
-          </a:xfrm>
-          <a:prstGeom prst="rect">
-            <a:avLst/>
-          </a:prstGeom>
-          <a:noFill/>
-          <a:ln/>
-        </p:spPr>
-        <p:txBody>
-          <a:bodyPr wrap="square" lIns="0" tIns="0" rIns="0" bIns="0" rtlCol="0" anchor="t"/>
-          <a:lstStyle/>
-          <a:p>
-            <a:pPr indent="0" marL="0">
-              <a:lnSpc>
-                <a:spcPts val="1600"/>
-              </a:lnSpc>
-              <a:buNone/>
-            </a:pPr>
-            <a:r>
-              <a:rPr lang="en-US" sz="1050" i="1" dirty="0">
-                <a:solidFill>
-                  <a:srgbClr val="0E1620"/>
-                </a:solidFill>
-                <a:latin typeface="Inter" pitchFamily="34" charset="0"/>
-                <a:ea typeface="Inter" pitchFamily="34" charset="-122"/>
-                <a:cs typeface="Inter" pitchFamily="34" charset="-120"/>
-              </a:rPr>
-              <a:t>Phased plan, weekly reporting, hypercare included.</a:t>
-            </a:r>
-            <a:endParaRPr lang="en-US" sz="1050" dirty="0"/>
-          </a:p>
-        </p:txBody>
-      </p:sp>
-      <p:sp>
-        <p:nvSpPr>
-          <p:cNvPr id="20" name="Text 18"/>
-          <p:cNvSpPr txBox="1"/>
-          <p:nvPr/>
-        </p:nvSpPr>
-        <p:spPr>
-          <a:xfrm>
-            <a:off x="4892040" y="5010912"/>
+          <p:cNvPr id="18" name="Text 16"/>
+          <p:cNvSpPr txBox="1"/>
+          <p:nvPr/>
+        </p:nvSpPr>
+        <p:spPr>
+          <a:xfrm>
+            <a:off x="4892040" y="4764024"/>
             <a:ext cx="2468880" cy="237744"/>
           </a:xfrm>
           <a:prstGeom prst="rect">
@@ -4697,14 +4571,14 @@
       </p:sp>
       <p:sp>
         <p:nvSpPr>
-          <p:cNvPr id="21" name="Shape 19"/>
+          <p:cNvPr id="19" name="Shape 17"/>
           <p:cNvSpPr/>
           <p:nvPr/>
         </p:nvSpPr>
         <p:spPr>
           <a:xfrm>
-            <a:off x="8165592" y="2487168"/>
-            <a:ext cx="3310128" cy="2798064"/>
+            <a:off x="8165592" y="2606040"/>
+            <a:ext cx="3310128" cy="2743200"/>
           </a:xfrm>
           <a:prstGeom prst="rect">
             <a:avLst/>
@@ -4729,13 +4603,13 @@
       </p:sp>
       <p:sp>
         <p:nvSpPr>
-          <p:cNvPr id="22" name="Shape 20"/>
+          <p:cNvPr id="20" name="Shape 18"/>
           <p:cNvSpPr/>
           <p:nvPr/>
         </p:nvSpPr>
         <p:spPr>
           <a:xfrm>
-            <a:off x="8517636" y="2894076"/>
+            <a:off x="8517636" y="3086100"/>
             <a:ext cx="137160" cy="137160"/>
           </a:xfrm>
           <a:prstGeom prst="ellipse">
@@ -4749,13 +4623,13 @@
       </p:sp>
       <p:sp>
         <p:nvSpPr>
-          <p:cNvPr id="23" name="Text 21"/>
-          <p:cNvSpPr txBox="1"/>
-          <p:nvPr/>
-        </p:nvSpPr>
-        <p:spPr>
-          <a:xfrm>
-            <a:off x="8586216" y="3163824"/>
+          <p:cNvPr id="21" name="Text 19"/>
+          <p:cNvSpPr txBox="1"/>
+          <p:nvPr/>
+        </p:nvSpPr>
+        <p:spPr>
+          <a:xfrm>
+            <a:off x="8586216" y="3392424"/>
             <a:ext cx="2468880" cy="384048"/>
           </a:xfrm>
           <a:prstGeom prst="rect">
@@ -4788,14 +4662,14 @@
       </p:sp>
       <p:sp>
         <p:nvSpPr>
-          <p:cNvPr id="24" name="Text 22"/>
-          <p:cNvSpPr txBox="1"/>
-          <p:nvPr/>
-        </p:nvSpPr>
-        <p:spPr>
-          <a:xfrm>
-            <a:off x="8586216" y="3639312"/>
-            <a:ext cx="2468880" cy="731520"/>
+          <p:cNvPr id="22" name="Text 20"/>
+          <p:cNvSpPr txBox="1"/>
+          <p:nvPr/>
+        </p:nvSpPr>
+        <p:spPr>
+          <a:xfrm>
+            <a:off x="8586216" y="3922776"/>
+            <a:ext cx="2468880" cy="402336"/>
           </a:xfrm>
           <a:prstGeom prst="rect">
             <a:avLst/>
@@ -4822,7 +4696,7 @@
                 <a:ea typeface="Inter" pitchFamily="34" charset="-122"/>
                 <a:cs typeface="Inter" pitchFamily="34" charset="-120"/>
               </a:rPr>
-              <a:t>Someone else runs it and one area needs depth.</a:t>
+              <a:t>Depth in one area.</a:t>
             </a:r>
             <a:endParaRPr lang="en-US" sz="1100" dirty="0"/>
           </a:p>
@@ -4830,13 +4704,13 @@
       </p:sp>
       <p:sp>
         <p:nvSpPr>
-          <p:cNvPr id="25" name="Shape 23"/>
+          <p:cNvPr id="23" name="Shape 21"/>
           <p:cNvSpPr/>
           <p:nvPr/>
         </p:nvSpPr>
         <p:spPr>
           <a:xfrm>
-            <a:off x="8586216" y="4407408"/>
+            <a:off x="8586216" y="4617720"/>
             <a:ext cx="2468880" cy="0"/>
           </a:xfrm>
           <a:prstGeom prst="line">
@@ -4853,55 +4727,13 @@
       </p:sp>
       <p:sp>
         <p:nvSpPr>
-          <p:cNvPr id="26" name="Text 24"/>
-          <p:cNvSpPr txBox="1"/>
-          <p:nvPr/>
-        </p:nvSpPr>
-        <p:spPr>
-          <a:xfrm>
-            <a:off x="8586216" y="4517136"/>
-            <a:ext cx="2468880" cy="457200"/>
-          </a:xfrm>
-          <a:prstGeom prst="rect">
-            <a:avLst/>
-          </a:prstGeom>
-          <a:noFill/>
-          <a:ln/>
-        </p:spPr>
-        <p:txBody>
-          <a:bodyPr wrap="square" lIns="0" tIns="0" rIns="0" bIns="0" rtlCol="0" anchor="t"/>
-          <a:lstStyle/>
-          <a:p>
-            <a:pPr indent="0" marL="0">
-              <a:lnSpc>
-                <a:spcPts val="1600"/>
-              </a:lnSpc>
-              <a:buNone/>
-            </a:pPr>
-            <a:r>
-              <a:rPr lang="en-US" sz="1050" i="1" dirty="0">
-                <a:solidFill>
-                  <a:srgbClr val="0E1620"/>
-                </a:solidFill>
-                <a:latin typeface="Inter" pitchFamily="34" charset="0"/>
-                <a:ea typeface="Inter" pitchFamily="34" charset="-122"/>
-                <a:cs typeface="Inter" pitchFamily="34" charset="-120"/>
-              </a:rPr>
-              <a:t>Narrow scope, agreed output.</a:t>
-            </a:r>
-            <a:endParaRPr lang="en-US" sz="1050" dirty="0"/>
-          </a:p>
-        </p:txBody>
-      </p:sp>
-      <p:sp>
-        <p:nvSpPr>
-          <p:cNvPr id="27" name="Text 25"/>
-          <p:cNvSpPr txBox="1"/>
-          <p:nvPr/>
-        </p:nvSpPr>
-        <p:spPr>
-          <a:xfrm>
-            <a:off x="8586216" y="5010912"/>
+          <p:cNvPr id="24" name="Text 22"/>
+          <p:cNvSpPr txBox="1"/>
+          <p:nvPr/>
+        </p:nvSpPr>
+        <p:spPr>
+          <a:xfrm>
+            <a:off x="8586216" y="4764024"/>
             <a:ext cx="2468880" cy="237744"/>
           </a:xfrm>
           <a:prstGeom prst="rect">
@@ -4929,45 +4761,6 @@
               <a:t>Days to weeks</a:t>
             </a:r>
             <a:endParaRPr lang="en-US" sz="1050" dirty="0"/>
-          </a:p>
-        </p:txBody>
-      </p:sp>
-      <p:sp>
-        <p:nvSpPr>
-          <p:cNvPr id="28" name="Text 26"/>
-          <p:cNvSpPr txBox="1"/>
-          <p:nvPr/>
-        </p:nvSpPr>
-        <p:spPr>
-          <a:xfrm>
-            <a:off x="777240" y="5669280"/>
-            <a:ext cx="10424160" cy="274320"/>
-          </a:xfrm>
-          <a:prstGeom prst="rect">
-            <a:avLst/>
-          </a:prstGeom>
-          <a:noFill/>
-          <a:ln/>
-        </p:spPr>
-        <p:txBody>
-          <a:bodyPr wrap="square" lIns="0" tIns="0" rIns="0" bIns="0" rtlCol="0" anchor="ctr"/>
-          <a:lstStyle/>
-          <a:p>
-            <a:pPr indent="0" marL="0">
-              <a:buNone/>
-            </a:pPr>
-            <a:r>
-              <a:rPr lang="en-US" sz="1200" i="1" dirty="0">
-                <a:solidFill>
-                  <a:srgbClr val="4A5A67"/>
-                </a:solidFill>
-                <a:latin typeface="Inter" pitchFamily="34" charset="0"/>
-                <a:ea typeface="Inter" pitchFamily="34" charset="-122"/>
-                <a:cs typeface="Inter" pitchFamily="34" charset="-120"/>
-              </a:rPr>
-              <a:t>Not every need calls for a full programme.</a:t>
-            </a:r>
-            <a:endParaRPr lang="en-US" sz="1200" dirty="0"/>
           </a:p>
         </p:txBody>
       </p:sp>
@@ -5241,7 +5034,7 @@
                 <a:ea typeface="Inter" pitchFamily="34" charset="-122"/>
                 <a:cs typeface="Inter" pitchFamily="34" charset="-120"/>
               </a:rPr>
-              <a:t>Ten years across SAP finance modules and cloud architecture.</a:t>
+              <a:t>10+ years in SAP finance and cloud architecture.</a:t>
             </a:r>
             <a:endParaRPr lang="en-US" sz="1200" dirty="0"/>
           </a:p>
@@ -5981,7 +5774,7 @@
                 <a:ea typeface="Inter" pitchFamily="34" charset="-122"/>
                 <a:cs typeface="Inter" pitchFamily="34" charset="-120"/>
               </a:rPr>
-              <a:t>The consultant you meet is the one who does the work.</a:t>
+              <a:t>The consultant you meet does the work.</a:t>
             </a:r>
             <a:endParaRPr lang="en-US" sz="1100" dirty="0"/>
           </a:p>
@@ -6107,7 +5900,7 @@
                 <a:ea typeface="Inter" pitchFamily="34" charset="-122"/>
                 <a:cs typeface="Inter" pitchFamily="34" charset="-120"/>
               </a:rPr>
-              <a:t>Finance and cloud architecture. The hard part stays with us.</a:t>
+              <a:t>Finance and cloud architecture only.</a:t>
             </a:r>
             <a:endParaRPr lang="en-US" sz="1100" dirty="0"/>
           </a:p>
@@ -6233,7 +6026,7 @@
                 <a:ea typeface="Inter" pitchFamily="34" charset="-122"/>
                 <a:cs typeface="Inter" pitchFamily="34" charset="-120"/>
               </a:rPr>
-              <a:t>We compare, you decide, the reasoning stays written.</a:t>
+              <a:t>We compare, you decide.</a:t>
             </a:r>
             <a:endParaRPr lang="en-US" sz="1100" dirty="0"/>
           </a:p>
@@ -6359,7 +6152,7 @@
                 <a:ea typeface="Inter" pitchFamily="34" charset="-122"/>
                 <a:cs typeface="Inter" pitchFamily="34" charset="-120"/>
               </a:rPr>
-              <a:t>Scope grows in phases, not in headcount.</a:t>
+              <a:t>Scope grows in phases, not headcount.</a:t>
             </a:r>
             <a:endParaRPr lang="en-US" sz="1100" dirty="0"/>
           </a:p>
@@ -6910,55 +6703,13 @@
       </p:sp>
       <p:sp>
         <p:nvSpPr>
-          <p:cNvPr id="7" name="Text 5"/>
-          <p:cNvSpPr txBox="1"/>
-          <p:nvPr/>
-        </p:nvSpPr>
-        <p:spPr>
-          <a:xfrm>
-            <a:off x="777240" y="2788920"/>
-            <a:ext cx="4892040" cy="1371600"/>
-          </a:xfrm>
-          <a:prstGeom prst="rect">
-            <a:avLst/>
-          </a:prstGeom>
-          <a:noFill/>
-          <a:ln/>
-        </p:spPr>
-        <p:txBody>
-          <a:bodyPr wrap="square" lIns="0" tIns="0" rIns="0" bIns="0" rtlCol="0" anchor="t"/>
-          <a:lstStyle/>
-          <a:p>
-            <a:pPr indent="0" marL="0">
-              <a:lnSpc>
-                <a:spcPts val="2100"/>
-              </a:lnSpc>
-              <a:buNone/>
-            </a:pPr>
-            <a:r>
-              <a:rPr lang="en-US" sz="1300" dirty="0">
-                <a:solidFill>
-                  <a:srgbClr val="4A5A67"/>
-                </a:solidFill>
-                <a:latin typeface="Inter" pitchFamily="34" charset="0"/>
-                <a:ea typeface="Inter" pitchFamily="34" charset="-122"/>
-                <a:cs typeface="Inter" pitchFamily="34" charset="-120"/>
-              </a:rPr>
-              <a:t>Broad scope sold, a specialist sourced per area — and the hardest decision lands with whoever has seen it least.</a:t>
-            </a:r>
-            <a:endParaRPr lang="en-US" sz="1300" dirty="0"/>
-          </a:p>
-        </p:txBody>
-      </p:sp>
-      <p:sp>
-        <p:nvSpPr>
-          <p:cNvPr id="8" name="Shape 6"/>
+          <p:cNvPr id="7" name="Shape 5"/>
           <p:cNvSpPr/>
           <p:nvPr/>
         </p:nvSpPr>
         <p:spPr>
           <a:xfrm>
-            <a:off x="777240" y="4206240"/>
+            <a:off x="777240" y="3703320"/>
             <a:ext cx="0" cy="1051560"/>
           </a:xfrm>
           <a:prstGeom prst="line">
@@ -6975,13 +6726,13 @@
       </p:sp>
       <p:sp>
         <p:nvSpPr>
-          <p:cNvPr id="9" name="Text 7"/>
-          <p:cNvSpPr txBox="1"/>
-          <p:nvPr/>
-        </p:nvSpPr>
-        <p:spPr>
-          <a:xfrm>
-            <a:off x="1033272" y="4206240"/>
+          <p:cNvPr id="8" name="Text 6"/>
+          <p:cNvSpPr txBox="1"/>
+          <p:nvPr/>
+        </p:nvSpPr>
+        <p:spPr>
+          <a:xfrm>
+            <a:off x="1033272" y="3703320"/>
             <a:ext cx="4617720" cy="1051560"/>
           </a:xfrm>
           <a:prstGeom prst="rect">
@@ -7017,7 +6768,7 @@
       </p:sp>
       <p:sp>
         <p:nvSpPr>
-          <p:cNvPr id="10" name="Text 8"/>
+          <p:cNvPr id="9" name="Text 7"/>
           <p:cNvSpPr txBox="1"/>
           <p:nvPr/>
         </p:nvSpPr>
@@ -7056,7 +6807,7 @@
       </p:sp>
       <p:sp>
         <p:nvSpPr>
-          <p:cNvPr id="11" name="Shape 9"/>
+          <p:cNvPr id="10" name="Shape 8"/>
           <p:cNvSpPr/>
           <p:nvPr/>
         </p:nvSpPr>
@@ -7079,7 +6830,7 @@
       </p:sp>
       <p:sp>
         <p:nvSpPr>
-          <p:cNvPr id="12" name="Shape 10"/>
+          <p:cNvPr id="11" name="Shape 9"/>
           <p:cNvSpPr/>
           <p:nvPr/>
         </p:nvSpPr>
@@ -7099,7 +6850,7 @@
       </p:sp>
       <p:sp>
         <p:nvSpPr>
-          <p:cNvPr id="13" name="Shape 11"/>
+          <p:cNvPr id="12" name="Shape 10"/>
           <p:cNvSpPr/>
           <p:nvPr/>
         </p:nvSpPr>
@@ -7119,7 +6870,7 @@
       </p:sp>
       <p:sp>
         <p:nvSpPr>
-          <p:cNvPr id="14" name="Shape 12"/>
+          <p:cNvPr id="13" name="Shape 11"/>
           <p:cNvSpPr/>
           <p:nvPr/>
         </p:nvSpPr>
@@ -7139,7 +6890,7 @@
       </p:sp>
       <p:sp>
         <p:nvSpPr>
-          <p:cNvPr id="15" name="Shape 13"/>
+          <p:cNvPr id="14" name="Shape 12"/>
           <p:cNvSpPr/>
           <p:nvPr/>
         </p:nvSpPr>
@@ -7159,7 +6910,7 @@
       </p:sp>
       <p:sp>
         <p:nvSpPr>
-          <p:cNvPr id="16" name="Shape 14"/>
+          <p:cNvPr id="15" name="Shape 13"/>
           <p:cNvSpPr/>
           <p:nvPr/>
         </p:nvSpPr>
@@ -7179,7 +6930,7 @@
       </p:sp>
       <p:sp>
         <p:nvSpPr>
-          <p:cNvPr id="17" name="Shape 15"/>
+          <p:cNvPr id="16" name="Shape 14"/>
           <p:cNvSpPr/>
           <p:nvPr/>
         </p:nvSpPr>
@@ -7199,7 +6950,7 @@
       </p:sp>
       <p:sp>
         <p:nvSpPr>
-          <p:cNvPr id="18" name="Text 16"/>
+          <p:cNvPr id="17" name="Text 15"/>
           <p:cNvSpPr txBox="1"/>
           <p:nvPr/>
         </p:nvSpPr>
@@ -7238,7 +6989,7 @@
       </p:sp>
       <p:sp>
         <p:nvSpPr>
-          <p:cNvPr id="19" name="Text 17"/>
+          <p:cNvPr id="18" name="Text 16"/>
           <p:cNvSpPr txBox="1"/>
           <p:nvPr/>
         </p:nvSpPr>
@@ -7277,7 +7028,7 @@
       </p:sp>
       <p:sp>
         <p:nvSpPr>
-          <p:cNvPr id="20" name="Text 18"/>
+          <p:cNvPr id="19" name="Text 17"/>
           <p:cNvSpPr txBox="1"/>
           <p:nvPr/>
         </p:nvSpPr>
@@ -7316,7 +7067,7 @@
       </p:sp>
       <p:sp>
         <p:nvSpPr>
-          <p:cNvPr id="21" name="Shape 19"/>
+          <p:cNvPr id="20" name="Shape 18"/>
           <p:cNvSpPr/>
           <p:nvPr/>
         </p:nvSpPr>
@@ -7339,7 +7090,7 @@
       </p:sp>
       <p:sp>
         <p:nvSpPr>
-          <p:cNvPr id="22" name="Shape 20"/>
+          <p:cNvPr id="21" name="Shape 19"/>
           <p:cNvSpPr/>
           <p:nvPr/>
         </p:nvSpPr>
@@ -7359,13 +7110,13 @@
       </p:sp>
       <p:sp>
         <p:nvSpPr>
-          <p:cNvPr id="23" name="Shape 21"/>
+          <p:cNvPr id="22" name="Shape 20"/>
           <p:cNvSpPr/>
           <p:nvPr/>
         </p:nvSpPr>
         <p:spPr>
           <a:xfrm>
-            <a:off x="7607808" y="3310128"/>
+            <a:off x="7607808" y="3520440"/>
             <a:ext cx="201168" cy="0"/>
           </a:xfrm>
           <a:prstGeom prst="line">
@@ -7382,13 +7133,13 @@
       </p:sp>
       <p:sp>
         <p:nvSpPr>
-          <p:cNvPr id="24" name="Shape 22"/>
+          <p:cNvPr id="23" name="Shape 21"/>
           <p:cNvSpPr/>
           <p:nvPr/>
         </p:nvSpPr>
         <p:spPr>
           <a:xfrm>
-            <a:off x="7566660" y="3268980"/>
+            <a:off x="7566660" y="3479292"/>
             <a:ext cx="82296" cy="82296"/>
           </a:xfrm>
           <a:prstGeom prst="ellipse">
@@ -7402,13 +7153,13 @@
       </p:sp>
       <p:sp>
         <p:nvSpPr>
-          <p:cNvPr id="25" name="Text 23"/>
-          <p:cNvSpPr txBox="1"/>
-          <p:nvPr/>
-        </p:nvSpPr>
-        <p:spPr>
-          <a:xfrm>
-            <a:off x="7936992" y="3186684"/>
+          <p:cNvPr id="24" name="Text 22"/>
+          <p:cNvSpPr txBox="1"/>
+          <p:nvPr/>
+        </p:nvSpPr>
+        <p:spPr>
+          <a:xfrm>
+            <a:off x="7936992" y="3396996"/>
             <a:ext cx="3017520" cy="274320"/>
           </a:xfrm>
           <a:prstGeom prst="rect">
@@ -7433,7 +7184,7 @@
                 <a:ea typeface="Inter" pitchFamily="34" charset="-122"/>
                 <a:cs typeface="Inter" pitchFamily="34" charset="-120"/>
               </a:rPr>
-              <a:t>Enterprise structure and chart of accounts</a:t>
+              <a:t>Finance modules — FI, CO, PA, PS</a:t>
             </a:r>
             <a:endParaRPr lang="en-US" sz="1000" dirty="0"/>
           </a:p>
@@ -7441,13 +7192,13 @@
       </p:sp>
       <p:sp>
         <p:nvSpPr>
-          <p:cNvPr id="26" name="Shape 24"/>
+          <p:cNvPr id="25" name="Shape 23"/>
           <p:cNvSpPr/>
           <p:nvPr/>
         </p:nvSpPr>
         <p:spPr>
           <a:xfrm>
-            <a:off x="7607808" y="3813048"/>
+            <a:off x="7607808" y="4389120"/>
             <a:ext cx="201168" cy="0"/>
           </a:xfrm>
           <a:prstGeom prst="line">
@@ -7464,13 +7215,13 @@
       </p:sp>
       <p:sp>
         <p:nvSpPr>
-          <p:cNvPr id="27" name="Shape 25"/>
+          <p:cNvPr id="26" name="Shape 24"/>
           <p:cNvSpPr/>
           <p:nvPr/>
         </p:nvSpPr>
         <p:spPr>
           <a:xfrm>
-            <a:off x="7566660" y="3771900"/>
+            <a:off x="7566660" y="4347972"/>
             <a:ext cx="82296" cy="82296"/>
           </a:xfrm>
           <a:prstGeom prst="ellipse">
@@ -7484,13 +7235,13 @@
       </p:sp>
       <p:sp>
         <p:nvSpPr>
-          <p:cNvPr id="28" name="Text 26"/>
-          <p:cNvSpPr txBox="1"/>
-          <p:nvPr/>
-        </p:nvSpPr>
-        <p:spPr>
-          <a:xfrm>
-            <a:off x="7936992" y="3689604"/>
+          <p:cNvPr id="27" name="Text 25"/>
+          <p:cNvSpPr txBox="1"/>
+          <p:nvPr/>
+        </p:nvSpPr>
+        <p:spPr>
+          <a:xfrm>
+            <a:off x="7936992" y="4265676"/>
             <a:ext cx="3017520" cy="274320"/>
           </a:xfrm>
           <a:prstGeom prst="rect">
@@ -7515,7 +7266,7 @@
                 <a:ea typeface="Inter" pitchFamily="34" charset="-122"/>
                 <a:cs typeface="Inter" pitchFamily="34" charset="-120"/>
               </a:rPr>
-              <a:t>Controlling, margin and project accounting</a:t>
+              <a:t>Cloud architecture — Private, Public</a:t>
             </a:r>
             <a:endParaRPr lang="en-US" sz="1000" dirty="0"/>
           </a:p>
@@ -7523,13 +7274,13 @@
       </p:sp>
       <p:sp>
         <p:nvSpPr>
-          <p:cNvPr id="29" name="Shape 27"/>
+          <p:cNvPr id="28" name="Shape 26"/>
           <p:cNvSpPr/>
           <p:nvPr/>
         </p:nvSpPr>
         <p:spPr>
           <a:xfrm>
-            <a:off x="7607808" y="4315968"/>
+            <a:off x="7607808" y="5257800"/>
             <a:ext cx="201168" cy="0"/>
           </a:xfrm>
           <a:prstGeom prst="line">
@@ -7546,13 +7297,13 @@
       </p:sp>
       <p:sp>
         <p:nvSpPr>
-          <p:cNvPr id="30" name="Shape 28"/>
+          <p:cNvPr id="29" name="Shape 27"/>
           <p:cNvSpPr/>
           <p:nvPr/>
         </p:nvSpPr>
         <p:spPr>
           <a:xfrm>
-            <a:off x="7566660" y="4274820"/>
+            <a:off x="7566660" y="5216652"/>
             <a:ext cx="82296" cy="82296"/>
           </a:xfrm>
           <a:prstGeom prst="ellipse">
@@ -7566,13 +7317,13 @@
       </p:sp>
       <p:sp>
         <p:nvSpPr>
-          <p:cNvPr id="31" name="Text 29"/>
-          <p:cNvSpPr txBox="1"/>
-          <p:nvPr/>
-        </p:nvSpPr>
-        <p:spPr>
-          <a:xfrm>
-            <a:off x="7936992" y="4192524"/>
+          <p:cNvPr id="30" name="Text 28"/>
+          <p:cNvSpPr txBox="1"/>
+          <p:nvPr/>
+        </p:nvSpPr>
+        <p:spPr>
+          <a:xfrm>
+            <a:off x="7936992" y="5134356"/>
             <a:ext cx="3017520" cy="274320"/>
           </a:xfrm>
           <a:prstGeom prst="rect">
@@ -7597,89 +7348,7 @@
                 <a:ea typeface="Inter" pitchFamily="34" charset="-122"/>
                 <a:cs typeface="Inter" pitchFamily="34" charset="-120"/>
               </a:rPr>
-              <a:t>The close, rebuilt as parallel steps</a:t>
-            </a:r>
-            <a:endParaRPr lang="en-US" sz="1000" dirty="0"/>
-          </a:p>
-        </p:txBody>
-      </p:sp>
-      <p:sp>
-        <p:nvSpPr>
-          <p:cNvPr id="32" name="Shape 30"/>
-          <p:cNvSpPr/>
-          <p:nvPr/>
-        </p:nvSpPr>
-        <p:spPr>
-          <a:xfrm>
-            <a:off x="7607808" y="4818888"/>
-            <a:ext cx="201168" cy="0"/>
-          </a:xfrm>
-          <a:prstGeom prst="line">
-            <a:avLst/>
-          </a:prstGeom>
-          <a:noFill/>
-          <a:ln w="12700">
-            <a:solidFill>
-              <a:srgbClr val="11676A"/>
-            </a:solidFill>
-            <a:prstDash val="solid"/>
-          </a:ln>
-        </p:spPr>
-      </p:sp>
-      <p:sp>
-        <p:nvSpPr>
-          <p:cNvPr id="33" name="Shape 31"/>
-          <p:cNvSpPr/>
-          <p:nvPr/>
-        </p:nvSpPr>
-        <p:spPr>
-          <a:xfrm>
-            <a:off x="7566660" y="4777740"/>
-            <a:ext cx="82296" cy="82296"/>
-          </a:xfrm>
-          <a:prstGeom prst="ellipse">
-            <a:avLst/>
-          </a:prstGeom>
-          <a:solidFill>
-            <a:srgbClr val="11676A"/>
-          </a:solidFill>
-          <a:ln/>
-        </p:spPr>
-      </p:sp>
-      <p:sp>
-        <p:nvSpPr>
-          <p:cNvPr id="34" name="Text 32"/>
-          <p:cNvSpPr txBox="1"/>
-          <p:nvPr/>
-        </p:nvSpPr>
-        <p:spPr>
-          <a:xfrm>
-            <a:off x="7936992" y="4695444"/>
-            <a:ext cx="3017520" cy="274320"/>
-          </a:xfrm>
-          <a:prstGeom prst="rect">
-            <a:avLst/>
-          </a:prstGeom>
-          <a:noFill/>
-          <a:ln/>
-        </p:spPr>
-        <p:txBody>
-          <a:bodyPr wrap="square" lIns="0" tIns="0" rIns="0" bIns="0" rtlCol="0" anchor="ctr"/>
-          <a:lstStyle/>
-          <a:p>
-            <a:pPr indent="0" marL="0">
-              <a:buNone/>
-            </a:pPr>
-            <a:r>
-              <a:rPr lang="en-US" sz="1000" dirty="0">
-                <a:solidFill>
-                  <a:srgbClr val="0E1620"/>
-                </a:solidFill>
-                <a:latin typeface="Inter" pitchFamily="34" charset="0"/>
-                <a:ea typeface="Inter" pitchFamily="34" charset="-122"/>
-                <a:cs typeface="Inter" pitchFamily="34" charset="-120"/>
-              </a:rPr>
-              <a:t>Cloud model, measured not advocated</a:t>
+              <a:t>AI and process automation</a:t>
             </a:r>
             <a:endParaRPr lang="en-US" sz="1000" dirty="0"/>
           </a:p>
@@ -7953,8 +7622,8 @@
         </p:nvSpPr>
         <p:spPr>
           <a:xfrm>
-            <a:off x="777240" y="2999232"/>
-            <a:ext cx="5029200" cy="914400"/>
+            <a:off x="777240" y="2788920"/>
+            <a:ext cx="5029200" cy="1051560"/>
           </a:xfrm>
           <a:prstGeom prst="rect">
             <a:avLst/>
@@ -7968,22 +7637,62 @@
           <a:p>
             <a:pPr indent="0" marL="0">
               <a:lnSpc>
-                <a:spcPts val="2100"/>
+                <a:spcPts val="2500"/>
               </a:lnSpc>
               <a:buNone/>
             </a:pPr>
             <a:r>
-              <a:rPr lang="en-US" sz="1300" dirty="0">
-                <a:solidFill>
-                  <a:srgbClr val="D2DDE6"/>
-                </a:solidFill>
-                <a:latin typeface="Inter" pitchFamily="34" charset="0"/>
-                <a:ea typeface="Inter" pitchFamily="34" charset="-122"/>
-                <a:cs typeface="Inter" pitchFamily="34" charset="-120"/>
-              </a:rPr>
-              <a:t>Enterprise structure. Conversion route. Cloud model. Decided in the first weeks, lived with for a decade.</a:t>
-            </a:r>
-            <a:endParaRPr lang="en-US" sz="1300" dirty="0"/>
+              <a:rPr lang="en-US" sz="1600" b="1" dirty="0">
+                <a:solidFill>
+                  <a:srgbClr val="FFFFFF"/>
+                </a:solidFill>
+                <a:latin typeface="Schibsted Grotesk" pitchFamily="34" charset="0"/>
+                <a:ea typeface="Schibsted Grotesk" pitchFamily="34" charset="-122"/>
+                <a:cs typeface="Schibsted Grotesk" pitchFamily="34" charset="-120"/>
+              </a:rPr>
+              <a:t>Enterprise structure.</a:t>
+            </a:r>
+            <a:endParaRPr lang="en-US" sz="1600" dirty="0"/>
+          </a:p>
+          <a:p>
+            <a:pPr indent="0" marL="0">
+              <a:lnSpc>
+                <a:spcPts val="2500"/>
+              </a:lnSpc>
+              <a:buNone/>
+            </a:pPr>
+            <a:r>
+              <a:rPr lang="en-US" sz="1600" b="1" dirty="0">
+                <a:solidFill>
+                  <a:srgbClr val="FFFFFF"/>
+                </a:solidFill>
+                <a:latin typeface="Schibsted Grotesk" pitchFamily="34" charset="0"/>
+                <a:ea typeface="Schibsted Grotesk" pitchFamily="34" charset="-122"/>
+                <a:cs typeface="Schibsted Grotesk" pitchFamily="34" charset="-120"/>
+              </a:rPr>
+              <a:t>Conversion route.</a:t>
+            </a:r>
+            <a:endParaRPr lang="en-US" sz="1600" dirty="0"/>
+          </a:p>
+          <a:p>
+            <a:pPr indent="0" marL="0">
+              <a:lnSpc>
+                <a:spcPts val="2500"/>
+              </a:lnSpc>
+              <a:buNone/>
+            </a:pPr>
+            <a:r>
+              <a:rPr lang="en-US" sz="1600" b="1" dirty="0">
+                <a:solidFill>
+                  <a:srgbClr val="FFFFFF"/>
+                </a:solidFill>
+                <a:latin typeface="Schibsted Grotesk" pitchFamily="34" charset="0"/>
+                <a:ea typeface="Schibsted Grotesk" pitchFamily="34" charset="-122"/>
+                <a:cs typeface="Schibsted Grotesk" pitchFamily="34" charset="-120"/>
+              </a:rPr>
+              <a:t>Cloud model.</a:t>
+            </a:r>
+            <a:endParaRPr lang="en-US" sz="1600" dirty="0"/>
           </a:p>
         </p:txBody>
       </p:sp>
@@ -7995,7 +7704,7 @@
         </p:nvSpPr>
         <p:spPr>
           <a:xfrm>
-            <a:off x="777240" y="3950208"/>
+            <a:off x="777240" y="4133088"/>
             <a:ext cx="0" cy="1051560"/>
           </a:xfrm>
           <a:prstGeom prst="line">
@@ -8018,7 +7727,7 @@
         </p:nvSpPr>
         <p:spPr>
           <a:xfrm>
-            <a:off x="1033272" y="3950208"/>
+            <a:off x="1033272" y="4133088"/>
             <a:ext cx="4754880" cy="1051560"/>
           </a:xfrm>
           <a:prstGeom prst="rect">
@@ -8695,52 +8404,13 @@
       </p:sp>
       <p:sp>
         <p:nvSpPr>
-          <p:cNvPr id="7" name="Text 5"/>
-          <p:cNvSpPr txBox="1"/>
-          <p:nvPr/>
-        </p:nvSpPr>
-        <p:spPr>
-          <a:xfrm>
-            <a:off x="777240" y="2157984"/>
-            <a:ext cx="9692640" cy="292608"/>
-          </a:xfrm>
-          <a:prstGeom prst="rect">
-            <a:avLst/>
-          </a:prstGeom>
-          <a:noFill/>
-          <a:ln/>
-        </p:spPr>
-        <p:txBody>
-          <a:bodyPr wrap="square" lIns="0" tIns="0" rIns="0" bIns="0" rtlCol="0" anchor="ctr"/>
-          <a:lstStyle/>
-          <a:p>
-            <a:pPr indent="0" marL="0">
-              <a:buNone/>
-            </a:pPr>
-            <a:r>
-              <a:rPr lang="en-US" sz="1250" i="1" dirty="0">
-                <a:solidFill>
-                  <a:srgbClr val="4A5A67"/>
-                </a:solidFill>
-                <a:latin typeface="Inter" pitchFamily="34" charset="0"/>
-                <a:ea typeface="Inter" pitchFamily="34" charset="-122"/>
-                <a:cs typeface="Inter" pitchFamily="34" charset="-120"/>
-              </a:rPr>
-              <a:t>Most SAP problems live in the seams between these three.</a:t>
-            </a:r>
-            <a:endParaRPr lang="en-US" sz="1250" dirty="0"/>
-          </a:p>
-        </p:txBody>
-      </p:sp>
-      <p:sp>
-        <p:nvSpPr>
-          <p:cNvPr id="8" name="Shape 6"/>
+          <p:cNvPr id="7" name="Shape 5"/>
           <p:cNvSpPr/>
           <p:nvPr/>
         </p:nvSpPr>
         <p:spPr>
           <a:xfrm>
-            <a:off x="777240" y="2670048"/>
+            <a:off x="777240" y="2331720"/>
             <a:ext cx="137160" cy="137160"/>
           </a:xfrm>
           <a:prstGeom prst="ellipse">
@@ -8754,13 +8424,13 @@
       </p:sp>
       <p:sp>
         <p:nvSpPr>
-          <p:cNvPr id="9" name="Text 7"/>
-          <p:cNvSpPr txBox="1"/>
-          <p:nvPr/>
-        </p:nvSpPr>
-        <p:spPr>
-          <a:xfrm>
-            <a:off x="1069848" y="2624328"/>
+          <p:cNvPr id="8" name="Text 6"/>
+          <p:cNvSpPr txBox="1"/>
+          <p:nvPr/>
+        </p:nvSpPr>
+        <p:spPr>
+          <a:xfrm>
+            <a:off x="1069848" y="2286000"/>
             <a:ext cx="2834640" cy="237744"/>
           </a:xfrm>
           <a:prstGeom prst="rect">
@@ -8793,13 +8463,13 @@
       </p:sp>
       <p:sp>
         <p:nvSpPr>
-          <p:cNvPr id="10" name="Text 8"/>
-          <p:cNvSpPr txBox="1"/>
-          <p:nvPr/>
-        </p:nvSpPr>
-        <p:spPr>
-          <a:xfrm>
-            <a:off x="777240" y="3054096"/>
+          <p:cNvPr id="9" name="Text 7"/>
+          <p:cNvSpPr txBox="1"/>
+          <p:nvPr/>
+        </p:nvSpPr>
+        <p:spPr>
+          <a:xfrm>
+            <a:off x="777240" y="2715768"/>
             <a:ext cx="3127248" cy="603504"/>
           </a:xfrm>
           <a:prstGeom prst="rect">
@@ -8835,14 +8505,14 @@
       </p:sp>
       <p:sp>
         <p:nvSpPr>
-          <p:cNvPr id="11" name="Text 9"/>
-          <p:cNvSpPr txBox="1"/>
-          <p:nvPr/>
-        </p:nvSpPr>
-        <p:spPr>
-          <a:xfrm>
-            <a:off x="777240" y="3767328"/>
-            <a:ext cx="2990088" cy="868680"/>
+          <p:cNvPr id="10" name="Text 8"/>
+          <p:cNvSpPr txBox="1"/>
+          <p:nvPr/>
+        </p:nvSpPr>
+        <p:spPr>
+          <a:xfrm>
+            <a:off x="777240" y="3429000"/>
+            <a:ext cx="2990088" cy="566928"/>
           </a:xfrm>
           <a:prstGeom prst="rect">
             <a:avLst/>
@@ -8861,29 +8531,29 @@
               <a:buNone/>
             </a:pPr>
             <a:r>
-              <a:rPr lang="en-US" sz="1100" dirty="0">
-                <a:solidFill>
-                  <a:srgbClr val="4A5A67"/>
-                </a:solidFill>
-                <a:latin typeface="Inter" pitchFamily="34" charset="0"/>
-                <a:ea typeface="Inter" pitchFamily="34" charset="-122"/>
-                <a:cs typeface="Inter" pitchFamily="34" charset="-120"/>
-              </a:rPr>
-              <a:t>FI, CO, PA and PS — structure, costing, margin, the close.</a:t>
-            </a:r>
-            <a:endParaRPr lang="en-US" sz="1100" dirty="0"/>
-          </a:p>
-        </p:txBody>
-      </p:sp>
-      <p:sp>
-        <p:nvSpPr>
-          <p:cNvPr id="12" name="Shape 10"/>
+              <a:rPr lang="en-US" sz="1050" dirty="0">
+                <a:solidFill>
+                  <a:srgbClr val="11676A"/>
+                </a:solidFill>
+                <a:latin typeface="IBM Plex Mono" pitchFamily="34" charset="0"/>
+                <a:ea typeface="IBM Plex Mono" pitchFamily="34" charset="-122"/>
+                <a:cs typeface="IBM Plex Mono" pitchFamily="34" charset="-120"/>
+              </a:rPr>
+              <a:t>FI · CO · PA · PS</a:t>
+            </a:r>
+            <a:endParaRPr lang="en-US" sz="1050" dirty="0"/>
+          </a:p>
+        </p:txBody>
+      </p:sp>
+      <p:sp>
+        <p:nvSpPr>
+          <p:cNvPr id="11" name="Shape 9"/>
           <p:cNvSpPr/>
           <p:nvPr/>
         </p:nvSpPr>
         <p:spPr>
           <a:xfrm>
-            <a:off x="845820" y="4809744"/>
+            <a:off x="845820" y="4471416"/>
             <a:ext cx="0" cy="274320"/>
           </a:xfrm>
           <a:prstGeom prst="line">
@@ -8900,13 +8570,13 @@
       </p:sp>
       <p:sp>
         <p:nvSpPr>
-          <p:cNvPr id="13" name="Shape 11"/>
+          <p:cNvPr id="12" name="Shape 10"/>
           <p:cNvSpPr/>
           <p:nvPr/>
         </p:nvSpPr>
         <p:spPr>
           <a:xfrm>
-            <a:off x="4526280" y="2670048"/>
+            <a:off x="4526280" y="2331720"/>
             <a:ext cx="137160" cy="137160"/>
           </a:xfrm>
           <a:prstGeom prst="ellipse">
@@ -8920,13 +8590,13 @@
       </p:sp>
       <p:sp>
         <p:nvSpPr>
-          <p:cNvPr id="14" name="Text 12"/>
-          <p:cNvSpPr txBox="1"/>
-          <p:nvPr/>
-        </p:nvSpPr>
-        <p:spPr>
-          <a:xfrm>
-            <a:off x="4818888" y="2624328"/>
+          <p:cNvPr id="13" name="Text 11"/>
+          <p:cNvSpPr txBox="1"/>
+          <p:nvPr/>
+        </p:nvSpPr>
+        <p:spPr>
+          <a:xfrm>
+            <a:off x="4818888" y="2286000"/>
             <a:ext cx="2834640" cy="237744"/>
           </a:xfrm>
           <a:prstGeom prst="rect">
@@ -8959,13 +8629,13 @@
       </p:sp>
       <p:sp>
         <p:nvSpPr>
-          <p:cNvPr id="15" name="Text 13"/>
-          <p:cNvSpPr txBox="1"/>
-          <p:nvPr/>
-        </p:nvSpPr>
-        <p:spPr>
-          <a:xfrm>
-            <a:off x="4526280" y="3054096"/>
+          <p:cNvPr id="14" name="Text 12"/>
+          <p:cNvSpPr txBox="1"/>
+          <p:nvPr/>
+        </p:nvSpPr>
+        <p:spPr>
+          <a:xfrm>
+            <a:off x="4526280" y="2715768"/>
             <a:ext cx="3127248" cy="603504"/>
           </a:xfrm>
           <a:prstGeom prst="rect">
@@ -9001,14 +8671,14 @@
       </p:sp>
       <p:sp>
         <p:nvSpPr>
-          <p:cNvPr id="16" name="Text 14"/>
-          <p:cNvSpPr txBox="1"/>
-          <p:nvPr/>
-        </p:nvSpPr>
-        <p:spPr>
-          <a:xfrm>
-            <a:off x="4526280" y="3767328"/>
-            <a:ext cx="2990088" cy="868680"/>
+          <p:cNvPr id="15" name="Text 13"/>
+          <p:cNvSpPr txBox="1"/>
+          <p:nvPr/>
+        </p:nvSpPr>
+        <p:spPr>
+          <a:xfrm>
+            <a:off x="4526280" y="3429000"/>
+            <a:ext cx="2990088" cy="566928"/>
           </a:xfrm>
           <a:prstGeom prst="rect">
             <a:avLst/>
@@ -9027,29 +8697,29 @@
               <a:buNone/>
             </a:pPr>
             <a:r>
-              <a:rPr lang="en-US" sz="1100" dirty="0">
-                <a:solidFill>
-                  <a:srgbClr val="4A5A67"/>
-                </a:solidFill>
-                <a:latin typeface="Inter" pitchFamily="34" charset="0"/>
-                <a:ea typeface="Inter" pitchFamily="34" charset="-122"/>
-                <a:cs typeface="Inter" pitchFamily="34" charset="-120"/>
-              </a:rPr>
-              <a:t>ECC, S/4HANA, Private and Public Cloud — compared, not advocated.</a:t>
-            </a:r>
-            <a:endParaRPr lang="en-US" sz="1100" dirty="0"/>
-          </a:p>
-        </p:txBody>
-      </p:sp>
-      <p:sp>
-        <p:nvSpPr>
-          <p:cNvPr id="17" name="Shape 15"/>
+              <a:rPr lang="en-US" sz="1050" dirty="0">
+                <a:solidFill>
+                  <a:srgbClr val="11676A"/>
+                </a:solidFill>
+                <a:latin typeface="IBM Plex Mono" pitchFamily="34" charset="0"/>
+                <a:ea typeface="IBM Plex Mono" pitchFamily="34" charset="-122"/>
+                <a:cs typeface="IBM Plex Mono" pitchFamily="34" charset="-120"/>
+              </a:rPr>
+              <a:t>ECC · S/4HANA · Private and Public Cloud</a:t>
+            </a:r>
+            <a:endParaRPr lang="en-US" sz="1050" dirty="0"/>
+          </a:p>
+        </p:txBody>
+      </p:sp>
+      <p:sp>
+        <p:nvSpPr>
+          <p:cNvPr id="16" name="Shape 14"/>
           <p:cNvSpPr/>
           <p:nvPr/>
         </p:nvSpPr>
         <p:spPr>
           <a:xfrm>
-            <a:off x="4594860" y="4809744"/>
+            <a:off x="4594860" y="4471416"/>
             <a:ext cx="0" cy="274320"/>
           </a:xfrm>
           <a:prstGeom prst="line">
@@ -9066,13 +8736,13 @@
       </p:sp>
       <p:sp>
         <p:nvSpPr>
-          <p:cNvPr id="18" name="Shape 16"/>
+          <p:cNvPr id="17" name="Shape 15"/>
           <p:cNvSpPr/>
           <p:nvPr/>
         </p:nvSpPr>
         <p:spPr>
           <a:xfrm>
-            <a:off x="8275320" y="2670048"/>
+            <a:off x="8275320" y="2331720"/>
             <a:ext cx="137160" cy="137160"/>
           </a:xfrm>
           <a:prstGeom prst="ellipse">
@@ -9086,13 +8756,13 @@
       </p:sp>
       <p:sp>
         <p:nvSpPr>
-          <p:cNvPr id="19" name="Text 17"/>
-          <p:cNvSpPr txBox="1"/>
-          <p:nvPr/>
-        </p:nvSpPr>
-        <p:spPr>
-          <a:xfrm>
-            <a:off x="8567928" y="2624328"/>
+          <p:cNvPr id="18" name="Text 16"/>
+          <p:cNvSpPr txBox="1"/>
+          <p:nvPr/>
+        </p:nvSpPr>
+        <p:spPr>
+          <a:xfrm>
+            <a:off x="8567928" y="2286000"/>
             <a:ext cx="2834640" cy="237744"/>
           </a:xfrm>
           <a:prstGeom prst="rect">
@@ -9125,13 +8795,13 @@
       </p:sp>
       <p:sp>
         <p:nvSpPr>
-          <p:cNvPr id="20" name="Text 18"/>
-          <p:cNvSpPr txBox="1"/>
-          <p:nvPr/>
-        </p:nvSpPr>
-        <p:spPr>
-          <a:xfrm>
-            <a:off x="8275320" y="3054096"/>
+          <p:cNvPr id="19" name="Text 17"/>
+          <p:cNvSpPr txBox="1"/>
+          <p:nvPr/>
+        </p:nvSpPr>
+        <p:spPr>
+          <a:xfrm>
+            <a:off x="8275320" y="2715768"/>
             <a:ext cx="3127248" cy="603504"/>
           </a:xfrm>
           <a:prstGeom prst="rect">
@@ -9167,14 +8837,14 @@
       </p:sp>
       <p:sp>
         <p:nvSpPr>
-          <p:cNvPr id="21" name="Text 19"/>
-          <p:cNvSpPr txBox="1"/>
-          <p:nvPr/>
-        </p:nvSpPr>
-        <p:spPr>
-          <a:xfrm>
-            <a:off x="8275320" y="3767328"/>
-            <a:ext cx="2990088" cy="868680"/>
+          <p:cNvPr id="20" name="Text 18"/>
+          <p:cNvSpPr txBox="1"/>
+          <p:nvPr/>
+        </p:nvSpPr>
+        <p:spPr>
+          <a:xfrm>
+            <a:off x="8275320" y="3429000"/>
+            <a:ext cx="2990088" cy="566928"/>
           </a:xfrm>
           <a:prstGeom prst="rect">
             <a:avLst/>
@@ -9193,29 +8863,29 @@
               <a:buNone/>
             </a:pPr>
             <a:r>
-              <a:rPr lang="en-US" sz="1100" dirty="0">
-                <a:solidFill>
-                  <a:srgbClr val="4A5A67"/>
-                </a:solidFill>
-                <a:latin typeface="Inter" pitchFamily="34" charset="0"/>
-                <a:ea typeface="Inter" pitchFamily="34" charset="-122"/>
-                <a:cs typeface="Inter" pitchFamily="34" charset="-120"/>
-              </a:rPr>
-              <a:t>Matching, anomaly detection, predictive accounting — measured before enabling.</a:t>
-            </a:r>
-            <a:endParaRPr lang="en-US" sz="1100" dirty="0"/>
-          </a:p>
-        </p:txBody>
-      </p:sp>
-      <p:sp>
-        <p:nvSpPr>
-          <p:cNvPr id="22" name="Shape 20"/>
+              <a:rPr lang="en-US" sz="1050" dirty="0">
+                <a:solidFill>
+                  <a:srgbClr val="11676A"/>
+                </a:solidFill>
+                <a:latin typeface="IBM Plex Mono" pitchFamily="34" charset="0"/>
+                <a:ea typeface="IBM Plex Mono" pitchFamily="34" charset="-122"/>
+                <a:cs typeface="IBM Plex Mono" pitchFamily="34" charset="-120"/>
+              </a:rPr>
+              <a:t>Matching · Anomaly detection · Prediction</a:t>
+            </a:r>
+            <a:endParaRPr lang="en-US" sz="1050" dirty="0"/>
+          </a:p>
+        </p:txBody>
+      </p:sp>
+      <p:sp>
+        <p:nvSpPr>
+          <p:cNvPr id="21" name="Shape 19"/>
           <p:cNvSpPr/>
           <p:nvPr/>
         </p:nvSpPr>
         <p:spPr>
           <a:xfrm>
-            <a:off x="8343900" y="4809744"/>
+            <a:off x="8343900" y="4471416"/>
             <a:ext cx="0" cy="274320"/>
           </a:xfrm>
           <a:prstGeom prst="line">
@@ -9232,13 +8902,13 @@
       </p:sp>
       <p:sp>
         <p:nvSpPr>
-          <p:cNvPr id="23" name="Shape 21"/>
+          <p:cNvPr id="22" name="Shape 20"/>
           <p:cNvSpPr/>
           <p:nvPr/>
         </p:nvSpPr>
         <p:spPr>
           <a:xfrm>
-            <a:off x="845820" y="5084064"/>
+            <a:off x="845820" y="4745736"/>
             <a:ext cx="7498080" cy="0"/>
           </a:xfrm>
           <a:prstGeom prst="line">
@@ -9255,13 +8925,13 @@
       </p:sp>
       <p:sp>
         <p:nvSpPr>
-          <p:cNvPr id="24" name="Shape 22"/>
+          <p:cNvPr id="23" name="Shape 21"/>
           <p:cNvSpPr/>
           <p:nvPr/>
         </p:nvSpPr>
         <p:spPr>
           <a:xfrm>
-            <a:off x="6095848" y="5084064"/>
+            <a:off x="6095848" y="4745736"/>
             <a:ext cx="0" cy="274320"/>
           </a:xfrm>
           <a:prstGeom prst="line">
@@ -9278,13 +8948,13 @@
       </p:sp>
       <p:sp>
         <p:nvSpPr>
-          <p:cNvPr id="25" name="Shape 23"/>
+          <p:cNvPr id="24" name="Shape 22"/>
           <p:cNvSpPr/>
           <p:nvPr/>
         </p:nvSpPr>
         <p:spPr>
           <a:xfrm>
-            <a:off x="3215488" y="5358384"/>
+            <a:off x="3215488" y="5020056"/>
             <a:ext cx="5760720" cy="566928"/>
           </a:xfrm>
           <a:prstGeom prst="rect">
@@ -9298,13 +8968,13 @@
       </p:sp>
       <p:sp>
         <p:nvSpPr>
-          <p:cNvPr id="26" name="Text 24"/>
-          <p:cNvSpPr txBox="1"/>
-          <p:nvPr/>
-        </p:nvSpPr>
-        <p:spPr>
-          <a:xfrm>
-            <a:off x="3215488" y="5358384"/>
+          <p:cNvPr id="25" name="Text 23"/>
+          <p:cNvSpPr txBox="1"/>
+          <p:nvPr/>
+        </p:nvSpPr>
+        <p:spPr>
+          <a:xfrm>
+            <a:off x="3215488" y="5020056"/>
             <a:ext cx="5760720" cy="566928"/>
           </a:xfrm>
           <a:prstGeom prst="rect">
@@ -9557,7 +9227,7 @@
         </p:nvSpPr>
         <p:spPr>
           <a:xfrm>
-            <a:off x="777240" y="2359152"/>
+            <a:off x="777240" y="2862072"/>
             <a:ext cx="5852160" cy="219456"/>
           </a:xfrm>
           <a:prstGeom prst="rect">
@@ -9596,7 +9266,7 @@
         </p:nvSpPr>
         <p:spPr>
           <a:xfrm>
-            <a:off x="777240" y="2743200"/>
+            <a:off x="777240" y="3246120"/>
             <a:ext cx="5852160" cy="0"/>
           </a:xfrm>
           <a:prstGeom prst="line">
@@ -9619,7 +9289,7 @@
         </p:nvSpPr>
         <p:spPr>
           <a:xfrm>
-            <a:off x="731520" y="2697480"/>
+            <a:off x="731520" y="3200400"/>
             <a:ext cx="91440" cy="91440"/>
           </a:xfrm>
           <a:prstGeom prst="ellipse">
@@ -9639,7 +9309,7 @@
         </p:nvSpPr>
         <p:spPr>
           <a:xfrm>
-            <a:off x="2194560" y="2697480"/>
+            <a:off x="2194560" y="3200400"/>
             <a:ext cx="91440" cy="91440"/>
           </a:xfrm>
           <a:prstGeom prst="ellipse">
@@ -9659,7 +9329,7 @@
         </p:nvSpPr>
         <p:spPr>
           <a:xfrm>
-            <a:off x="3657600" y="2697480"/>
+            <a:off x="3657600" y="3200400"/>
             <a:ext cx="91440" cy="91440"/>
           </a:xfrm>
           <a:prstGeom prst="ellipse">
@@ -9679,7 +9349,7 @@
         </p:nvSpPr>
         <p:spPr>
           <a:xfrm>
-            <a:off x="5120640" y="2697480"/>
+            <a:off x="5120640" y="3200400"/>
             <a:ext cx="91440" cy="91440"/>
           </a:xfrm>
           <a:prstGeom prst="ellipse">
@@ -9699,7 +9369,7 @@
         </p:nvSpPr>
         <p:spPr>
           <a:xfrm>
-            <a:off x="6583680" y="2697480"/>
+            <a:off x="6583680" y="3200400"/>
             <a:ext cx="91440" cy="91440"/>
           </a:xfrm>
           <a:prstGeom prst="ellipse">
@@ -9719,7 +9389,7 @@
         </p:nvSpPr>
         <p:spPr>
           <a:xfrm>
-            <a:off x="777240" y="2743200"/>
+            <a:off x="777240" y="3246120"/>
             <a:ext cx="936346" cy="384048"/>
           </a:xfrm>
           <a:prstGeom prst="line">
@@ -9742,7 +9412,7 @@
         </p:nvSpPr>
         <p:spPr>
           <a:xfrm flipV="1">
-            <a:off x="1713586" y="2962656"/>
+            <a:off x="1713586" y="3465576"/>
             <a:ext cx="819302" cy="164592"/>
           </a:xfrm>
           <a:prstGeom prst="line">
@@ -9765,7 +9435,7 @@
         </p:nvSpPr>
         <p:spPr>
           <a:xfrm>
-            <a:off x="2532888" y="2962656"/>
+            <a:off x="2532888" y="3465576"/>
             <a:ext cx="877824" cy="566928"/>
           </a:xfrm>
           <a:prstGeom prst="line">
@@ -9788,7 +9458,7 @@
         </p:nvSpPr>
         <p:spPr>
           <a:xfrm flipV="1">
-            <a:off x="3410712" y="3310128"/>
+            <a:off x="3410712" y="3813048"/>
             <a:ext cx="877824" cy="219456"/>
           </a:xfrm>
           <a:prstGeom prst="line">
@@ -9811,7 +9481,7 @@
         </p:nvSpPr>
         <p:spPr>
           <a:xfrm>
-            <a:off x="4288536" y="3310128"/>
+            <a:off x="4288536" y="3813048"/>
             <a:ext cx="936346" cy="512064"/>
           </a:xfrm>
           <a:prstGeom prst="line">
@@ -9834,7 +9504,7 @@
         </p:nvSpPr>
         <p:spPr>
           <a:xfrm flipV="1">
-            <a:off x="5224882" y="3621024"/>
+            <a:off x="5224882" y="4123944"/>
             <a:ext cx="702259" cy="201168"/>
           </a:xfrm>
           <a:prstGeom prst="line">
@@ -9857,7 +9527,7 @@
         </p:nvSpPr>
         <p:spPr>
           <a:xfrm>
-            <a:off x="5927141" y="3621024"/>
+            <a:off x="5927141" y="4123944"/>
             <a:ext cx="702259" cy="347472"/>
           </a:xfrm>
           <a:prstGeom prst="line">
@@ -9880,7 +9550,7 @@
         </p:nvSpPr>
         <p:spPr>
           <a:xfrm>
-            <a:off x="731520" y="2697480"/>
+            <a:off x="731520" y="3200400"/>
             <a:ext cx="91440" cy="91440"/>
           </a:xfrm>
           <a:prstGeom prst="ellipse">
@@ -9900,7 +9570,7 @@
         </p:nvSpPr>
         <p:spPr>
           <a:xfrm>
-            <a:off x="1667866" y="3081528"/>
+            <a:off x="1667866" y="3584448"/>
             <a:ext cx="91440" cy="91440"/>
           </a:xfrm>
           <a:prstGeom prst="ellipse">
@@ -9920,7 +9590,7 @@
         </p:nvSpPr>
         <p:spPr>
           <a:xfrm>
-            <a:off x="2487168" y="2916936"/>
+            <a:off x="2487168" y="3419856"/>
             <a:ext cx="91440" cy="91440"/>
           </a:xfrm>
           <a:prstGeom prst="ellipse">
@@ -9940,7 +9610,7 @@
         </p:nvSpPr>
         <p:spPr>
           <a:xfrm>
-            <a:off x="3364992" y="3483864"/>
+            <a:off x="3364992" y="3986784"/>
             <a:ext cx="91440" cy="91440"/>
           </a:xfrm>
           <a:prstGeom prst="ellipse">
@@ -9960,7 +9630,7 @@
         </p:nvSpPr>
         <p:spPr>
           <a:xfrm>
-            <a:off x="4242816" y="3264408"/>
+            <a:off x="4242816" y="3767328"/>
             <a:ext cx="91440" cy="91440"/>
           </a:xfrm>
           <a:prstGeom prst="ellipse">
@@ -9980,7 +9650,7 @@
         </p:nvSpPr>
         <p:spPr>
           <a:xfrm>
-            <a:off x="5179162" y="3776472"/>
+            <a:off x="5179162" y="4279392"/>
             <a:ext cx="91440" cy="91440"/>
           </a:xfrm>
           <a:prstGeom prst="ellipse">
@@ -10000,7 +9670,7 @@
         </p:nvSpPr>
         <p:spPr>
           <a:xfrm>
-            <a:off x="5881421" y="3575304"/>
+            <a:off x="5881421" y="4078224"/>
             <a:ext cx="91440" cy="91440"/>
           </a:xfrm>
           <a:prstGeom prst="ellipse">
@@ -10020,7 +9690,7 @@
         </p:nvSpPr>
         <p:spPr>
           <a:xfrm>
-            <a:off x="6583680" y="3922776"/>
+            <a:off x="6583680" y="4425696"/>
             <a:ext cx="91440" cy="91440"/>
           </a:xfrm>
           <a:prstGeom prst="ellipse">
@@ -10040,7 +9710,7 @@
         </p:nvSpPr>
         <p:spPr>
           <a:xfrm>
-            <a:off x="3886200" y="4114800"/>
+            <a:off x="3886200" y="4617720"/>
             <a:ext cx="2743200" cy="219456"/>
           </a:xfrm>
           <a:prstGeom prst="rect">
@@ -10079,7 +9749,7 @@
         </p:nvSpPr>
         <p:spPr>
           <a:xfrm>
-            <a:off x="3410712" y="2743200"/>
+            <a:off x="3410712" y="3246120"/>
             <a:ext cx="0" cy="786384"/>
           </a:xfrm>
           <a:prstGeom prst="line">
@@ -10102,7 +9772,7 @@
         </p:nvSpPr>
         <p:spPr>
           <a:xfrm>
-            <a:off x="3369564" y="3488436"/>
+            <a:off x="3369564" y="3991356"/>
             <a:ext cx="82296" cy="82296"/>
           </a:xfrm>
           <a:prstGeom prst="ellipse">
@@ -10122,7 +9792,7 @@
         </p:nvSpPr>
         <p:spPr>
           <a:xfrm>
-            <a:off x="3557016" y="2871216"/>
+            <a:off x="3557016" y="3374136"/>
             <a:ext cx="2103120" cy="420624"/>
           </a:xfrm>
           <a:prstGeom prst="rect">
@@ -10184,7 +9854,7 @@
         </p:nvSpPr>
         <p:spPr>
           <a:xfrm>
-            <a:off x="7360920" y="2395728"/>
+            <a:off x="7360920" y="2880360"/>
             <a:ext cx="4023360" cy="868680"/>
           </a:xfrm>
           <a:prstGeom prst="rect">
@@ -10220,55 +9890,13 @@
       </p:sp>
       <p:sp>
         <p:nvSpPr>
-          <p:cNvPr id="34" name="Text 32"/>
-          <p:cNvSpPr txBox="1"/>
-          <p:nvPr/>
-        </p:nvSpPr>
-        <p:spPr>
-          <a:xfrm>
-            <a:off x="7360920" y="3401568"/>
-            <a:ext cx="4023360" cy="1097280"/>
-          </a:xfrm>
-          <a:prstGeom prst="rect">
-            <a:avLst/>
-          </a:prstGeom>
-          <a:noFill/>
-          <a:ln/>
-        </p:spPr>
-        <p:txBody>
-          <a:bodyPr wrap="square" lIns="0" tIns="0" rIns="0" bIns="0" rtlCol="0" anchor="t"/>
-          <a:lstStyle/>
-          <a:p>
-            <a:pPr indent="0" marL="0">
-              <a:lnSpc>
-                <a:spcPts val="1850"/>
-              </a:lnSpc>
-              <a:buNone/>
-            </a:pPr>
-            <a:r>
-              <a:rPr lang="en-US" sz="1150" dirty="0">
-                <a:solidFill>
-                  <a:srgbClr val="4A5A67"/>
-                </a:solidFill>
-                <a:latin typeface="Inter" pitchFamily="34" charset="0"/>
-                <a:ea typeface="Inter" pitchFamily="34" charset="-122"/>
-                <a:cs typeface="Inter" pitchFamily="34" charset="-120"/>
-              </a:rPr>
-              <a:t>What the system does — not what the documentation says. The gap between them is usually the problem.</a:t>
-            </a:r>
-            <a:endParaRPr lang="en-US" sz="1150" dirty="0"/>
-          </a:p>
-        </p:txBody>
-      </p:sp>
-      <p:sp>
-        <p:nvSpPr>
-          <p:cNvPr id="35" name="Shape 33"/>
+          <p:cNvPr id="34" name="Shape 32"/>
           <p:cNvSpPr/>
           <p:nvPr/>
         </p:nvSpPr>
         <p:spPr>
           <a:xfrm>
-            <a:off x="7360920" y="4828032"/>
+            <a:off x="7360920" y="4251960"/>
             <a:ext cx="4023360" cy="0"/>
           </a:xfrm>
           <a:prstGeom prst="line">
@@ -10285,13 +9913,13 @@
       </p:sp>
       <p:sp>
         <p:nvSpPr>
-          <p:cNvPr id="36" name="Text 34"/>
-          <p:cNvSpPr txBox="1"/>
-          <p:nvPr/>
-        </p:nvSpPr>
-        <p:spPr>
-          <a:xfrm>
-            <a:off x="7360920" y="4974336"/>
+          <p:cNvPr id="35" name="Text 33"/>
+          <p:cNvSpPr txBox="1"/>
+          <p:nvPr/>
+        </p:nvSpPr>
+        <p:spPr>
+          <a:xfrm>
+            <a:off x="7360920" y="4398264"/>
             <a:ext cx="2926080" cy="457200"/>
           </a:xfrm>
           <a:prstGeom prst="rect">
@@ -10319,7 +9947,7 @@
                 <a:ea typeface="Inter" pitchFamily="34" charset="-122"/>
                 <a:cs typeface="Inter" pitchFamily="34" charset="-120"/>
               </a:rPr>
-              <a:t>Every engagement opens with an assessment</a:t>
+              <a:t>Assessment phase</a:t>
             </a:r>
             <a:endParaRPr lang="en-US" sz="1050" dirty="0"/>
           </a:p>
@@ -10327,13 +9955,13 @@
       </p:sp>
       <p:sp>
         <p:nvSpPr>
-          <p:cNvPr id="37" name="Text 35"/>
-          <p:cNvSpPr txBox="1"/>
-          <p:nvPr/>
-        </p:nvSpPr>
-        <p:spPr>
-          <a:xfrm>
-            <a:off x="10378440" y="4937760"/>
+          <p:cNvPr id="36" name="Text 34"/>
+          <p:cNvSpPr txBox="1"/>
+          <p:nvPr/>
+        </p:nvSpPr>
+        <p:spPr>
+          <a:xfrm>
+            <a:off x="10378440" y="4361688"/>
             <a:ext cx="1005840" cy="566928"/>
           </a:xfrm>
           <a:prstGeom prst="rect">
@@ -10766,7 +10394,27 @@
                 <a:ea typeface="Inter" pitchFamily="34" charset="-122"/>
                 <a:cs typeface="Inter" pitchFamily="34" charset="-120"/>
               </a:rPr>
-              <a:t>Speed and low operational overhead — for a core you cannot modify.</a:t>
+              <a:t>Speed and low operational overhead.</a:t>
+            </a:r>
+            <a:endParaRPr lang="en-US" sz="1150" dirty="0"/>
+          </a:p>
+          <a:p>
+            <a:pPr indent="0" marL="0">
+              <a:lnSpc>
+                <a:spcPts val="1850"/>
+              </a:lnSpc>
+              <a:buNone/>
+            </a:pPr>
+            <a:r>
+              <a:rPr lang="en-US" sz="1150" dirty="0">
+                <a:solidFill>
+                  <a:srgbClr val="D2DDE6"/>
+                </a:solidFill>
+                <a:latin typeface="Inter" pitchFamily="34" charset="0"/>
+                <a:ea typeface="Inter" pitchFamily="34" charset="-122"/>
+                <a:cs typeface="Inter" pitchFamily="34" charset="-120"/>
+              </a:rPr>
+              <a:t>The core cannot be modified.</a:t>
             </a:r>
             <a:endParaRPr lang="en-US" sz="1150" dirty="0"/>
           </a:p>
@@ -10819,45 +10467,6 @@
         </p:nvSpPr>
         <p:spPr>
           <a:xfrm>
-            <a:off x="777240" y="4901184"/>
-            <a:ext cx="4297680" cy="219456"/>
-          </a:xfrm>
-          <a:prstGeom prst="rect">
-            <a:avLst/>
-          </a:prstGeom>
-          <a:noFill/>
-          <a:ln/>
-        </p:spPr>
-        <p:txBody>
-          <a:bodyPr wrap="square" lIns="0" tIns="0" rIns="0" bIns="0" rtlCol="0" anchor="ctr"/>
-          <a:lstStyle/>
-          <a:p>
-            <a:pPr indent="0" marL="0">
-              <a:buNone/>
-            </a:pPr>
-            <a:r>
-              <a:rPr lang="en-US" sz="950" i="1" dirty="0">
-                <a:solidFill>
-                  <a:srgbClr val="9DB0C0"/>
-                </a:solidFill>
-                <a:latin typeface="Inter" pitchFamily="34" charset="0"/>
-                <a:ea typeface="Inter" pitchFamily="34" charset="-122"/>
-                <a:cs typeface="Inter" pitchFamily="34" charset="-120"/>
-              </a:rPr>
-              <a:t>single-country finance deployment</a:t>
-            </a:r>
-            <a:endParaRPr lang="en-US" sz="950" dirty="0"/>
-          </a:p>
-        </p:txBody>
-      </p:sp>
-      <p:sp>
-        <p:nvSpPr>
-          <p:cNvPr id="14" name="Text 11"/>
-          <p:cNvSpPr txBox="1"/>
-          <p:nvPr/>
-        </p:nvSpPr>
-        <p:spPr>
-          <a:xfrm>
             <a:off x="7116775" y="2615184"/>
             <a:ext cx="4297680" cy="237744"/>
           </a:xfrm>
@@ -10891,7 +10500,7 @@
       </p:sp>
       <p:sp>
         <p:nvSpPr>
-          <p:cNvPr id="15" name="Shape 12"/>
+          <p:cNvPr id="14" name="Shape 11"/>
           <p:cNvSpPr/>
           <p:nvPr/>
         </p:nvSpPr>
@@ -10916,7 +10525,7 @@
       </p:sp>
       <p:sp>
         <p:nvSpPr>
-          <p:cNvPr id="16" name="Text 13"/>
+          <p:cNvPr id="15" name="Text 12"/>
           <p:cNvSpPr txBox="1"/>
           <p:nvPr/>
         </p:nvSpPr>
@@ -10955,7 +10564,7 @@
       </p:sp>
       <p:sp>
         <p:nvSpPr>
-          <p:cNvPr id="17" name="Text 14"/>
+          <p:cNvPr id="16" name="Text 13"/>
           <p:cNvSpPr txBox="1"/>
           <p:nvPr/>
         </p:nvSpPr>
@@ -10989,15 +10598,35 @@
                 <a:ea typeface="Inter" pitchFamily="34" charset="-122"/>
                 <a:cs typeface="Inter" pitchFamily="34" charset="-120"/>
               </a:rPr>
-              <a:t>Your own developments kept — for more responsibility and a longer build.</a:t>
+              <a:t>Your own developments kept.</a:t>
             </a:r>
             <a:endParaRPr lang="en-US" sz="1150" dirty="0"/>
           </a:p>
-        </p:txBody>
-      </p:sp>
-      <p:sp>
-        <p:nvSpPr>
-          <p:cNvPr id="18" name="Text 15"/>
+          <a:p>
+            <a:pPr indent="0" marL="0">
+              <a:lnSpc>
+                <a:spcPts val="1850"/>
+              </a:lnSpc>
+              <a:buNone/>
+            </a:pPr>
+            <a:r>
+              <a:rPr lang="en-US" sz="1150" dirty="0">
+                <a:solidFill>
+                  <a:srgbClr val="D2DDE6"/>
+                </a:solidFill>
+                <a:latin typeface="Inter" pitchFamily="34" charset="0"/>
+                <a:ea typeface="Inter" pitchFamily="34" charset="-122"/>
+                <a:cs typeface="Inter" pitchFamily="34" charset="-120"/>
+              </a:rPr>
+              <a:t>More responsibility, longer build.</a:t>
+            </a:r>
+            <a:endParaRPr lang="en-US" sz="1150" dirty="0"/>
+          </a:p>
+        </p:txBody>
+      </p:sp>
+      <p:sp>
+        <p:nvSpPr>
+          <p:cNvPr id="17" name="Text 14"/>
           <p:cNvSpPr txBox="1"/>
           <p:nvPr/>
         </p:nvSpPr>
@@ -11036,46 +10665,7 @@
       </p:sp>
       <p:sp>
         <p:nvSpPr>
-          <p:cNvPr id="19" name="Text 16"/>
-          <p:cNvSpPr txBox="1"/>
-          <p:nvPr/>
-        </p:nvSpPr>
-        <p:spPr>
-          <a:xfrm>
-            <a:off x="7116775" y="4901184"/>
-            <a:ext cx="4297680" cy="219456"/>
-          </a:xfrm>
-          <a:prstGeom prst="rect">
-            <a:avLst/>
-          </a:prstGeom>
-          <a:noFill/>
-          <a:ln/>
-        </p:spPr>
-        <p:txBody>
-          <a:bodyPr wrap="square" lIns="0" tIns="0" rIns="0" bIns="0" rtlCol="0" anchor="ctr"/>
-          <a:lstStyle/>
-          <a:p>
-            <a:pPr indent="0" marL="0">
-              <a:buNone/>
-            </a:pPr>
-            <a:r>
-              <a:rPr lang="en-US" sz="950" i="1" dirty="0">
-                <a:solidFill>
-                  <a:srgbClr val="9DB0C0"/>
-                </a:solidFill>
-                <a:latin typeface="Inter" pitchFamily="34" charset="0"/>
-                <a:ea typeface="Inter" pitchFamily="34" charset="-122"/>
-                <a:cs typeface="Inter" pitchFamily="34" charset="-120"/>
-              </a:rPr>
-              <a:t>depending on scope and inherited landscape</a:t>
-            </a:r>
-            <a:endParaRPr lang="en-US" sz="950" dirty="0"/>
-          </a:p>
-        </p:txBody>
-      </p:sp>
-      <p:sp>
-        <p:nvSpPr>
-          <p:cNvPr id="20" name="Shape 17"/>
+          <p:cNvPr id="18" name="Shape 15"/>
           <p:cNvSpPr/>
           <p:nvPr/>
         </p:nvSpPr>
@@ -11100,7 +10690,7 @@
       </p:sp>
       <p:sp>
         <p:nvSpPr>
-          <p:cNvPr id="21" name="Text 18"/>
+          <p:cNvPr id="19" name="Text 16"/>
           <p:cNvSpPr txBox="1"/>
           <p:nvPr/>
         </p:nvSpPr>
@@ -11134,7 +10724,7 @@
                 <a:ea typeface="Inter" pitchFamily="34" charset="-122"/>
                 <a:cs typeface="Inter" pitchFamily="34" charset="-120"/>
               </a:rPr>
-              <a:t>Neither is the advanced version of the other. We put both constraints side by side; the decision stays yours.</a:t>
+              <a:t>Neither is the advanced version of the other. The decision stays yours.</a:t>
             </a:r>
             <a:endParaRPr lang="en-US" sz="1150" dirty="0"/>
           </a:p>
@@ -11376,55 +10966,13 @@
       </p:sp>
       <p:sp>
         <p:nvSpPr>
-          <p:cNvPr id="7" name="Text 5"/>
-          <p:cNvSpPr txBox="1"/>
-          <p:nvPr/>
-        </p:nvSpPr>
-        <p:spPr>
-          <a:xfrm>
-            <a:off x="7498080" y="1078992"/>
-            <a:ext cx="3886200" cy="1097280"/>
-          </a:xfrm>
-          <a:prstGeom prst="rect">
-            <a:avLst/>
-          </a:prstGeom>
-          <a:noFill/>
-          <a:ln/>
-        </p:spPr>
-        <p:txBody>
-          <a:bodyPr wrap="square" lIns="0" tIns="0" rIns="0" bIns="0" rtlCol="0" anchor="t"/>
-          <a:lstStyle/>
-          <a:p>
-            <a:pPr indent="0" marL="0">
-              <a:lnSpc>
-                <a:spcPts val="1800"/>
-              </a:lnSpc>
-              <a:buNone/>
-            </a:pPr>
-            <a:r>
-              <a:rPr lang="en-US" sz="1150" dirty="0">
-                <a:solidFill>
-                  <a:srgbClr val="4A5A67"/>
-                </a:solidFill>
-                <a:latin typeface="Inter" pitchFamily="34" charset="0"/>
-                <a:ea typeface="Inter" pitchFamily="34" charset="-122"/>
-                <a:cs typeface="Inter" pitchFamily="34" charset="-120"/>
-              </a:rPr>
-              <a:t>Every stage’s output is agreed before it starts. At each gate the decision is taken again.</a:t>
-            </a:r>
-            <a:endParaRPr lang="en-US" sz="1150" dirty="0"/>
-          </a:p>
-        </p:txBody>
-      </p:sp>
-      <p:sp>
-        <p:nvSpPr>
-          <p:cNvPr id="8" name="Shape 6"/>
+          <p:cNvPr id="7" name="Shape 5"/>
           <p:cNvSpPr/>
           <p:nvPr/>
         </p:nvSpPr>
         <p:spPr>
           <a:xfrm>
-            <a:off x="777240" y="2788920"/>
+            <a:off x="777240" y="2971800"/>
             <a:ext cx="10637215" cy="0"/>
           </a:xfrm>
           <a:prstGeom prst="line">
@@ -11441,13 +10989,13 @@
       </p:sp>
       <p:sp>
         <p:nvSpPr>
-          <p:cNvPr id="9" name="Shape 7"/>
+          <p:cNvPr id="8" name="Shape 6"/>
           <p:cNvSpPr/>
           <p:nvPr/>
         </p:nvSpPr>
         <p:spPr>
           <a:xfrm>
-            <a:off x="777240" y="2734056"/>
+            <a:off x="777240" y="2916936"/>
             <a:ext cx="109728" cy="109728"/>
           </a:xfrm>
           <a:prstGeom prst="ellipse">
@@ -11461,13 +11009,13 @@
       </p:sp>
       <p:sp>
         <p:nvSpPr>
-          <p:cNvPr id="10" name="Text 8"/>
-          <p:cNvSpPr txBox="1"/>
-          <p:nvPr/>
-        </p:nvSpPr>
-        <p:spPr>
-          <a:xfrm>
-            <a:off x="777240" y="3008376"/>
+          <p:cNvPr id="9" name="Text 7"/>
+          <p:cNvSpPr txBox="1"/>
+          <p:nvPr/>
+        </p:nvSpPr>
+        <p:spPr>
+          <a:xfrm>
+            <a:off x="777240" y="3191256"/>
             <a:ext cx="2395728" cy="274320"/>
           </a:xfrm>
           <a:prstGeom prst="rect">
@@ -11500,13 +11048,13 @@
       </p:sp>
       <p:sp>
         <p:nvSpPr>
-          <p:cNvPr id="11" name="Text 9"/>
-          <p:cNvSpPr txBox="1"/>
-          <p:nvPr/>
-        </p:nvSpPr>
-        <p:spPr>
-          <a:xfrm>
-            <a:off x="777240" y="3337560"/>
+          <p:cNvPr id="10" name="Text 8"/>
+          <p:cNvSpPr txBox="1"/>
+          <p:nvPr/>
+        </p:nvSpPr>
+        <p:spPr>
+          <a:xfrm>
+            <a:off x="777240" y="3520440"/>
             <a:ext cx="2395728" cy="566928"/>
           </a:xfrm>
           <a:prstGeom prst="rect">
@@ -11542,13 +11090,13 @@
       </p:sp>
       <p:sp>
         <p:nvSpPr>
-          <p:cNvPr id="12" name="Text 10"/>
-          <p:cNvSpPr txBox="1"/>
-          <p:nvPr/>
-        </p:nvSpPr>
-        <p:spPr>
-          <a:xfrm>
-            <a:off x="777240" y="4032504"/>
+          <p:cNvPr id="11" name="Text 9"/>
+          <p:cNvSpPr txBox="1"/>
+          <p:nvPr/>
+        </p:nvSpPr>
+        <p:spPr>
+          <a:xfrm>
+            <a:off x="777240" y="4215384"/>
             <a:ext cx="2286000" cy="868680"/>
           </a:xfrm>
           <a:prstGeom prst="rect">
@@ -11576,7 +11124,7 @@
                 <a:ea typeface="Inter" pitchFamily="34" charset="-122"/>
                 <a:cs typeface="Inter" pitchFamily="34" charset="-120"/>
               </a:rPr>
-              <a:t>Diagnostic report, read from system data</a:t>
+              <a:t>Diagnostic report</a:t>
             </a:r>
             <a:endParaRPr lang="en-US" sz="1050" dirty="0"/>
           </a:p>
@@ -11584,13 +11132,13 @@
       </p:sp>
       <p:sp>
         <p:nvSpPr>
-          <p:cNvPr id="13" name="Shape 11"/>
+          <p:cNvPr id="12" name="Shape 10"/>
           <p:cNvSpPr/>
           <p:nvPr/>
         </p:nvSpPr>
         <p:spPr>
           <a:xfrm>
-            <a:off x="777240" y="5020056"/>
+            <a:off x="777240" y="4727448"/>
             <a:ext cx="2121408" cy="0"/>
           </a:xfrm>
           <a:prstGeom prst="line">
@@ -11607,13 +11155,13 @@
       </p:sp>
       <p:sp>
         <p:nvSpPr>
-          <p:cNvPr id="14" name="Text 12"/>
-          <p:cNvSpPr txBox="1"/>
-          <p:nvPr/>
-        </p:nvSpPr>
-        <p:spPr>
-          <a:xfrm>
-            <a:off x="777240" y="5129784"/>
+          <p:cNvPr id="13" name="Text 11"/>
+          <p:cNvSpPr txBox="1"/>
+          <p:nvPr/>
+        </p:nvSpPr>
+        <p:spPr>
+          <a:xfrm>
+            <a:off x="777240" y="4837176"/>
             <a:ext cx="2395728" cy="237744"/>
           </a:xfrm>
           <a:prstGeom prst="rect">
@@ -11646,13 +11194,13 @@
       </p:sp>
       <p:sp>
         <p:nvSpPr>
-          <p:cNvPr id="15" name="Shape 13"/>
+          <p:cNvPr id="14" name="Shape 12"/>
           <p:cNvSpPr/>
           <p:nvPr/>
         </p:nvSpPr>
         <p:spPr>
           <a:xfrm>
-            <a:off x="3346704" y="2642616"/>
+            <a:off x="3346704" y="2825496"/>
             <a:ext cx="0" cy="292608"/>
           </a:xfrm>
           <a:prstGeom prst="line">
@@ -11669,13 +11217,13 @@
       </p:sp>
       <p:sp>
         <p:nvSpPr>
-          <p:cNvPr id="16" name="Text 14"/>
-          <p:cNvSpPr txBox="1"/>
-          <p:nvPr/>
-        </p:nvSpPr>
-        <p:spPr>
-          <a:xfrm>
-            <a:off x="2798064" y="2331720"/>
+          <p:cNvPr id="15" name="Text 13"/>
+          <p:cNvSpPr txBox="1"/>
+          <p:nvPr/>
+        </p:nvSpPr>
+        <p:spPr>
+          <a:xfrm>
+            <a:off x="2798064" y="2514600"/>
             <a:ext cx="1097280" cy="201168"/>
           </a:xfrm>
           <a:prstGeom prst="rect">
@@ -11708,13 +11256,13 @@
       </p:sp>
       <p:sp>
         <p:nvSpPr>
-          <p:cNvPr id="17" name="Shape 15"/>
+          <p:cNvPr id="16" name="Shape 14"/>
           <p:cNvSpPr/>
           <p:nvPr/>
         </p:nvSpPr>
         <p:spPr>
           <a:xfrm>
-            <a:off x="3520440" y="2734056"/>
+            <a:off x="3520440" y="2916936"/>
             <a:ext cx="109728" cy="109728"/>
           </a:xfrm>
           <a:prstGeom prst="ellipse">
@@ -11728,13 +11276,13 @@
       </p:sp>
       <p:sp>
         <p:nvSpPr>
-          <p:cNvPr id="18" name="Text 16"/>
-          <p:cNvSpPr txBox="1"/>
-          <p:nvPr/>
-        </p:nvSpPr>
-        <p:spPr>
-          <a:xfrm>
-            <a:off x="3520440" y="3008376"/>
+          <p:cNvPr id="17" name="Text 15"/>
+          <p:cNvSpPr txBox="1"/>
+          <p:nvPr/>
+        </p:nvSpPr>
+        <p:spPr>
+          <a:xfrm>
+            <a:off x="3520440" y="3191256"/>
             <a:ext cx="2395728" cy="274320"/>
           </a:xfrm>
           <a:prstGeom prst="rect">
@@ -11767,13 +11315,13 @@
       </p:sp>
       <p:sp>
         <p:nvSpPr>
-          <p:cNvPr id="19" name="Text 17"/>
-          <p:cNvSpPr txBox="1"/>
-          <p:nvPr/>
-        </p:nvSpPr>
-        <p:spPr>
-          <a:xfrm>
-            <a:off x="3520440" y="3337560"/>
+          <p:cNvPr id="18" name="Text 16"/>
+          <p:cNvSpPr txBox="1"/>
+          <p:nvPr/>
+        </p:nvSpPr>
+        <p:spPr>
+          <a:xfrm>
+            <a:off x="3520440" y="3520440"/>
             <a:ext cx="2395728" cy="566928"/>
           </a:xfrm>
           <a:prstGeom prst="rect">
@@ -11829,13 +11377,13 @@
       </p:sp>
       <p:sp>
         <p:nvSpPr>
-          <p:cNvPr id="20" name="Text 18"/>
-          <p:cNvSpPr txBox="1"/>
-          <p:nvPr/>
-        </p:nvSpPr>
-        <p:spPr>
-          <a:xfrm>
-            <a:off x="3520440" y="4032504"/>
+          <p:cNvPr id="19" name="Text 17"/>
+          <p:cNvSpPr txBox="1"/>
+          <p:nvPr/>
+        </p:nvSpPr>
+        <p:spPr>
+          <a:xfrm>
+            <a:off x="3520440" y="4215384"/>
             <a:ext cx="2286000" cy="868680"/>
           </a:xfrm>
           <a:prstGeom prst="rect">
@@ -11863,7 +11411,7 @@
                 <a:ea typeface="Inter" pitchFamily="34" charset="-122"/>
                 <a:cs typeface="Inter" pitchFamily="34" charset="-120"/>
               </a:rPr>
-              <a:t>Target architecture and phased roadmap</a:t>
+              <a:t>Target architecture and roadmap</a:t>
             </a:r>
             <a:endParaRPr lang="en-US" sz="1050" dirty="0"/>
           </a:p>
@@ -11871,13 +11419,13 @@
       </p:sp>
       <p:sp>
         <p:nvSpPr>
-          <p:cNvPr id="21" name="Shape 19"/>
+          <p:cNvPr id="20" name="Shape 18"/>
           <p:cNvSpPr/>
           <p:nvPr/>
         </p:nvSpPr>
         <p:spPr>
           <a:xfrm>
-            <a:off x="3520440" y="5020056"/>
+            <a:off x="3520440" y="4727448"/>
             <a:ext cx="2121408" cy="0"/>
           </a:xfrm>
           <a:prstGeom prst="line">
@@ -11894,13 +11442,13 @@
       </p:sp>
       <p:sp>
         <p:nvSpPr>
-          <p:cNvPr id="22" name="Text 20"/>
-          <p:cNvSpPr txBox="1"/>
-          <p:nvPr/>
-        </p:nvSpPr>
-        <p:spPr>
-          <a:xfrm>
-            <a:off x="3520440" y="5129784"/>
+          <p:cNvPr id="21" name="Text 19"/>
+          <p:cNvSpPr txBox="1"/>
+          <p:nvPr/>
+        </p:nvSpPr>
+        <p:spPr>
+          <a:xfrm>
+            <a:off x="3520440" y="4837176"/>
             <a:ext cx="2395728" cy="237744"/>
           </a:xfrm>
           <a:prstGeom prst="rect">
@@ -11933,13 +11481,13 @@
       </p:sp>
       <p:sp>
         <p:nvSpPr>
-          <p:cNvPr id="23" name="Shape 21"/>
+          <p:cNvPr id="22" name="Shape 20"/>
           <p:cNvSpPr/>
           <p:nvPr/>
         </p:nvSpPr>
         <p:spPr>
           <a:xfrm>
-            <a:off x="6089904" y="2642616"/>
+            <a:off x="6089904" y="2825496"/>
             <a:ext cx="0" cy="292608"/>
           </a:xfrm>
           <a:prstGeom prst="line">
@@ -11956,13 +11504,13 @@
       </p:sp>
       <p:sp>
         <p:nvSpPr>
-          <p:cNvPr id="24" name="Text 22"/>
-          <p:cNvSpPr txBox="1"/>
-          <p:nvPr/>
-        </p:nvSpPr>
-        <p:spPr>
-          <a:xfrm>
-            <a:off x="5541264" y="2331720"/>
+          <p:cNvPr id="23" name="Text 21"/>
+          <p:cNvSpPr txBox="1"/>
+          <p:nvPr/>
+        </p:nvSpPr>
+        <p:spPr>
+          <a:xfrm>
+            <a:off x="5541264" y="2514600"/>
             <a:ext cx="1097280" cy="201168"/>
           </a:xfrm>
           <a:prstGeom prst="rect">
@@ -11995,13 +11543,13 @@
       </p:sp>
       <p:sp>
         <p:nvSpPr>
-          <p:cNvPr id="25" name="Shape 23"/>
+          <p:cNvPr id="24" name="Shape 22"/>
           <p:cNvSpPr/>
           <p:nvPr/>
         </p:nvSpPr>
         <p:spPr>
           <a:xfrm>
-            <a:off x="6263640" y="2734056"/>
+            <a:off x="6263640" y="2916936"/>
             <a:ext cx="109728" cy="109728"/>
           </a:xfrm>
           <a:prstGeom prst="ellipse">
@@ -12015,13 +11563,13 @@
       </p:sp>
       <p:sp>
         <p:nvSpPr>
-          <p:cNvPr id="26" name="Text 24"/>
-          <p:cNvSpPr txBox="1"/>
-          <p:nvPr/>
-        </p:nvSpPr>
-        <p:spPr>
-          <a:xfrm>
-            <a:off x="6263640" y="3008376"/>
+          <p:cNvPr id="25" name="Text 23"/>
+          <p:cNvSpPr txBox="1"/>
+          <p:nvPr/>
+        </p:nvSpPr>
+        <p:spPr>
+          <a:xfrm>
+            <a:off x="6263640" y="3191256"/>
             <a:ext cx="2395728" cy="274320"/>
           </a:xfrm>
           <a:prstGeom prst="rect">
@@ -12054,13 +11602,13 @@
       </p:sp>
       <p:sp>
         <p:nvSpPr>
-          <p:cNvPr id="27" name="Text 25"/>
-          <p:cNvSpPr txBox="1"/>
-          <p:nvPr/>
-        </p:nvSpPr>
-        <p:spPr>
-          <a:xfrm>
-            <a:off x="6263640" y="3337560"/>
+          <p:cNvPr id="26" name="Text 24"/>
+          <p:cNvSpPr txBox="1"/>
+          <p:nvPr/>
+        </p:nvSpPr>
+        <p:spPr>
+          <a:xfrm>
+            <a:off x="6263640" y="3520440"/>
             <a:ext cx="2395728" cy="566928"/>
           </a:xfrm>
           <a:prstGeom prst="rect">
@@ -12096,13 +11644,13 @@
       </p:sp>
       <p:sp>
         <p:nvSpPr>
-          <p:cNvPr id="28" name="Text 26"/>
-          <p:cNvSpPr txBox="1"/>
-          <p:nvPr/>
-        </p:nvSpPr>
-        <p:spPr>
-          <a:xfrm>
-            <a:off x="6263640" y="4032504"/>
+          <p:cNvPr id="27" name="Text 25"/>
+          <p:cNvSpPr txBox="1"/>
+          <p:nvPr/>
+        </p:nvSpPr>
+        <p:spPr>
+          <a:xfrm>
+            <a:off x="6263640" y="4215384"/>
             <a:ext cx="2286000" cy="868680"/>
           </a:xfrm>
           <a:prstGeom prst="rect">
@@ -12130,7 +11678,7 @@
                 <a:ea typeface="Inter" pitchFamily="34" charset="-122"/>
                 <a:cs typeface="Inter" pitchFamily="34" charset="-120"/>
               </a:rPr>
-              <a:t>Working system, test records, cutover plan</a:t>
+              <a:t>Working system and cutover</a:t>
             </a:r>
             <a:endParaRPr lang="en-US" sz="1050" dirty="0"/>
           </a:p>
@@ -12138,13 +11686,13 @@
       </p:sp>
       <p:sp>
         <p:nvSpPr>
-          <p:cNvPr id="29" name="Shape 27"/>
+          <p:cNvPr id="28" name="Shape 26"/>
           <p:cNvSpPr/>
           <p:nvPr/>
         </p:nvSpPr>
         <p:spPr>
           <a:xfrm>
-            <a:off x="6263640" y="5020056"/>
+            <a:off x="6263640" y="4727448"/>
             <a:ext cx="2121408" cy="0"/>
           </a:xfrm>
           <a:prstGeom prst="line">
@@ -12161,13 +11709,13 @@
       </p:sp>
       <p:sp>
         <p:nvSpPr>
-          <p:cNvPr id="30" name="Text 28"/>
-          <p:cNvSpPr txBox="1"/>
-          <p:nvPr/>
-        </p:nvSpPr>
-        <p:spPr>
-          <a:xfrm>
-            <a:off x="6263640" y="5129784"/>
+          <p:cNvPr id="29" name="Text 27"/>
+          <p:cNvSpPr txBox="1"/>
+          <p:nvPr/>
+        </p:nvSpPr>
+        <p:spPr>
+          <a:xfrm>
+            <a:off x="6263640" y="4837176"/>
             <a:ext cx="2395728" cy="237744"/>
           </a:xfrm>
           <a:prstGeom prst="rect">
@@ -12200,13 +11748,13 @@
       </p:sp>
       <p:sp>
         <p:nvSpPr>
-          <p:cNvPr id="31" name="Shape 29"/>
+          <p:cNvPr id="30" name="Shape 28"/>
           <p:cNvSpPr/>
           <p:nvPr/>
         </p:nvSpPr>
         <p:spPr>
           <a:xfrm>
-            <a:off x="8833104" y="2642616"/>
+            <a:off x="8833104" y="2825496"/>
             <a:ext cx="0" cy="292608"/>
           </a:xfrm>
           <a:prstGeom prst="line">
@@ -12223,13 +11771,13 @@
       </p:sp>
       <p:sp>
         <p:nvSpPr>
-          <p:cNvPr id="32" name="Text 30"/>
-          <p:cNvSpPr txBox="1"/>
-          <p:nvPr/>
-        </p:nvSpPr>
-        <p:spPr>
-          <a:xfrm>
-            <a:off x="8284464" y="2331720"/>
+          <p:cNvPr id="31" name="Text 29"/>
+          <p:cNvSpPr txBox="1"/>
+          <p:nvPr/>
+        </p:nvSpPr>
+        <p:spPr>
+          <a:xfrm>
+            <a:off x="8284464" y="2514600"/>
             <a:ext cx="1097280" cy="201168"/>
           </a:xfrm>
           <a:prstGeom prst="rect">
@@ -12262,13 +11810,13 @@
       </p:sp>
       <p:sp>
         <p:nvSpPr>
-          <p:cNvPr id="33" name="Shape 31"/>
+          <p:cNvPr id="32" name="Shape 30"/>
           <p:cNvSpPr/>
           <p:nvPr/>
         </p:nvSpPr>
         <p:spPr>
           <a:xfrm>
-            <a:off x="9006840" y="2734056"/>
+            <a:off x="9006840" y="2916936"/>
             <a:ext cx="109728" cy="109728"/>
           </a:xfrm>
           <a:prstGeom prst="ellipse">
@@ -12282,13 +11830,13 @@
       </p:sp>
       <p:sp>
         <p:nvSpPr>
-          <p:cNvPr id="34" name="Text 32"/>
-          <p:cNvSpPr txBox="1"/>
-          <p:nvPr/>
-        </p:nvSpPr>
-        <p:spPr>
-          <a:xfrm>
-            <a:off x="9006840" y="3008376"/>
+          <p:cNvPr id="33" name="Text 31"/>
+          <p:cNvSpPr txBox="1"/>
+          <p:nvPr/>
+        </p:nvSpPr>
+        <p:spPr>
+          <a:xfrm>
+            <a:off x="9006840" y="3191256"/>
             <a:ext cx="2395728" cy="274320"/>
           </a:xfrm>
           <a:prstGeom prst="rect">
@@ -12321,13 +11869,13 @@
       </p:sp>
       <p:sp>
         <p:nvSpPr>
-          <p:cNvPr id="35" name="Text 33"/>
-          <p:cNvSpPr txBox="1"/>
-          <p:nvPr/>
-        </p:nvSpPr>
-        <p:spPr>
-          <a:xfrm>
-            <a:off x="9006840" y="3337560"/>
+          <p:cNvPr id="34" name="Text 32"/>
+          <p:cNvSpPr txBox="1"/>
+          <p:nvPr/>
+        </p:nvSpPr>
+        <p:spPr>
+          <a:xfrm>
+            <a:off x="9006840" y="3520440"/>
             <a:ext cx="2395728" cy="566928"/>
           </a:xfrm>
           <a:prstGeom prst="rect">
@@ -12363,13 +11911,13 @@
       </p:sp>
       <p:sp>
         <p:nvSpPr>
-          <p:cNvPr id="36" name="Text 34"/>
-          <p:cNvSpPr txBox="1"/>
-          <p:nvPr/>
-        </p:nvSpPr>
-        <p:spPr>
-          <a:xfrm>
-            <a:off x="9006840" y="4032504"/>
+          <p:cNvPr id="35" name="Text 33"/>
+          <p:cNvSpPr txBox="1"/>
+          <p:nvPr/>
+        </p:nvSpPr>
+        <p:spPr>
+          <a:xfrm>
+            <a:off x="9006840" y="4215384"/>
             <a:ext cx="2286000" cy="868680"/>
           </a:xfrm>
           <a:prstGeom prst="rect">
@@ -12397,7 +11945,7 @@
                 <a:ea typeface="Inter" pitchFamily="34" charset="-122"/>
                 <a:cs typeface="Inter" pitchFamily="34" charset="-120"/>
               </a:rPr>
-              <a:t>First close run together, improvement backlog</a:t>
+              <a:t>First close and improvement list</a:t>
             </a:r>
             <a:endParaRPr lang="en-US" sz="1050" dirty="0"/>
           </a:p>
@@ -12405,13 +11953,13 @@
       </p:sp>
       <p:sp>
         <p:nvSpPr>
-          <p:cNvPr id="37" name="Shape 35"/>
+          <p:cNvPr id="36" name="Shape 34"/>
           <p:cNvSpPr/>
           <p:nvPr/>
         </p:nvSpPr>
         <p:spPr>
           <a:xfrm>
-            <a:off x="9006840" y="5020056"/>
+            <a:off x="9006840" y="4727448"/>
             <a:ext cx="2121408" cy="0"/>
           </a:xfrm>
           <a:prstGeom prst="line">
@@ -12428,13 +11976,13 @@
       </p:sp>
       <p:sp>
         <p:nvSpPr>
-          <p:cNvPr id="38" name="Text 36"/>
-          <p:cNvSpPr txBox="1"/>
-          <p:nvPr/>
-        </p:nvSpPr>
-        <p:spPr>
-          <a:xfrm>
-            <a:off x="9006840" y="5129784"/>
+          <p:cNvPr id="37" name="Text 35"/>
+          <p:cNvSpPr txBox="1"/>
+          <p:nvPr/>
+        </p:nvSpPr>
+        <p:spPr>
+          <a:xfrm>
+            <a:off x="9006840" y="4837176"/>
             <a:ext cx="2395728" cy="237744"/>
           </a:xfrm>
           <a:prstGeom prst="rect">
@@ -12687,7 +12235,7 @@
         </p:nvSpPr>
         <p:spPr>
           <a:xfrm>
-            <a:off x="777240" y="2633472"/>
+            <a:off x="777240" y="2788920"/>
             <a:ext cx="3246120" cy="219456"/>
           </a:xfrm>
           <a:prstGeom prst="rect">
@@ -12726,7 +12274,7 @@
         </p:nvSpPr>
         <p:spPr>
           <a:xfrm>
-            <a:off x="4480560" y="2633472"/>
+            <a:off x="4480560" y="2788920"/>
             <a:ext cx="3246120" cy="219456"/>
           </a:xfrm>
           <a:prstGeom prst="rect">
@@ -12765,7 +12313,7 @@
         </p:nvSpPr>
         <p:spPr>
           <a:xfrm>
-            <a:off x="8183880" y="2633472"/>
+            <a:off x="8183880" y="2788920"/>
             <a:ext cx="3200400" cy="219456"/>
           </a:xfrm>
           <a:prstGeom prst="rect">
@@ -12804,7 +12352,7 @@
         </p:nvSpPr>
         <p:spPr>
           <a:xfrm>
-            <a:off x="777240" y="2944368"/>
+            <a:off x="777240" y="3099816"/>
             <a:ext cx="10637215" cy="0"/>
           </a:xfrm>
           <a:prstGeom prst="line">
@@ -12827,8 +12375,8 @@
         </p:nvSpPr>
         <p:spPr>
           <a:xfrm>
-            <a:off x="777240" y="3200400"/>
-            <a:ext cx="3108960" cy="786384"/>
+            <a:off x="777240" y="3337560"/>
+            <a:ext cx="3108960" cy="512064"/>
           </a:xfrm>
           <a:prstGeom prst="rect">
             <a:avLst/>
@@ -12855,7 +12403,7 @@
                 <a:ea typeface="Inter" pitchFamily="34" charset="-122"/>
                 <a:cs typeface="Inter" pitchFamily="34" charset="-120"/>
               </a:rPr>
-              <a:t>Depth in FI and CO</a:t>
+              <a:t>FI and CO depth</a:t>
             </a:r>
             <a:endParaRPr lang="en-US" sz="1150" dirty="0"/>
           </a:p>
@@ -12869,8 +12417,8 @@
         </p:nvSpPr>
         <p:spPr>
           <a:xfrm>
-            <a:off x="4480560" y="3200400"/>
-            <a:ext cx="3108960" cy="786384"/>
+            <a:off x="4480560" y="3337560"/>
+            <a:ext cx="3108960" cy="512064"/>
           </a:xfrm>
           <a:prstGeom prst="rect">
             <a:avLst/>
@@ -12897,7 +12445,7 @@
                 <a:ea typeface="Inter" pitchFamily="34" charset="-122"/>
                 <a:cs typeface="Inter" pitchFamily="34" charset="-120"/>
               </a:rPr>
-              <a:t>Rebuild the close to run in parallel</a:t>
+              <a:t>Rebuild the close in parallel</a:t>
             </a:r>
             <a:endParaRPr lang="en-US" sz="1150" dirty="0"/>
           </a:p>
@@ -12911,8 +12459,8 @@
         </p:nvSpPr>
         <p:spPr>
           <a:xfrm>
-            <a:off x="8183880" y="3200400"/>
-            <a:ext cx="3063240" cy="786384"/>
+            <a:off x="8183880" y="3337560"/>
+            <a:ext cx="3063240" cy="512064"/>
           </a:xfrm>
           <a:prstGeom prst="rect">
             <a:avLst/>
@@ -12939,7 +12487,7 @@
                 <a:ea typeface="Schibsted Grotesk" pitchFamily="34" charset="-122"/>
                 <a:cs typeface="Schibsted Grotesk" pitchFamily="34" charset="-120"/>
               </a:rPr>
-              <a:t>A close that is predictable, not just shorter</a:t>
+              <a:t>A predictable close</a:t>
             </a:r>
             <a:endParaRPr lang="en-US" sz="1300" dirty="0"/>
           </a:p>
@@ -12953,7 +12501,7 @@
         </p:nvSpPr>
         <p:spPr>
           <a:xfrm>
-            <a:off x="4201668" y="3305556"/>
+            <a:off x="4201668" y="3442716"/>
             <a:ext cx="82296" cy="82296"/>
           </a:xfrm>
           <a:prstGeom prst="ellipse">
@@ -12973,7 +12521,7 @@
         </p:nvSpPr>
         <p:spPr>
           <a:xfrm>
-            <a:off x="7904988" y="3305556"/>
+            <a:off x="7904988" y="3442716"/>
             <a:ext cx="82296" cy="82296"/>
           </a:xfrm>
           <a:prstGeom prst="ellipse">
@@ -12993,7 +12541,7 @@
         </p:nvSpPr>
         <p:spPr>
           <a:xfrm>
-            <a:off x="777240" y="4133088"/>
+            <a:off x="777240" y="3995928"/>
             <a:ext cx="10637215" cy="0"/>
           </a:xfrm>
           <a:prstGeom prst="line">
@@ -13016,8 +12564,8 @@
         </p:nvSpPr>
         <p:spPr>
           <a:xfrm>
-            <a:off x="777240" y="4261104"/>
-            <a:ext cx="3108960" cy="786384"/>
+            <a:off x="777240" y="4123944"/>
+            <a:ext cx="3108960" cy="512064"/>
           </a:xfrm>
           <a:prstGeom prst="rect">
             <a:avLst/>
@@ -13044,7 +12592,7 @@
                 <a:ea typeface="Inter" pitchFamily="34" charset="-122"/>
                 <a:cs typeface="Inter" pitchFamily="34" charset="-120"/>
               </a:rPr>
-              <a:t>A neutral read on the cloud models</a:t>
+              <a:t>Neutral cloud read</a:t>
             </a:r>
             <a:endParaRPr lang="en-US" sz="1150" dirty="0"/>
           </a:p>
@@ -13058,8 +12606,8 @@
         </p:nvSpPr>
         <p:spPr>
           <a:xfrm>
-            <a:off x="4480560" y="4261104"/>
-            <a:ext cx="3108960" cy="786384"/>
+            <a:off x="4480560" y="4123944"/>
+            <a:ext cx="3108960" cy="512064"/>
           </a:xfrm>
           <a:prstGeom prst="rect">
             <a:avLst/>
@@ -13086,7 +12634,7 @@
                 <a:ea typeface="Inter" pitchFamily="34" charset="-122"/>
                 <a:cs typeface="Inter" pitchFamily="34" charset="-120"/>
               </a:rPr>
-              <a:t>Measure your processes against standard scope</a:t>
+              <a:t>Measure against standard scope</a:t>
             </a:r>
             <a:endParaRPr lang="en-US" sz="1150" dirty="0"/>
           </a:p>
@@ -13100,8 +12648,8 @@
         </p:nvSpPr>
         <p:spPr>
           <a:xfrm>
-            <a:off x="8183880" y="4261104"/>
-            <a:ext cx="3063240" cy="786384"/>
+            <a:off x="8183880" y="4123944"/>
+            <a:ext cx="3063240" cy="512064"/>
           </a:xfrm>
           <a:prstGeom prst="rect">
             <a:avLst/>
@@ -13128,7 +12676,7 @@
                 <a:ea typeface="Schibsted Grotesk" pitchFamily="34" charset="-122"/>
                 <a:cs typeface="Schibsted Grotesk" pitchFamily="34" charset="-120"/>
               </a:rPr>
-              <a:t>A model decision that survives the project</a:t>
+              <a:t>A model decision that holds</a:t>
             </a:r>
             <a:endParaRPr lang="en-US" sz="1300" dirty="0"/>
           </a:p>
@@ -13142,7 +12690,7 @@
         </p:nvSpPr>
         <p:spPr>
           <a:xfrm>
-            <a:off x="4201668" y="4366260"/>
+            <a:off x="4201668" y="4229100"/>
             <a:ext cx="82296" cy="82296"/>
           </a:xfrm>
           <a:prstGeom prst="ellipse">
@@ -13162,7 +12710,7 @@
         </p:nvSpPr>
         <p:spPr>
           <a:xfrm>
-            <a:off x="7904988" y="4366260"/>
+            <a:off x="7904988" y="4229100"/>
             <a:ext cx="82296" cy="82296"/>
           </a:xfrm>
           <a:prstGeom prst="ellipse">
@@ -13182,7 +12730,7 @@
         </p:nvSpPr>
         <p:spPr>
           <a:xfrm>
-            <a:off x="777240" y="5193792"/>
+            <a:off x="777240" y="4782312"/>
             <a:ext cx="10637215" cy="0"/>
           </a:xfrm>
           <a:prstGeom prst="line">
@@ -13205,8 +12753,8 @@
         </p:nvSpPr>
         <p:spPr>
           <a:xfrm>
-            <a:off x="777240" y="5321808"/>
-            <a:ext cx="3108960" cy="786384"/>
+            <a:off x="777240" y="4910328"/>
+            <a:ext cx="3108960" cy="512064"/>
           </a:xfrm>
           <a:prstGeom prst="rect">
             <a:avLst/>
@@ -13233,7 +12781,7 @@
                 <a:ea typeface="Inter" pitchFamily="34" charset="-122"/>
                 <a:cs typeface="Inter" pitchFamily="34" charset="-120"/>
               </a:rPr>
-              <a:t>AI where the hours actually are</a:t>
+              <a:t>Applied AI</a:t>
             </a:r>
             <a:endParaRPr lang="en-US" sz="1150" dirty="0"/>
           </a:p>
@@ -13247,8 +12795,8 @@
         </p:nvSpPr>
         <p:spPr>
           <a:xfrm>
-            <a:off x="4480560" y="5321808"/>
-            <a:ext cx="3108960" cy="786384"/>
+            <a:off x="4480560" y="4910328"/>
+            <a:ext cx="3108960" cy="512064"/>
           </a:xfrm>
           <a:prstGeom prst="rect">
             <a:avLst/>
@@ -13275,7 +12823,7 @@
                 <a:ea typeface="Inter" pitchFamily="34" charset="-122"/>
                 <a:cs typeface="Inter" pitchFamily="34" charset="-120"/>
               </a:rPr>
-              <a:t>Calibrate thresholds on your own data</a:t>
+              <a:t>Thresholds on your own data</a:t>
             </a:r>
             <a:endParaRPr lang="en-US" sz="1150" dirty="0"/>
           </a:p>
@@ -13289,8 +12837,8 @@
         </p:nvSpPr>
         <p:spPr>
           <a:xfrm>
-            <a:off x="8183880" y="5321808"/>
-            <a:ext cx="3063240" cy="786384"/>
+            <a:off x="8183880" y="4910328"/>
+            <a:ext cx="3063240" cy="512064"/>
           </a:xfrm>
           <a:prstGeom prst="rect">
             <a:avLst/>
@@ -13317,7 +12865,7 @@
                 <a:ea typeface="Schibsted Grotesk" pitchFamily="34" charset="-122"/>
                 <a:cs typeface="Schibsted Grotesk" pitchFamily="34" charset="-120"/>
               </a:rPr>
-              <a:t>The team reviews exceptions instead of matching items</a:t>
+              <a:t>Exceptions reviewed, not items matched</a:t>
             </a:r>
             <a:endParaRPr lang="en-US" sz="1300" dirty="0"/>
           </a:p>
@@ -13331,7 +12879,7 @@
         </p:nvSpPr>
         <p:spPr>
           <a:xfrm>
-            <a:off x="4201668" y="5426964"/>
+            <a:off x="4201668" y="5015484"/>
             <a:ext cx="82296" cy="82296"/>
           </a:xfrm>
           <a:prstGeom prst="ellipse">
@@ -13351,7 +12899,7 @@
         </p:nvSpPr>
         <p:spPr>
           <a:xfrm>
-            <a:off x="7904988" y="5426964"/>
+            <a:off x="7904988" y="5015484"/>
             <a:ext cx="82296" cy="82296"/>
           </a:xfrm>
           <a:prstGeom prst="ellipse">
@@ -13692,7 +13240,7 @@
                 <a:ea typeface="Inter" pitchFamily="34" charset="-122"/>
                 <a:cs typeface="Inter" pitchFamily="34" charset="-120"/>
               </a:rPr>
-              <a:t>FI, CO, PA and PS as one process architecture, not five.</a:t>
+              <a:t>FI · CO · PA · PS</a:t>
             </a:r>
             <a:endParaRPr lang="en-US" sz="1150" dirty="0"/>
           </a:p>
@@ -13813,7 +13361,7 @@
                 <a:ea typeface="Inter" pitchFamily="34" charset="-122"/>
                 <a:cs typeface="Inter" pitchFamily="34" charset="-120"/>
               </a:rPr>
-              <a:t>Brownfield, greenfield or selective transition, decided on evidence.</a:t>
+              <a:t>Brownfield · Greenfield · Selective transition</a:t>
             </a:r>
             <a:endParaRPr lang="en-US" sz="1150" dirty="0"/>
           </a:p>
@@ -13934,7 +13482,7 @@
                 <a:ea typeface="Inter" pitchFamily="34" charset="-122"/>
                 <a:cs typeface="Inter" pitchFamily="34" charset="-120"/>
               </a:rPr>
-              <a:t>How much of your process fits standard scope.</a:t>
+              <a:t>Fit-to-standard assessment and delivery</a:t>
             </a:r>
             <a:endParaRPr lang="en-US" sz="1150" dirty="0"/>
           </a:p>
@@ -14055,7 +13603,7 @@
                 <a:ea typeface="Inter" pitchFamily="34" charset="-122"/>
                 <a:cs typeface="Inter" pitchFamily="34" charset="-120"/>
               </a:rPr>
-              <a:t>Architecture, migration and the boundaries RISE leaves open.</a:t>
+              <a:t>RISE architecture and migration</a:t>
             </a:r>
             <a:endParaRPr lang="en-US" sz="1150" dirty="0"/>
           </a:p>
@@ -14176,7 +13724,7 @@
                 <a:ea typeface="Inter" pitchFamily="34" charset="-122"/>
                 <a:cs typeface="Inter" pitchFamily="34" charset="-120"/>
               </a:rPr>
-              <a:t>The capabilities your data and discipline can actually support.</a:t>
+              <a:t>Matching · Anomaly detection · Prediction</a:t>
             </a:r>
             <a:endParaRPr lang="en-US" sz="1150" dirty="0"/>
           </a:p>
